--- a/PPT/el.pptx
+++ b/PPT/el.pptx
@@ -3,21 +3,22 @@
 <p:presentation xmlns:a="http://schemas.openxmlformats.org/drawingml/2006/main" xmlns:r="http://schemas.openxmlformats.org/officeDocument/2006/relationships" xmlns:p="http://schemas.openxmlformats.org/presentationml/2006/main">
   <p:sldMasterIdLst>
     <p:sldMasterId id="2147483648" r:id="rId1"/>
-    <p:sldMasterId id="2147483660" r:id="rId2"/>
+    <p:sldMasterId id="2147483660" r:id="rId3"/>
   </p:sldMasterIdLst>
   <p:sldIdLst>
-    <p:sldId id="256" r:id="rId3"/>
-    <p:sldId id="257" r:id="rId4"/>
-    <p:sldId id="258" r:id="rId5"/>
-    <p:sldId id="259" r:id="rId6"/>
-    <p:sldId id="260" r:id="rId7"/>
-    <p:sldId id="261" r:id="rId8"/>
-    <p:sldId id="262" r:id="rId9"/>
+    <p:sldId id="256" r:id="rId4"/>
+    <p:sldId id="257" r:id="rId5"/>
+    <p:sldId id="263" r:id="rId6"/>
+    <p:sldId id="258" r:id="rId7"/>
+    <p:sldId id="259" r:id="rId8"/>
+    <p:sldId id="260" r:id="rId9"/>
+    <p:sldId id="261" r:id="rId10"/>
+    <p:sldId id="262" r:id="rId11"/>
   </p:sldIdLst>
   <p:sldSz cx="12192000" cy="6858000"/>
   <p:notesSz cx="6858000" cy="9144000"/>
   <p:custDataLst>
-    <p:tags r:id="rId10"/>
+    <p:tags r:id="rId15"/>
   </p:custDataLst>
   <p:defaultTextStyle>
     <a:defPPr>
@@ -114,11 +115,6 @@
       </a:defRPr>
     </a:lvl9pPr>
   </p:defaultTextStyle>
-  <p:extLst>
-    <p:ext uri="{EFAFB233-063F-42B5-8137-9DF3F51BA10A}">
-      <p15:sldGuideLst xmlns:p15="http://schemas.microsoft.com/office/powerpoint/2012/main"/>
-    </p:ext>
-  </p:extLst>
 </p:presentation>
 </file>
 
@@ -167,6 +163,7 @@
               <a:rPr lang="zh-CN" altLang="en-US"/>
               <a:t>单击此处编辑母版标题样式</a:t>
             </a:r>
+            <a:endParaRPr lang="zh-CN" altLang="en-US"/>
           </a:p>
         </p:txBody>
       </p:sp>
@@ -231,6 +228,7 @@
               <a:rPr lang="zh-CN" altLang="en-US"/>
               <a:t>单击此处编辑母版副标题样式</a:t>
             </a:r>
+            <a:endParaRPr lang="zh-CN" altLang="en-US"/>
           </a:p>
         </p:txBody>
       </p:sp>
@@ -251,7 +249,6 @@
           <a:p>
             <a:fld id="{0E3CF729-EF3B-40C4-90BC-C2086AADCC60}" type="datetimeFigureOut">
               <a:rPr lang="zh-CN" altLang="en-US" smtClean="0"/>
-              <a:t>2024-05-30</a:t>
             </a:fld>
             <a:endParaRPr lang="zh-CN" altLang="en-US"/>
           </a:p>
@@ -293,7 +290,6 @@
           <a:p>
             <a:fld id="{EC58ADBA-A0F5-48D7-ABCF-49CF523FE9C6}" type="slidenum">
               <a:rPr lang="zh-CN" altLang="en-US" smtClean="0"/>
-              <a:t>‹#›</a:t>
             </a:fld>
             <a:endParaRPr lang="zh-CN" altLang="en-US"/>
           </a:p>
@@ -343,6 +339,7 @@
               <a:rPr lang="zh-CN" altLang="en-US"/>
               <a:t>单击此处编辑母版标题样式</a:t>
             </a:r>
+            <a:endParaRPr lang="zh-CN" altLang="en-US"/>
           </a:p>
         </p:txBody>
       </p:sp>
@@ -366,6 +363,7 @@
               <a:rPr lang="zh-CN" altLang="en-US"/>
               <a:t>单击此处编辑母版文本样式</a:t>
             </a:r>
+            <a:endParaRPr lang="zh-CN" altLang="en-US"/>
           </a:p>
           <a:p>
             <a:pPr lvl="1"/>
@@ -373,6 +371,7 @@
               <a:rPr lang="zh-CN" altLang="en-US"/>
               <a:t>二级</a:t>
             </a:r>
+            <a:endParaRPr lang="zh-CN" altLang="en-US"/>
           </a:p>
           <a:p>
             <a:pPr lvl="2"/>
@@ -380,6 +379,7 @@
               <a:rPr lang="zh-CN" altLang="en-US"/>
               <a:t>三级</a:t>
             </a:r>
+            <a:endParaRPr lang="zh-CN" altLang="en-US"/>
           </a:p>
           <a:p>
             <a:pPr lvl="3"/>
@@ -387,6 +387,7 @@
               <a:rPr lang="zh-CN" altLang="en-US"/>
               <a:t>四级</a:t>
             </a:r>
+            <a:endParaRPr lang="zh-CN" altLang="en-US"/>
           </a:p>
           <a:p>
             <a:pPr lvl="4"/>
@@ -394,6 +395,7 @@
               <a:rPr lang="zh-CN" altLang="en-US"/>
               <a:t>五级</a:t>
             </a:r>
+            <a:endParaRPr lang="zh-CN" altLang="en-US"/>
           </a:p>
         </p:txBody>
       </p:sp>
@@ -414,7 +416,6 @@
           <a:p>
             <a:fld id="{0E3CF729-EF3B-40C4-90BC-C2086AADCC60}" type="datetimeFigureOut">
               <a:rPr lang="zh-CN" altLang="en-US" smtClean="0"/>
-              <a:t>2024-05-30</a:t>
             </a:fld>
             <a:endParaRPr lang="zh-CN" altLang="en-US"/>
           </a:p>
@@ -456,7 +457,6 @@
           <a:p>
             <a:fld id="{EC58ADBA-A0F5-48D7-ABCF-49CF523FE9C6}" type="slidenum">
               <a:rPr lang="zh-CN" altLang="en-US" smtClean="0"/>
-              <a:t>‹#›</a:t>
             </a:fld>
             <a:endParaRPr lang="zh-CN" altLang="en-US"/>
           </a:p>
@@ -511,6 +511,7 @@
               <a:rPr lang="zh-CN" altLang="en-US"/>
               <a:t>单击此处编辑母版标题样式</a:t>
             </a:r>
+            <a:endParaRPr lang="zh-CN" altLang="en-US"/>
           </a:p>
         </p:txBody>
       </p:sp>
@@ -539,6 +540,7 @@
               <a:rPr lang="zh-CN" altLang="en-US"/>
               <a:t>单击此处编辑母版文本样式</a:t>
             </a:r>
+            <a:endParaRPr lang="zh-CN" altLang="en-US"/>
           </a:p>
           <a:p>
             <a:pPr lvl="1"/>
@@ -546,6 +548,7 @@
               <a:rPr lang="zh-CN" altLang="en-US"/>
               <a:t>二级</a:t>
             </a:r>
+            <a:endParaRPr lang="zh-CN" altLang="en-US"/>
           </a:p>
           <a:p>
             <a:pPr lvl="2"/>
@@ -553,6 +556,7 @@
               <a:rPr lang="zh-CN" altLang="en-US"/>
               <a:t>三级</a:t>
             </a:r>
+            <a:endParaRPr lang="zh-CN" altLang="en-US"/>
           </a:p>
           <a:p>
             <a:pPr lvl="3"/>
@@ -560,6 +564,7 @@
               <a:rPr lang="zh-CN" altLang="en-US"/>
               <a:t>四级</a:t>
             </a:r>
+            <a:endParaRPr lang="zh-CN" altLang="en-US"/>
           </a:p>
           <a:p>
             <a:pPr lvl="4"/>
@@ -567,6 +572,7 @@
               <a:rPr lang="zh-CN" altLang="en-US"/>
               <a:t>五级</a:t>
             </a:r>
+            <a:endParaRPr lang="zh-CN" altLang="en-US"/>
           </a:p>
         </p:txBody>
       </p:sp>
@@ -587,7 +593,6 @@
           <a:p>
             <a:fld id="{0E3CF729-EF3B-40C4-90BC-C2086AADCC60}" type="datetimeFigureOut">
               <a:rPr lang="zh-CN" altLang="en-US" smtClean="0"/>
-              <a:t>2024-05-30</a:t>
             </a:fld>
             <a:endParaRPr lang="zh-CN" altLang="en-US"/>
           </a:p>
@@ -629,7 +634,6 @@
           <a:p>
             <a:fld id="{EC58ADBA-A0F5-48D7-ABCF-49CF523FE9C6}" type="slidenum">
               <a:rPr lang="zh-CN" altLang="en-US" smtClean="0"/>
-              <a:t>‹#›</a:t>
             </a:fld>
             <a:endParaRPr lang="zh-CN" altLang="en-US"/>
           </a:p>
@@ -688,6 +692,7 @@
               <a:rPr lang="zh-CN" altLang="en-US"/>
               <a:t>单击此处编辑母版标题样式</a:t>
             </a:r>
+            <a:endParaRPr lang="zh-CN" altLang="en-US"/>
           </a:p>
         </p:txBody>
       </p:sp>
@@ -752,6 +757,7 @@
               <a:rPr lang="zh-CN" altLang="en-US"/>
               <a:t>单击此处编辑母版副标题样式</a:t>
             </a:r>
+            <a:endParaRPr lang="zh-CN" altLang="en-US"/>
           </a:p>
         </p:txBody>
       </p:sp>
@@ -772,7 +778,6 @@
           <a:p>
             <a:fld id="{0E3CF729-EF3B-40C4-90BC-C2086AADCC60}" type="datetimeFigureOut">
               <a:rPr lang="zh-CN" altLang="en-US" smtClean="0"/>
-              <a:t>2024-05-30</a:t>
             </a:fld>
             <a:endParaRPr lang="zh-CN" altLang="en-US"/>
           </a:p>
@@ -814,7 +819,6 @@
           <a:p>
             <a:fld id="{EC58ADBA-A0F5-48D7-ABCF-49CF523FE9C6}" type="slidenum">
               <a:rPr lang="zh-CN" altLang="en-US" smtClean="0"/>
-              <a:t>‹#›</a:t>
             </a:fld>
             <a:endParaRPr lang="zh-CN" altLang="en-US"/>
           </a:p>
@@ -864,6 +868,7 @@
               <a:rPr lang="zh-CN" altLang="en-US"/>
               <a:t>单击此处编辑母版标题样式</a:t>
             </a:r>
+            <a:endParaRPr lang="zh-CN" altLang="en-US"/>
           </a:p>
         </p:txBody>
       </p:sp>
@@ -887,6 +892,7 @@
               <a:rPr lang="zh-CN" altLang="en-US"/>
               <a:t>单击此处编辑母版文本样式</a:t>
             </a:r>
+            <a:endParaRPr lang="zh-CN" altLang="en-US"/>
           </a:p>
           <a:p>
             <a:pPr lvl="1"/>
@@ -894,6 +900,7 @@
               <a:rPr lang="zh-CN" altLang="en-US"/>
               <a:t>二级</a:t>
             </a:r>
+            <a:endParaRPr lang="zh-CN" altLang="en-US"/>
           </a:p>
           <a:p>
             <a:pPr lvl="2"/>
@@ -901,6 +908,7 @@
               <a:rPr lang="zh-CN" altLang="en-US"/>
               <a:t>三级</a:t>
             </a:r>
+            <a:endParaRPr lang="zh-CN" altLang="en-US"/>
           </a:p>
           <a:p>
             <a:pPr lvl="3"/>
@@ -908,6 +916,7 @@
               <a:rPr lang="zh-CN" altLang="en-US"/>
               <a:t>四级</a:t>
             </a:r>
+            <a:endParaRPr lang="zh-CN" altLang="en-US"/>
           </a:p>
           <a:p>
             <a:pPr lvl="4"/>
@@ -915,6 +924,7 @@
               <a:rPr lang="zh-CN" altLang="en-US"/>
               <a:t>五级</a:t>
             </a:r>
+            <a:endParaRPr lang="zh-CN" altLang="en-US"/>
           </a:p>
         </p:txBody>
       </p:sp>
@@ -935,7 +945,6 @@
           <a:p>
             <a:fld id="{0E3CF729-EF3B-40C4-90BC-C2086AADCC60}" type="datetimeFigureOut">
               <a:rPr lang="zh-CN" altLang="en-US" smtClean="0"/>
-              <a:t>2024-05-30</a:t>
             </a:fld>
             <a:endParaRPr lang="zh-CN" altLang="en-US"/>
           </a:p>
@@ -977,7 +986,6 @@
           <a:p>
             <a:fld id="{EC58ADBA-A0F5-48D7-ABCF-49CF523FE9C6}" type="slidenum">
               <a:rPr lang="zh-CN" altLang="en-US" smtClean="0"/>
-              <a:t>‹#›</a:t>
             </a:fld>
             <a:endParaRPr lang="zh-CN" altLang="en-US"/>
           </a:p>
@@ -1036,6 +1044,7 @@
               <a:rPr lang="zh-CN" altLang="en-US"/>
               <a:t>单击此处编辑母版标题样式</a:t>
             </a:r>
+            <a:endParaRPr lang="zh-CN" altLang="en-US"/>
           </a:p>
         </p:txBody>
       </p:sp>
@@ -1155,6 +1164,7 @@
               <a:rPr lang="zh-CN" altLang="en-US"/>
               <a:t>单击此处编辑母版文本样式</a:t>
             </a:r>
+            <a:endParaRPr lang="zh-CN" altLang="en-US"/>
           </a:p>
         </p:txBody>
       </p:sp>
@@ -1175,7 +1185,6 @@
           <a:p>
             <a:fld id="{0E3CF729-EF3B-40C4-90BC-C2086AADCC60}" type="datetimeFigureOut">
               <a:rPr lang="zh-CN" altLang="en-US" smtClean="0"/>
-              <a:t>2024-05-30</a:t>
             </a:fld>
             <a:endParaRPr lang="zh-CN" altLang="en-US"/>
           </a:p>
@@ -1217,7 +1226,6 @@
           <a:p>
             <a:fld id="{EC58ADBA-A0F5-48D7-ABCF-49CF523FE9C6}" type="slidenum">
               <a:rPr lang="zh-CN" altLang="en-US" smtClean="0"/>
-              <a:t>‹#›</a:t>
             </a:fld>
             <a:endParaRPr lang="zh-CN" altLang="en-US"/>
           </a:p>
@@ -1267,6 +1275,7 @@
               <a:rPr lang="zh-CN" altLang="en-US"/>
               <a:t>单击此处编辑母版标题样式</a:t>
             </a:r>
+            <a:endParaRPr lang="zh-CN" altLang="en-US"/>
           </a:p>
         </p:txBody>
       </p:sp>
@@ -1295,6 +1304,7 @@
               <a:rPr lang="zh-CN" altLang="en-US"/>
               <a:t>单击此处编辑母版文本样式</a:t>
             </a:r>
+            <a:endParaRPr lang="zh-CN" altLang="en-US"/>
           </a:p>
           <a:p>
             <a:pPr lvl="1"/>
@@ -1302,6 +1312,7 @@
               <a:rPr lang="zh-CN" altLang="en-US"/>
               <a:t>二级</a:t>
             </a:r>
+            <a:endParaRPr lang="zh-CN" altLang="en-US"/>
           </a:p>
           <a:p>
             <a:pPr lvl="2"/>
@@ -1309,6 +1320,7 @@
               <a:rPr lang="zh-CN" altLang="en-US"/>
               <a:t>三级</a:t>
             </a:r>
+            <a:endParaRPr lang="zh-CN" altLang="en-US"/>
           </a:p>
           <a:p>
             <a:pPr lvl="3"/>
@@ -1316,6 +1328,7 @@
               <a:rPr lang="zh-CN" altLang="en-US"/>
               <a:t>四级</a:t>
             </a:r>
+            <a:endParaRPr lang="zh-CN" altLang="en-US"/>
           </a:p>
           <a:p>
             <a:pPr lvl="4"/>
@@ -1323,6 +1336,7 @@
               <a:rPr lang="zh-CN" altLang="en-US"/>
               <a:t>五级</a:t>
             </a:r>
+            <a:endParaRPr lang="zh-CN" altLang="en-US"/>
           </a:p>
         </p:txBody>
       </p:sp>
@@ -1351,6 +1365,7 @@
               <a:rPr lang="zh-CN" altLang="en-US"/>
               <a:t>单击此处编辑母版文本样式</a:t>
             </a:r>
+            <a:endParaRPr lang="zh-CN" altLang="en-US"/>
           </a:p>
           <a:p>
             <a:pPr lvl="1"/>
@@ -1358,6 +1373,7 @@
               <a:rPr lang="zh-CN" altLang="en-US"/>
               <a:t>二级</a:t>
             </a:r>
+            <a:endParaRPr lang="zh-CN" altLang="en-US"/>
           </a:p>
           <a:p>
             <a:pPr lvl="2"/>
@@ -1365,6 +1381,7 @@
               <a:rPr lang="zh-CN" altLang="en-US"/>
               <a:t>三级</a:t>
             </a:r>
+            <a:endParaRPr lang="zh-CN" altLang="en-US"/>
           </a:p>
           <a:p>
             <a:pPr lvl="3"/>
@@ -1372,6 +1389,7 @@
               <a:rPr lang="zh-CN" altLang="en-US"/>
               <a:t>四级</a:t>
             </a:r>
+            <a:endParaRPr lang="zh-CN" altLang="en-US"/>
           </a:p>
           <a:p>
             <a:pPr lvl="4"/>
@@ -1379,6 +1397,7 @@
               <a:rPr lang="zh-CN" altLang="en-US"/>
               <a:t>五级</a:t>
             </a:r>
+            <a:endParaRPr lang="zh-CN" altLang="en-US"/>
           </a:p>
         </p:txBody>
       </p:sp>
@@ -1399,7 +1418,6 @@
           <a:p>
             <a:fld id="{0E3CF729-EF3B-40C4-90BC-C2086AADCC60}" type="datetimeFigureOut">
               <a:rPr lang="zh-CN" altLang="en-US" smtClean="0"/>
-              <a:t>2024-05-30</a:t>
             </a:fld>
             <a:endParaRPr lang="zh-CN" altLang="en-US"/>
           </a:p>
@@ -1441,7 +1459,6 @@
           <a:p>
             <a:fld id="{EC58ADBA-A0F5-48D7-ABCF-49CF523FE9C6}" type="slidenum">
               <a:rPr lang="zh-CN" altLang="en-US" smtClean="0"/>
-              <a:t>‹#›</a:t>
             </a:fld>
             <a:endParaRPr lang="zh-CN" altLang="en-US"/>
           </a:p>
@@ -1496,6 +1513,7 @@
               <a:rPr lang="zh-CN" altLang="en-US"/>
               <a:t>单击此处编辑母版标题样式</a:t>
             </a:r>
+            <a:endParaRPr lang="zh-CN" altLang="en-US"/>
           </a:p>
         </p:txBody>
       </p:sp>
@@ -1561,6 +1579,7 @@
               <a:rPr lang="zh-CN" altLang="en-US"/>
               <a:t>单击此处编辑母版文本样式</a:t>
             </a:r>
+            <a:endParaRPr lang="zh-CN" altLang="en-US"/>
           </a:p>
         </p:txBody>
       </p:sp>
@@ -1589,6 +1608,7 @@
               <a:rPr lang="zh-CN" altLang="en-US"/>
               <a:t>单击此处编辑母版文本样式</a:t>
             </a:r>
+            <a:endParaRPr lang="zh-CN" altLang="en-US"/>
           </a:p>
           <a:p>
             <a:pPr lvl="1"/>
@@ -1596,6 +1616,7 @@
               <a:rPr lang="zh-CN" altLang="en-US"/>
               <a:t>二级</a:t>
             </a:r>
+            <a:endParaRPr lang="zh-CN" altLang="en-US"/>
           </a:p>
           <a:p>
             <a:pPr lvl="2"/>
@@ -1603,6 +1624,7 @@
               <a:rPr lang="zh-CN" altLang="en-US"/>
               <a:t>三级</a:t>
             </a:r>
+            <a:endParaRPr lang="zh-CN" altLang="en-US"/>
           </a:p>
           <a:p>
             <a:pPr lvl="3"/>
@@ -1610,6 +1632,7 @@
               <a:rPr lang="zh-CN" altLang="en-US"/>
               <a:t>四级</a:t>
             </a:r>
+            <a:endParaRPr lang="zh-CN" altLang="en-US"/>
           </a:p>
           <a:p>
             <a:pPr lvl="4"/>
@@ -1617,6 +1640,7 @@
               <a:rPr lang="zh-CN" altLang="en-US"/>
               <a:t>五级</a:t>
             </a:r>
+            <a:endParaRPr lang="zh-CN" altLang="en-US"/>
           </a:p>
         </p:txBody>
       </p:sp>
@@ -1682,6 +1706,7 @@
               <a:rPr lang="zh-CN" altLang="en-US"/>
               <a:t>单击此处编辑母版文本样式</a:t>
             </a:r>
+            <a:endParaRPr lang="zh-CN" altLang="en-US"/>
           </a:p>
         </p:txBody>
       </p:sp>
@@ -1710,6 +1735,7 @@
               <a:rPr lang="zh-CN" altLang="en-US"/>
               <a:t>单击此处编辑母版文本样式</a:t>
             </a:r>
+            <a:endParaRPr lang="zh-CN" altLang="en-US"/>
           </a:p>
           <a:p>
             <a:pPr lvl="1"/>
@@ -1717,6 +1743,7 @@
               <a:rPr lang="zh-CN" altLang="en-US"/>
               <a:t>二级</a:t>
             </a:r>
+            <a:endParaRPr lang="zh-CN" altLang="en-US"/>
           </a:p>
           <a:p>
             <a:pPr lvl="2"/>
@@ -1724,6 +1751,7 @@
               <a:rPr lang="zh-CN" altLang="en-US"/>
               <a:t>三级</a:t>
             </a:r>
+            <a:endParaRPr lang="zh-CN" altLang="en-US"/>
           </a:p>
           <a:p>
             <a:pPr lvl="3"/>
@@ -1731,6 +1759,7 @@
               <a:rPr lang="zh-CN" altLang="en-US"/>
               <a:t>四级</a:t>
             </a:r>
+            <a:endParaRPr lang="zh-CN" altLang="en-US"/>
           </a:p>
           <a:p>
             <a:pPr lvl="4"/>
@@ -1738,6 +1767,7 @@
               <a:rPr lang="zh-CN" altLang="en-US"/>
               <a:t>五级</a:t>
             </a:r>
+            <a:endParaRPr lang="zh-CN" altLang="en-US"/>
           </a:p>
         </p:txBody>
       </p:sp>
@@ -1758,7 +1788,6 @@
           <a:p>
             <a:fld id="{0E3CF729-EF3B-40C4-90BC-C2086AADCC60}" type="datetimeFigureOut">
               <a:rPr lang="zh-CN" altLang="en-US" smtClean="0"/>
-              <a:t>2024-05-30</a:t>
             </a:fld>
             <a:endParaRPr lang="zh-CN" altLang="en-US"/>
           </a:p>
@@ -1800,7 +1829,6 @@
           <a:p>
             <a:fld id="{EC58ADBA-A0F5-48D7-ABCF-49CF523FE9C6}" type="slidenum">
               <a:rPr lang="zh-CN" altLang="en-US" smtClean="0"/>
-              <a:t>‹#›</a:t>
             </a:fld>
             <a:endParaRPr lang="zh-CN" altLang="en-US"/>
           </a:p>
@@ -1850,6 +1878,7 @@
               <a:rPr lang="zh-CN" altLang="en-US"/>
               <a:t>单击此处编辑母版标题样式</a:t>
             </a:r>
+            <a:endParaRPr lang="zh-CN" altLang="en-US"/>
           </a:p>
         </p:txBody>
       </p:sp>
@@ -1870,7 +1899,6 @@
           <a:p>
             <a:fld id="{0E3CF729-EF3B-40C4-90BC-C2086AADCC60}" type="datetimeFigureOut">
               <a:rPr lang="zh-CN" altLang="en-US" smtClean="0"/>
-              <a:t>2024-05-30</a:t>
             </a:fld>
             <a:endParaRPr lang="zh-CN" altLang="en-US"/>
           </a:p>
@@ -1912,7 +1940,6 @@
           <a:p>
             <a:fld id="{EC58ADBA-A0F5-48D7-ABCF-49CF523FE9C6}" type="slidenum">
               <a:rPr lang="zh-CN" altLang="en-US" smtClean="0"/>
-              <a:t>‹#›</a:t>
             </a:fld>
             <a:endParaRPr lang="zh-CN" altLang="en-US"/>
           </a:p>
@@ -1960,7 +1987,6 @@
           <a:p>
             <a:fld id="{0E3CF729-EF3B-40C4-90BC-C2086AADCC60}" type="datetimeFigureOut">
               <a:rPr lang="zh-CN" altLang="en-US" smtClean="0"/>
-              <a:t>2024-05-30</a:t>
             </a:fld>
             <a:endParaRPr lang="zh-CN" altLang="en-US"/>
           </a:p>
@@ -2002,7 +2028,6 @@
           <a:p>
             <a:fld id="{EC58ADBA-A0F5-48D7-ABCF-49CF523FE9C6}" type="slidenum">
               <a:rPr lang="zh-CN" altLang="en-US" smtClean="0"/>
-              <a:t>‹#›</a:t>
             </a:fld>
             <a:endParaRPr lang="zh-CN" altLang="en-US"/>
           </a:p>
@@ -2061,6 +2086,7 @@
               <a:rPr lang="zh-CN" altLang="en-US"/>
               <a:t>单击此处编辑母版标题样式</a:t>
             </a:r>
+            <a:endParaRPr lang="zh-CN" altLang="en-US"/>
           </a:p>
         </p:txBody>
       </p:sp>
@@ -2117,6 +2143,7 @@
               <a:rPr lang="zh-CN" altLang="en-US"/>
               <a:t>单击此处编辑母版文本样式</a:t>
             </a:r>
+            <a:endParaRPr lang="zh-CN" altLang="en-US"/>
           </a:p>
           <a:p>
             <a:pPr lvl="1"/>
@@ -2124,6 +2151,7 @@
               <a:rPr lang="zh-CN" altLang="en-US"/>
               <a:t>二级</a:t>
             </a:r>
+            <a:endParaRPr lang="zh-CN" altLang="en-US"/>
           </a:p>
           <a:p>
             <a:pPr lvl="2"/>
@@ -2131,6 +2159,7 @@
               <a:rPr lang="zh-CN" altLang="en-US"/>
               <a:t>三级</a:t>
             </a:r>
+            <a:endParaRPr lang="zh-CN" altLang="en-US"/>
           </a:p>
           <a:p>
             <a:pPr lvl="3"/>
@@ -2138,6 +2167,7 @@
               <a:rPr lang="zh-CN" altLang="en-US"/>
               <a:t>四级</a:t>
             </a:r>
+            <a:endParaRPr lang="zh-CN" altLang="en-US"/>
           </a:p>
           <a:p>
             <a:pPr lvl="4"/>
@@ -2145,6 +2175,7 @@
               <a:rPr lang="zh-CN" altLang="en-US"/>
               <a:t>五级</a:t>
             </a:r>
+            <a:endParaRPr lang="zh-CN" altLang="en-US"/>
           </a:p>
         </p:txBody>
       </p:sp>
@@ -2210,6 +2241,7 @@
               <a:rPr lang="zh-CN" altLang="en-US"/>
               <a:t>单击此处编辑母版文本样式</a:t>
             </a:r>
+            <a:endParaRPr lang="zh-CN" altLang="en-US"/>
           </a:p>
         </p:txBody>
       </p:sp>
@@ -2230,7 +2262,6 @@
           <a:p>
             <a:fld id="{0E3CF729-EF3B-40C4-90BC-C2086AADCC60}" type="datetimeFigureOut">
               <a:rPr lang="zh-CN" altLang="en-US" smtClean="0"/>
-              <a:t>2024-05-30</a:t>
             </a:fld>
             <a:endParaRPr lang="zh-CN" altLang="en-US"/>
           </a:p>
@@ -2272,7 +2303,6 @@
           <a:p>
             <a:fld id="{EC58ADBA-A0F5-48D7-ABCF-49CF523FE9C6}" type="slidenum">
               <a:rPr lang="zh-CN" altLang="en-US" smtClean="0"/>
-              <a:t>‹#›</a:t>
             </a:fld>
             <a:endParaRPr lang="zh-CN" altLang="en-US"/>
           </a:p>
@@ -2322,6 +2352,7 @@
               <a:rPr lang="zh-CN" altLang="en-US"/>
               <a:t>单击此处编辑母版标题样式</a:t>
             </a:r>
+            <a:endParaRPr lang="zh-CN" altLang="en-US"/>
           </a:p>
         </p:txBody>
       </p:sp>
@@ -2345,6 +2376,7 @@
               <a:rPr lang="zh-CN" altLang="en-US"/>
               <a:t>单击此处编辑母版文本样式</a:t>
             </a:r>
+            <a:endParaRPr lang="zh-CN" altLang="en-US"/>
           </a:p>
           <a:p>
             <a:pPr lvl="1"/>
@@ -2352,6 +2384,7 @@
               <a:rPr lang="zh-CN" altLang="en-US"/>
               <a:t>二级</a:t>
             </a:r>
+            <a:endParaRPr lang="zh-CN" altLang="en-US"/>
           </a:p>
           <a:p>
             <a:pPr lvl="2"/>
@@ -2359,6 +2392,7 @@
               <a:rPr lang="zh-CN" altLang="en-US"/>
               <a:t>三级</a:t>
             </a:r>
+            <a:endParaRPr lang="zh-CN" altLang="en-US"/>
           </a:p>
           <a:p>
             <a:pPr lvl="3"/>
@@ -2366,6 +2400,7 @@
               <a:rPr lang="zh-CN" altLang="en-US"/>
               <a:t>四级</a:t>
             </a:r>
+            <a:endParaRPr lang="zh-CN" altLang="en-US"/>
           </a:p>
           <a:p>
             <a:pPr lvl="4"/>
@@ -2373,6 +2408,7 @@
               <a:rPr lang="zh-CN" altLang="en-US"/>
               <a:t>五级</a:t>
             </a:r>
+            <a:endParaRPr lang="zh-CN" altLang="en-US"/>
           </a:p>
         </p:txBody>
       </p:sp>
@@ -2393,7 +2429,6 @@
           <a:p>
             <a:fld id="{0E3CF729-EF3B-40C4-90BC-C2086AADCC60}" type="datetimeFigureOut">
               <a:rPr lang="zh-CN" altLang="en-US" smtClean="0"/>
-              <a:t>2024-05-30</a:t>
             </a:fld>
             <a:endParaRPr lang="zh-CN" altLang="en-US"/>
           </a:p>
@@ -2435,7 +2470,6 @@
           <a:p>
             <a:fld id="{EC58ADBA-A0F5-48D7-ABCF-49CF523FE9C6}" type="slidenum">
               <a:rPr lang="zh-CN" altLang="en-US" smtClean="0"/>
-              <a:t>‹#›</a:t>
             </a:fld>
             <a:endParaRPr lang="zh-CN" altLang="en-US"/>
           </a:p>
@@ -2494,6 +2528,7 @@
               <a:rPr lang="zh-CN" altLang="en-US"/>
               <a:t>单击此处编辑母版标题样式</a:t>
             </a:r>
+            <a:endParaRPr lang="zh-CN" altLang="en-US"/>
           </a:p>
         </p:txBody>
       </p:sp>
@@ -2620,6 +2655,7 @@
               <a:rPr lang="zh-CN" altLang="en-US"/>
               <a:t>单击此处编辑母版文本样式</a:t>
             </a:r>
+            <a:endParaRPr lang="zh-CN" altLang="en-US"/>
           </a:p>
         </p:txBody>
       </p:sp>
@@ -2640,7 +2676,6 @@
           <a:p>
             <a:fld id="{0E3CF729-EF3B-40C4-90BC-C2086AADCC60}" type="datetimeFigureOut">
               <a:rPr lang="zh-CN" altLang="en-US" smtClean="0"/>
-              <a:t>2024-05-30</a:t>
             </a:fld>
             <a:endParaRPr lang="zh-CN" altLang="en-US"/>
           </a:p>
@@ -2682,7 +2717,6 @@
           <a:p>
             <a:fld id="{EC58ADBA-A0F5-48D7-ABCF-49CF523FE9C6}" type="slidenum">
               <a:rPr lang="zh-CN" altLang="en-US" smtClean="0"/>
-              <a:t>‹#›</a:t>
             </a:fld>
             <a:endParaRPr lang="zh-CN" altLang="en-US"/>
           </a:p>
@@ -2732,6 +2766,7 @@
               <a:rPr lang="zh-CN" altLang="en-US"/>
               <a:t>单击此处编辑母版标题样式</a:t>
             </a:r>
+            <a:endParaRPr lang="zh-CN" altLang="en-US"/>
           </a:p>
         </p:txBody>
       </p:sp>
@@ -2755,6 +2790,7 @@
               <a:rPr lang="zh-CN" altLang="en-US"/>
               <a:t>单击此处编辑母版文本样式</a:t>
             </a:r>
+            <a:endParaRPr lang="zh-CN" altLang="en-US"/>
           </a:p>
           <a:p>
             <a:pPr lvl="1"/>
@@ -2762,6 +2798,7 @@
               <a:rPr lang="zh-CN" altLang="en-US"/>
               <a:t>二级</a:t>
             </a:r>
+            <a:endParaRPr lang="zh-CN" altLang="en-US"/>
           </a:p>
           <a:p>
             <a:pPr lvl="2"/>
@@ -2769,6 +2806,7 @@
               <a:rPr lang="zh-CN" altLang="en-US"/>
               <a:t>三级</a:t>
             </a:r>
+            <a:endParaRPr lang="zh-CN" altLang="en-US"/>
           </a:p>
           <a:p>
             <a:pPr lvl="3"/>
@@ -2776,6 +2814,7 @@
               <a:rPr lang="zh-CN" altLang="en-US"/>
               <a:t>四级</a:t>
             </a:r>
+            <a:endParaRPr lang="zh-CN" altLang="en-US"/>
           </a:p>
           <a:p>
             <a:pPr lvl="4"/>
@@ -2783,6 +2822,7 @@
               <a:rPr lang="zh-CN" altLang="en-US"/>
               <a:t>五级</a:t>
             </a:r>
+            <a:endParaRPr lang="zh-CN" altLang="en-US"/>
           </a:p>
         </p:txBody>
       </p:sp>
@@ -2803,7 +2843,6 @@
           <a:p>
             <a:fld id="{0E3CF729-EF3B-40C4-90BC-C2086AADCC60}" type="datetimeFigureOut">
               <a:rPr lang="zh-CN" altLang="en-US" smtClean="0"/>
-              <a:t>2024-05-30</a:t>
             </a:fld>
             <a:endParaRPr lang="zh-CN" altLang="en-US"/>
           </a:p>
@@ -2845,7 +2884,6 @@
           <a:p>
             <a:fld id="{EC58ADBA-A0F5-48D7-ABCF-49CF523FE9C6}" type="slidenum">
               <a:rPr lang="zh-CN" altLang="en-US" smtClean="0"/>
-              <a:t>‹#›</a:t>
             </a:fld>
             <a:endParaRPr lang="zh-CN" altLang="en-US"/>
           </a:p>
@@ -2900,6 +2938,7 @@
               <a:rPr lang="zh-CN" altLang="en-US"/>
               <a:t>单击此处编辑母版标题样式</a:t>
             </a:r>
+            <a:endParaRPr lang="zh-CN" altLang="en-US"/>
           </a:p>
         </p:txBody>
       </p:sp>
@@ -2928,6 +2967,7 @@
               <a:rPr lang="zh-CN" altLang="en-US"/>
               <a:t>单击此处编辑母版文本样式</a:t>
             </a:r>
+            <a:endParaRPr lang="zh-CN" altLang="en-US"/>
           </a:p>
           <a:p>
             <a:pPr lvl="1"/>
@@ -2935,6 +2975,7 @@
               <a:rPr lang="zh-CN" altLang="en-US"/>
               <a:t>二级</a:t>
             </a:r>
+            <a:endParaRPr lang="zh-CN" altLang="en-US"/>
           </a:p>
           <a:p>
             <a:pPr lvl="2"/>
@@ -2942,6 +2983,7 @@
               <a:rPr lang="zh-CN" altLang="en-US"/>
               <a:t>三级</a:t>
             </a:r>
+            <a:endParaRPr lang="zh-CN" altLang="en-US"/>
           </a:p>
           <a:p>
             <a:pPr lvl="3"/>
@@ -2949,6 +2991,7 @@
               <a:rPr lang="zh-CN" altLang="en-US"/>
               <a:t>四级</a:t>
             </a:r>
+            <a:endParaRPr lang="zh-CN" altLang="en-US"/>
           </a:p>
           <a:p>
             <a:pPr lvl="4"/>
@@ -2956,6 +2999,7 @@
               <a:rPr lang="zh-CN" altLang="en-US"/>
               <a:t>五级</a:t>
             </a:r>
+            <a:endParaRPr lang="zh-CN" altLang="en-US"/>
           </a:p>
         </p:txBody>
       </p:sp>
@@ -2976,7 +3020,6 @@
           <a:p>
             <a:fld id="{0E3CF729-EF3B-40C4-90BC-C2086AADCC60}" type="datetimeFigureOut">
               <a:rPr lang="zh-CN" altLang="en-US" smtClean="0"/>
-              <a:t>2024-05-30</a:t>
             </a:fld>
             <a:endParaRPr lang="zh-CN" altLang="en-US"/>
           </a:p>
@@ -3018,7 +3061,6 @@
           <a:p>
             <a:fld id="{EC58ADBA-A0F5-48D7-ABCF-49CF523FE9C6}" type="slidenum">
               <a:rPr lang="zh-CN" altLang="en-US" smtClean="0"/>
-              <a:t>‹#›</a:t>
             </a:fld>
             <a:endParaRPr lang="zh-CN" altLang="en-US"/>
           </a:p>
@@ -3077,6 +3119,7 @@
               <a:rPr lang="zh-CN" altLang="en-US"/>
               <a:t>单击此处编辑母版标题样式</a:t>
             </a:r>
+            <a:endParaRPr lang="zh-CN" altLang="en-US"/>
           </a:p>
         </p:txBody>
       </p:sp>
@@ -3196,6 +3239,7 @@
               <a:rPr lang="zh-CN" altLang="en-US"/>
               <a:t>单击此处编辑母版文本样式</a:t>
             </a:r>
+            <a:endParaRPr lang="zh-CN" altLang="en-US"/>
           </a:p>
         </p:txBody>
       </p:sp>
@@ -3216,7 +3260,6 @@
           <a:p>
             <a:fld id="{0E3CF729-EF3B-40C4-90BC-C2086AADCC60}" type="datetimeFigureOut">
               <a:rPr lang="zh-CN" altLang="en-US" smtClean="0"/>
-              <a:t>2024-05-30</a:t>
             </a:fld>
             <a:endParaRPr lang="zh-CN" altLang="en-US"/>
           </a:p>
@@ -3258,7 +3301,6 @@
           <a:p>
             <a:fld id="{EC58ADBA-A0F5-48D7-ABCF-49CF523FE9C6}" type="slidenum">
               <a:rPr lang="zh-CN" altLang="en-US" smtClean="0"/>
-              <a:t>‹#›</a:t>
             </a:fld>
             <a:endParaRPr lang="zh-CN" altLang="en-US"/>
           </a:p>
@@ -3308,6 +3350,7 @@
               <a:rPr lang="zh-CN" altLang="en-US"/>
               <a:t>单击此处编辑母版标题样式</a:t>
             </a:r>
+            <a:endParaRPr lang="zh-CN" altLang="en-US"/>
           </a:p>
         </p:txBody>
       </p:sp>
@@ -3336,6 +3379,7 @@
               <a:rPr lang="zh-CN" altLang="en-US"/>
               <a:t>单击此处编辑母版文本样式</a:t>
             </a:r>
+            <a:endParaRPr lang="zh-CN" altLang="en-US"/>
           </a:p>
           <a:p>
             <a:pPr lvl="1"/>
@@ -3343,6 +3387,7 @@
               <a:rPr lang="zh-CN" altLang="en-US"/>
               <a:t>二级</a:t>
             </a:r>
+            <a:endParaRPr lang="zh-CN" altLang="en-US"/>
           </a:p>
           <a:p>
             <a:pPr lvl="2"/>
@@ -3350,6 +3395,7 @@
               <a:rPr lang="zh-CN" altLang="en-US"/>
               <a:t>三级</a:t>
             </a:r>
+            <a:endParaRPr lang="zh-CN" altLang="en-US"/>
           </a:p>
           <a:p>
             <a:pPr lvl="3"/>
@@ -3357,6 +3403,7 @@
               <a:rPr lang="zh-CN" altLang="en-US"/>
               <a:t>四级</a:t>
             </a:r>
+            <a:endParaRPr lang="zh-CN" altLang="en-US"/>
           </a:p>
           <a:p>
             <a:pPr lvl="4"/>
@@ -3364,6 +3411,7 @@
               <a:rPr lang="zh-CN" altLang="en-US"/>
               <a:t>五级</a:t>
             </a:r>
+            <a:endParaRPr lang="zh-CN" altLang="en-US"/>
           </a:p>
         </p:txBody>
       </p:sp>
@@ -3392,6 +3440,7 @@
               <a:rPr lang="zh-CN" altLang="en-US"/>
               <a:t>单击此处编辑母版文本样式</a:t>
             </a:r>
+            <a:endParaRPr lang="zh-CN" altLang="en-US"/>
           </a:p>
           <a:p>
             <a:pPr lvl="1"/>
@@ -3399,6 +3448,7 @@
               <a:rPr lang="zh-CN" altLang="en-US"/>
               <a:t>二级</a:t>
             </a:r>
+            <a:endParaRPr lang="zh-CN" altLang="en-US"/>
           </a:p>
           <a:p>
             <a:pPr lvl="2"/>
@@ -3406,6 +3456,7 @@
               <a:rPr lang="zh-CN" altLang="en-US"/>
               <a:t>三级</a:t>
             </a:r>
+            <a:endParaRPr lang="zh-CN" altLang="en-US"/>
           </a:p>
           <a:p>
             <a:pPr lvl="3"/>
@@ -3413,6 +3464,7 @@
               <a:rPr lang="zh-CN" altLang="en-US"/>
               <a:t>四级</a:t>
             </a:r>
+            <a:endParaRPr lang="zh-CN" altLang="en-US"/>
           </a:p>
           <a:p>
             <a:pPr lvl="4"/>
@@ -3420,6 +3472,7 @@
               <a:rPr lang="zh-CN" altLang="en-US"/>
               <a:t>五级</a:t>
             </a:r>
+            <a:endParaRPr lang="zh-CN" altLang="en-US"/>
           </a:p>
         </p:txBody>
       </p:sp>
@@ -3440,7 +3493,6 @@
           <a:p>
             <a:fld id="{0E3CF729-EF3B-40C4-90BC-C2086AADCC60}" type="datetimeFigureOut">
               <a:rPr lang="zh-CN" altLang="en-US" smtClean="0"/>
-              <a:t>2024-05-30</a:t>
             </a:fld>
             <a:endParaRPr lang="zh-CN" altLang="en-US"/>
           </a:p>
@@ -3482,7 +3534,6 @@
           <a:p>
             <a:fld id="{EC58ADBA-A0F5-48D7-ABCF-49CF523FE9C6}" type="slidenum">
               <a:rPr lang="zh-CN" altLang="en-US" smtClean="0"/>
-              <a:t>‹#›</a:t>
             </a:fld>
             <a:endParaRPr lang="zh-CN" altLang="en-US"/>
           </a:p>
@@ -3537,6 +3588,7 @@
               <a:rPr lang="zh-CN" altLang="en-US"/>
               <a:t>单击此处编辑母版标题样式</a:t>
             </a:r>
+            <a:endParaRPr lang="zh-CN" altLang="en-US"/>
           </a:p>
         </p:txBody>
       </p:sp>
@@ -3602,6 +3654,7 @@
               <a:rPr lang="zh-CN" altLang="en-US"/>
               <a:t>单击此处编辑母版文本样式</a:t>
             </a:r>
+            <a:endParaRPr lang="zh-CN" altLang="en-US"/>
           </a:p>
         </p:txBody>
       </p:sp>
@@ -3630,6 +3683,7 @@
               <a:rPr lang="zh-CN" altLang="en-US"/>
               <a:t>单击此处编辑母版文本样式</a:t>
             </a:r>
+            <a:endParaRPr lang="zh-CN" altLang="en-US"/>
           </a:p>
           <a:p>
             <a:pPr lvl="1"/>
@@ -3637,6 +3691,7 @@
               <a:rPr lang="zh-CN" altLang="en-US"/>
               <a:t>二级</a:t>
             </a:r>
+            <a:endParaRPr lang="zh-CN" altLang="en-US"/>
           </a:p>
           <a:p>
             <a:pPr lvl="2"/>
@@ -3644,6 +3699,7 @@
               <a:rPr lang="zh-CN" altLang="en-US"/>
               <a:t>三级</a:t>
             </a:r>
+            <a:endParaRPr lang="zh-CN" altLang="en-US"/>
           </a:p>
           <a:p>
             <a:pPr lvl="3"/>
@@ -3651,6 +3707,7 @@
               <a:rPr lang="zh-CN" altLang="en-US"/>
               <a:t>四级</a:t>
             </a:r>
+            <a:endParaRPr lang="zh-CN" altLang="en-US"/>
           </a:p>
           <a:p>
             <a:pPr lvl="4"/>
@@ -3658,6 +3715,7 @@
               <a:rPr lang="zh-CN" altLang="en-US"/>
               <a:t>五级</a:t>
             </a:r>
+            <a:endParaRPr lang="zh-CN" altLang="en-US"/>
           </a:p>
         </p:txBody>
       </p:sp>
@@ -3723,6 +3781,7 @@
               <a:rPr lang="zh-CN" altLang="en-US"/>
               <a:t>单击此处编辑母版文本样式</a:t>
             </a:r>
+            <a:endParaRPr lang="zh-CN" altLang="en-US"/>
           </a:p>
         </p:txBody>
       </p:sp>
@@ -3751,6 +3810,7 @@
               <a:rPr lang="zh-CN" altLang="en-US"/>
               <a:t>单击此处编辑母版文本样式</a:t>
             </a:r>
+            <a:endParaRPr lang="zh-CN" altLang="en-US"/>
           </a:p>
           <a:p>
             <a:pPr lvl="1"/>
@@ -3758,6 +3818,7 @@
               <a:rPr lang="zh-CN" altLang="en-US"/>
               <a:t>二级</a:t>
             </a:r>
+            <a:endParaRPr lang="zh-CN" altLang="en-US"/>
           </a:p>
           <a:p>
             <a:pPr lvl="2"/>
@@ -3765,6 +3826,7 @@
               <a:rPr lang="zh-CN" altLang="en-US"/>
               <a:t>三级</a:t>
             </a:r>
+            <a:endParaRPr lang="zh-CN" altLang="en-US"/>
           </a:p>
           <a:p>
             <a:pPr lvl="3"/>
@@ -3772,6 +3834,7 @@
               <a:rPr lang="zh-CN" altLang="en-US"/>
               <a:t>四级</a:t>
             </a:r>
+            <a:endParaRPr lang="zh-CN" altLang="en-US"/>
           </a:p>
           <a:p>
             <a:pPr lvl="4"/>
@@ -3779,6 +3842,7 @@
               <a:rPr lang="zh-CN" altLang="en-US"/>
               <a:t>五级</a:t>
             </a:r>
+            <a:endParaRPr lang="zh-CN" altLang="en-US"/>
           </a:p>
         </p:txBody>
       </p:sp>
@@ -3799,7 +3863,6 @@
           <a:p>
             <a:fld id="{0E3CF729-EF3B-40C4-90BC-C2086AADCC60}" type="datetimeFigureOut">
               <a:rPr lang="zh-CN" altLang="en-US" smtClean="0"/>
-              <a:t>2024-05-30</a:t>
             </a:fld>
             <a:endParaRPr lang="zh-CN" altLang="en-US"/>
           </a:p>
@@ -3841,7 +3904,6 @@
           <a:p>
             <a:fld id="{EC58ADBA-A0F5-48D7-ABCF-49CF523FE9C6}" type="slidenum">
               <a:rPr lang="zh-CN" altLang="en-US" smtClean="0"/>
-              <a:t>‹#›</a:t>
             </a:fld>
             <a:endParaRPr lang="zh-CN" altLang="en-US"/>
           </a:p>
@@ -3891,6 +3953,7 @@
               <a:rPr lang="zh-CN" altLang="en-US"/>
               <a:t>单击此处编辑母版标题样式</a:t>
             </a:r>
+            <a:endParaRPr lang="zh-CN" altLang="en-US"/>
           </a:p>
         </p:txBody>
       </p:sp>
@@ -3911,7 +3974,6 @@
           <a:p>
             <a:fld id="{0E3CF729-EF3B-40C4-90BC-C2086AADCC60}" type="datetimeFigureOut">
               <a:rPr lang="zh-CN" altLang="en-US" smtClean="0"/>
-              <a:t>2024-05-30</a:t>
             </a:fld>
             <a:endParaRPr lang="zh-CN" altLang="en-US"/>
           </a:p>
@@ -3953,7 +4015,6 @@
           <a:p>
             <a:fld id="{EC58ADBA-A0F5-48D7-ABCF-49CF523FE9C6}" type="slidenum">
               <a:rPr lang="zh-CN" altLang="en-US" smtClean="0"/>
-              <a:t>‹#›</a:t>
             </a:fld>
             <a:endParaRPr lang="zh-CN" altLang="en-US"/>
           </a:p>
@@ -4001,7 +4062,6 @@
           <a:p>
             <a:fld id="{0E3CF729-EF3B-40C4-90BC-C2086AADCC60}" type="datetimeFigureOut">
               <a:rPr lang="zh-CN" altLang="en-US" smtClean="0"/>
-              <a:t>2024-05-30</a:t>
             </a:fld>
             <a:endParaRPr lang="zh-CN" altLang="en-US"/>
           </a:p>
@@ -4043,7 +4103,6 @@
           <a:p>
             <a:fld id="{EC58ADBA-A0F5-48D7-ABCF-49CF523FE9C6}" type="slidenum">
               <a:rPr lang="zh-CN" altLang="en-US" smtClean="0"/>
-              <a:t>‹#›</a:t>
             </a:fld>
             <a:endParaRPr lang="zh-CN" altLang="en-US"/>
           </a:p>
@@ -4102,6 +4161,7 @@
               <a:rPr lang="zh-CN" altLang="en-US"/>
               <a:t>单击此处编辑母版标题样式</a:t>
             </a:r>
+            <a:endParaRPr lang="zh-CN" altLang="en-US"/>
           </a:p>
         </p:txBody>
       </p:sp>
@@ -4158,6 +4218,7 @@
               <a:rPr lang="zh-CN" altLang="en-US"/>
               <a:t>单击此处编辑母版文本样式</a:t>
             </a:r>
+            <a:endParaRPr lang="zh-CN" altLang="en-US"/>
           </a:p>
           <a:p>
             <a:pPr lvl="1"/>
@@ -4165,6 +4226,7 @@
               <a:rPr lang="zh-CN" altLang="en-US"/>
               <a:t>二级</a:t>
             </a:r>
+            <a:endParaRPr lang="zh-CN" altLang="en-US"/>
           </a:p>
           <a:p>
             <a:pPr lvl="2"/>
@@ -4172,6 +4234,7 @@
               <a:rPr lang="zh-CN" altLang="en-US"/>
               <a:t>三级</a:t>
             </a:r>
+            <a:endParaRPr lang="zh-CN" altLang="en-US"/>
           </a:p>
           <a:p>
             <a:pPr lvl="3"/>
@@ -4179,6 +4242,7 @@
               <a:rPr lang="zh-CN" altLang="en-US"/>
               <a:t>四级</a:t>
             </a:r>
+            <a:endParaRPr lang="zh-CN" altLang="en-US"/>
           </a:p>
           <a:p>
             <a:pPr lvl="4"/>
@@ -4186,6 +4250,7 @@
               <a:rPr lang="zh-CN" altLang="en-US"/>
               <a:t>五级</a:t>
             </a:r>
+            <a:endParaRPr lang="zh-CN" altLang="en-US"/>
           </a:p>
         </p:txBody>
       </p:sp>
@@ -4251,6 +4316,7 @@
               <a:rPr lang="zh-CN" altLang="en-US"/>
               <a:t>单击此处编辑母版文本样式</a:t>
             </a:r>
+            <a:endParaRPr lang="zh-CN" altLang="en-US"/>
           </a:p>
         </p:txBody>
       </p:sp>
@@ -4271,7 +4337,6 @@
           <a:p>
             <a:fld id="{0E3CF729-EF3B-40C4-90BC-C2086AADCC60}" type="datetimeFigureOut">
               <a:rPr lang="zh-CN" altLang="en-US" smtClean="0"/>
-              <a:t>2024-05-30</a:t>
             </a:fld>
             <a:endParaRPr lang="zh-CN" altLang="en-US"/>
           </a:p>
@@ -4313,7 +4378,6 @@
           <a:p>
             <a:fld id="{EC58ADBA-A0F5-48D7-ABCF-49CF523FE9C6}" type="slidenum">
               <a:rPr lang="zh-CN" altLang="en-US" smtClean="0"/>
-              <a:t>‹#›</a:t>
             </a:fld>
             <a:endParaRPr lang="zh-CN" altLang="en-US"/>
           </a:p>
@@ -4372,6 +4436,7 @@
               <a:rPr lang="zh-CN" altLang="en-US"/>
               <a:t>单击此处编辑母版标题样式</a:t>
             </a:r>
+            <a:endParaRPr lang="zh-CN" altLang="en-US"/>
           </a:p>
         </p:txBody>
       </p:sp>
@@ -4498,6 +4563,7 @@
               <a:rPr lang="zh-CN" altLang="en-US"/>
               <a:t>单击此处编辑母版文本样式</a:t>
             </a:r>
+            <a:endParaRPr lang="zh-CN" altLang="en-US"/>
           </a:p>
         </p:txBody>
       </p:sp>
@@ -4518,7 +4584,6 @@
           <a:p>
             <a:fld id="{0E3CF729-EF3B-40C4-90BC-C2086AADCC60}" type="datetimeFigureOut">
               <a:rPr lang="zh-CN" altLang="en-US" smtClean="0"/>
-              <a:t>2024-05-30</a:t>
             </a:fld>
             <a:endParaRPr lang="zh-CN" altLang="en-US"/>
           </a:p>
@@ -4560,7 +4625,6 @@
           <a:p>
             <a:fld id="{EC58ADBA-A0F5-48D7-ABCF-49CF523FE9C6}" type="slidenum">
               <a:rPr lang="zh-CN" altLang="en-US" smtClean="0"/>
-              <a:t>‹#›</a:t>
             </a:fld>
             <a:endParaRPr lang="zh-CN" altLang="en-US"/>
           </a:p>
@@ -4625,6 +4689,7 @@
               <a:rPr lang="zh-CN" altLang="en-US"/>
               <a:t>单击此处编辑母版标题样式</a:t>
             </a:r>
+            <a:endParaRPr lang="zh-CN" altLang="en-US"/>
           </a:p>
         </p:txBody>
       </p:sp>
@@ -4658,6 +4723,7 @@
               <a:rPr lang="zh-CN" altLang="en-US"/>
               <a:t>单击此处编辑母版文本样式</a:t>
             </a:r>
+            <a:endParaRPr lang="zh-CN" altLang="en-US"/>
           </a:p>
           <a:p>
             <a:pPr lvl="1"/>
@@ -4665,6 +4731,7 @@
               <a:rPr lang="zh-CN" altLang="en-US"/>
               <a:t>二级</a:t>
             </a:r>
+            <a:endParaRPr lang="zh-CN" altLang="en-US"/>
           </a:p>
           <a:p>
             <a:pPr lvl="2"/>
@@ -4672,6 +4739,7 @@
               <a:rPr lang="zh-CN" altLang="en-US"/>
               <a:t>三级</a:t>
             </a:r>
+            <a:endParaRPr lang="zh-CN" altLang="en-US"/>
           </a:p>
           <a:p>
             <a:pPr lvl="3"/>
@@ -4679,6 +4747,7 @@
               <a:rPr lang="zh-CN" altLang="en-US"/>
               <a:t>四级</a:t>
             </a:r>
+            <a:endParaRPr lang="zh-CN" altLang="en-US"/>
           </a:p>
           <a:p>
             <a:pPr lvl="4"/>
@@ -4686,6 +4755,7 @@
               <a:rPr lang="zh-CN" altLang="en-US"/>
               <a:t>五级</a:t>
             </a:r>
+            <a:endParaRPr lang="zh-CN" altLang="en-US"/>
           </a:p>
         </p:txBody>
       </p:sp>
@@ -4724,7 +4794,6 @@
           <a:p>
             <a:fld id="{0E3CF729-EF3B-40C4-90BC-C2086AADCC60}" type="datetimeFigureOut">
               <a:rPr lang="zh-CN" altLang="en-US" smtClean="0"/>
-              <a:t>2024-05-30</a:t>
             </a:fld>
             <a:endParaRPr lang="zh-CN" altLang="en-US"/>
           </a:p>
@@ -4802,7 +4871,6 @@
           <a:p>
             <a:fld id="{EC58ADBA-A0F5-48D7-ABCF-49CF523FE9C6}" type="slidenum">
               <a:rPr lang="zh-CN" altLang="en-US" smtClean="0"/>
-              <a:t>‹#›</a:t>
             </a:fld>
             <a:endParaRPr lang="zh-CN" altLang="en-US"/>
           </a:p>
@@ -5158,6 +5226,7 @@
               <a:rPr lang="zh-CN" altLang="en-US"/>
               <a:t>单击此处编辑母版标题样式</a:t>
             </a:r>
+            <a:endParaRPr lang="zh-CN" altLang="en-US"/>
           </a:p>
         </p:txBody>
       </p:sp>
@@ -5191,6 +5260,7 @@
               <a:rPr lang="zh-CN" altLang="en-US"/>
               <a:t>单击此处编辑母版文本样式</a:t>
             </a:r>
+            <a:endParaRPr lang="zh-CN" altLang="en-US"/>
           </a:p>
           <a:p>
             <a:pPr lvl="1"/>
@@ -5198,6 +5268,7 @@
               <a:rPr lang="zh-CN" altLang="en-US"/>
               <a:t>二级</a:t>
             </a:r>
+            <a:endParaRPr lang="zh-CN" altLang="en-US"/>
           </a:p>
           <a:p>
             <a:pPr lvl="2"/>
@@ -5205,6 +5276,7 @@
               <a:rPr lang="zh-CN" altLang="en-US"/>
               <a:t>三级</a:t>
             </a:r>
+            <a:endParaRPr lang="zh-CN" altLang="en-US"/>
           </a:p>
           <a:p>
             <a:pPr lvl="3"/>
@@ -5212,6 +5284,7 @@
               <a:rPr lang="zh-CN" altLang="en-US"/>
               <a:t>四级</a:t>
             </a:r>
+            <a:endParaRPr lang="zh-CN" altLang="en-US"/>
           </a:p>
           <a:p>
             <a:pPr lvl="4"/>
@@ -5219,6 +5292,7 @@
               <a:rPr lang="zh-CN" altLang="en-US"/>
               <a:t>五级</a:t>
             </a:r>
+            <a:endParaRPr lang="zh-CN" altLang="en-US"/>
           </a:p>
         </p:txBody>
       </p:sp>
@@ -5257,7 +5331,6 @@
           <a:p>
             <a:fld id="{0E3CF729-EF3B-40C4-90BC-C2086AADCC60}" type="datetimeFigureOut">
               <a:rPr lang="zh-CN" altLang="en-US" smtClean="0"/>
-              <a:t>2024-05-30</a:t>
             </a:fld>
             <a:endParaRPr lang="zh-CN" altLang="en-US"/>
           </a:p>
@@ -5335,7 +5408,6 @@
           <a:p>
             <a:fld id="{EC58ADBA-A0F5-48D7-ABCF-49CF523FE9C6}" type="slidenum">
               <a:rPr lang="zh-CN" altLang="en-US" smtClean="0"/>
-              <a:t>‹#›</a:t>
             </a:fld>
             <a:endParaRPr lang="zh-CN" altLang="en-US"/>
           </a:p>
@@ -5854,8 +5926,8 @@
           </a:fontRef>
         </p:style>
       </p:cxnSp>
-      <mc:AlternateContent xmlns:mc="http://schemas.openxmlformats.org/markup-compatibility/2006" xmlns:a14="http://schemas.microsoft.com/office/drawing/2010/main">
-        <mc:Choice Requires="a14">
+      <mc:AlternateContent xmlns:mc="http://schemas.openxmlformats.org/markup-compatibility/2006">
+        <mc:Choice xmlns:a14="http://schemas.microsoft.com/office/drawing/2010/main" Requires="a14">
           <p:sp>
             <p:nvSpPr>
               <p:cNvPr id="38" name="文本框 37"/>
@@ -5878,7 +5950,6 @@
               </a:bodyPr>
               <a:lstStyle/>
               <a:p>
-                <a:pPr/>
                 <a14:m>
                   <m:oMathPara xmlns:m="http://schemas.openxmlformats.org/officeDocument/2006/math">
                     <m:oMathParaPr>
@@ -5921,7 +5992,7 @@
             </p:txBody>
           </p:sp>
         </mc:Choice>
-        <mc:Fallback xmlns="">
+        <mc:Fallback>
           <p:sp>
             <p:nvSpPr>
               <p:cNvPr id="38" name="文本框 37"/>
@@ -5939,7 +6010,7 @@
                 <a:avLst/>
               </a:prstGeom>
               <a:blipFill rotWithShape="1">
-                <a:blip r:embed="rId2"/>
+                <a:blip r:embed="rId1"/>
                 <a:stretch>
                   <a:fillRect l="-6" t="-79" r="6" b="15"/>
                 </a:stretch>
@@ -5960,8 +6031,8 @@
           </p:sp>
         </mc:Fallback>
       </mc:AlternateContent>
-      <mc:AlternateContent xmlns:mc="http://schemas.openxmlformats.org/markup-compatibility/2006" xmlns:a14="http://schemas.microsoft.com/office/drawing/2010/main">
-        <mc:Choice Requires="a14">
+      <mc:AlternateContent xmlns:mc="http://schemas.openxmlformats.org/markup-compatibility/2006">
+        <mc:Choice xmlns:a14="http://schemas.microsoft.com/office/drawing/2010/main" Requires="a14">
           <p:sp>
             <p:nvSpPr>
               <p:cNvPr id="42" name="文本框 41"/>
@@ -5984,7 +6055,6 @@
               </a:bodyPr>
               <a:lstStyle/>
               <a:p>
-                <a:pPr/>
                 <a14:m>
                   <m:oMathPara xmlns:m="http://schemas.openxmlformats.org/officeDocument/2006/math">
                     <m:oMathParaPr>
@@ -6024,7 +6094,7 @@
             </p:txBody>
           </p:sp>
         </mc:Choice>
-        <mc:Fallback xmlns="">
+        <mc:Fallback>
           <p:sp>
             <p:nvSpPr>
               <p:cNvPr id="42" name="文本框 41"/>
@@ -6042,7 +6112,7 @@
                 <a:avLst/>
               </a:prstGeom>
               <a:blipFill rotWithShape="1">
-                <a:blip r:embed="rId3"/>
+                <a:blip r:embed="rId2"/>
                 <a:stretch>
                   <a:fillRect t="-165" r="25" b="100"/>
                 </a:stretch>
@@ -6170,8 +6240,8 @@
           </a:fontRef>
         </p:style>
       </p:cxnSp>
-      <mc:AlternateContent xmlns:mc="http://schemas.openxmlformats.org/markup-compatibility/2006" xmlns:a14="http://schemas.microsoft.com/office/drawing/2010/main">
-        <mc:Choice Requires="a14">
+      <mc:AlternateContent xmlns:mc="http://schemas.openxmlformats.org/markup-compatibility/2006">
+        <mc:Choice xmlns:a14="http://schemas.microsoft.com/office/drawing/2010/main" Requires="a14">
           <p:sp>
             <p:nvSpPr>
               <p:cNvPr id="60" name="文本框 59"/>
@@ -6194,7 +6264,6 @@
               </a:bodyPr>
               <a:lstStyle/>
               <a:p>
-                <a:pPr/>
                 <a14:m>
                   <m:oMathPara xmlns:m="http://schemas.openxmlformats.org/officeDocument/2006/math">
                     <m:oMathParaPr>
@@ -6215,7 +6284,7 @@
             </p:txBody>
           </p:sp>
         </mc:Choice>
-        <mc:Fallback xmlns="">
+        <mc:Fallback>
           <p:sp>
             <p:nvSpPr>
               <p:cNvPr id="60" name="文本框 59"/>
@@ -6233,7 +6302,7 @@
                 <a:avLst/>
               </a:prstGeom>
               <a:blipFill rotWithShape="1">
-                <a:blip r:embed="rId4"/>
+                <a:blip r:embed="rId3"/>
                 <a:stretch>
                   <a:fillRect l="-43" t="-169" b="105"/>
                 </a:stretch>
@@ -6254,8 +6323,8 @@
           </p:sp>
         </mc:Fallback>
       </mc:AlternateContent>
-      <mc:AlternateContent xmlns:mc="http://schemas.openxmlformats.org/markup-compatibility/2006" xmlns:a14="http://schemas.microsoft.com/office/drawing/2010/main">
-        <mc:Choice Requires="a14">
+      <mc:AlternateContent xmlns:mc="http://schemas.openxmlformats.org/markup-compatibility/2006">
+        <mc:Choice xmlns:a14="http://schemas.microsoft.com/office/drawing/2010/main" Requires="a14">
           <p:sp>
             <p:nvSpPr>
               <p:cNvPr id="61" name="文本框 60"/>
@@ -6278,7 +6347,6 @@
               </a:bodyPr>
               <a:lstStyle/>
               <a:p>
-                <a:pPr/>
                 <a14:m>
                   <m:oMathPara xmlns:m="http://schemas.openxmlformats.org/officeDocument/2006/math">
                     <m:oMathParaPr>
@@ -6299,7 +6367,7 @@
             </p:txBody>
           </p:sp>
         </mc:Choice>
-        <mc:Fallback xmlns="">
+        <mc:Fallback>
           <p:sp>
             <p:nvSpPr>
               <p:cNvPr id="61" name="文本框 60"/>
@@ -6317,7 +6385,7 @@
                 <a:avLst/>
               </a:prstGeom>
               <a:blipFill rotWithShape="1">
-                <a:blip r:embed="rId5"/>
+                <a:blip r:embed="rId4"/>
                 <a:stretch>
                   <a:fillRect l="-12" t="-87" r="8" b="22"/>
                 </a:stretch>
@@ -6338,8 +6406,8 @@
           </p:sp>
         </mc:Fallback>
       </mc:AlternateContent>
-      <mc:AlternateContent xmlns:mc="http://schemas.openxmlformats.org/markup-compatibility/2006" xmlns:a14="http://schemas.microsoft.com/office/drawing/2010/main">
-        <mc:Choice Requires="a14">
+      <mc:AlternateContent xmlns:mc="http://schemas.openxmlformats.org/markup-compatibility/2006">
+        <mc:Choice xmlns:a14="http://schemas.microsoft.com/office/drawing/2010/main" Requires="a14">
           <p:sp>
             <p:nvSpPr>
               <p:cNvPr id="66" name="文本框 65"/>
@@ -6362,7 +6430,6 @@
               </a:bodyPr>
               <a:lstStyle/>
               <a:p>
-                <a:pPr/>
                 <a14:m>
                   <m:oMathPara xmlns:m="http://schemas.openxmlformats.org/officeDocument/2006/math">
                     <m:oMathParaPr>
@@ -6386,7 +6453,7 @@
             </p:txBody>
           </p:sp>
         </mc:Choice>
-        <mc:Fallback xmlns="">
+        <mc:Fallback>
           <p:sp>
             <p:nvSpPr>
               <p:cNvPr id="66" name="文本框 65"/>
@@ -6404,7 +6471,7 @@
                 <a:avLst/>
               </a:prstGeom>
               <a:blipFill rotWithShape="1">
-                <a:blip r:embed="rId6"/>
+                <a:blip r:embed="rId5"/>
                 <a:stretch>
                   <a:fillRect l="-13" t="-119" r="26" b="55"/>
                 </a:stretch>
@@ -6818,8 +6885,8 @@
           </a:fontRef>
         </p:style>
       </p:cxnSp>
-      <mc:AlternateContent xmlns:mc="http://schemas.openxmlformats.org/markup-compatibility/2006" xmlns:a14="http://schemas.microsoft.com/office/drawing/2010/main">
-        <mc:Choice Requires="a14">
+      <mc:AlternateContent xmlns:mc="http://schemas.openxmlformats.org/markup-compatibility/2006">
+        <mc:Choice xmlns:a14="http://schemas.microsoft.com/office/drawing/2010/main" Requires="a14">
           <p:sp>
             <p:nvSpPr>
               <p:cNvPr id="21" name="文本框 20"/>
@@ -6842,7 +6909,6 @@
               </a:bodyPr>
               <a:lstStyle/>
               <a:p>
-                <a:pPr/>
                 <a14:m>
                   <m:oMathPara xmlns:m="http://schemas.openxmlformats.org/officeDocument/2006/math">
                     <m:oMathParaPr>
@@ -6866,7 +6932,7 @@
             </p:txBody>
           </p:sp>
         </mc:Choice>
-        <mc:Fallback xmlns="">
+        <mc:Fallback>
           <p:sp>
             <p:nvSpPr>
               <p:cNvPr id="21" name="文本框 20"/>
@@ -6884,7 +6950,7 @@
                 <a:avLst/>
               </a:prstGeom>
               <a:blipFill rotWithShape="1">
-                <a:blip r:embed="rId2"/>
+                <a:blip r:embed="rId1"/>
                 <a:stretch>
                   <a:fillRect l="-79" t="-119" r="14" b="54"/>
                 </a:stretch>
@@ -6977,8 +7043,8 @@
           </a:fontRef>
         </p:style>
       </p:cxnSp>
-      <mc:AlternateContent xmlns:mc="http://schemas.openxmlformats.org/markup-compatibility/2006" xmlns:a14="http://schemas.microsoft.com/office/drawing/2010/main">
-        <mc:Choice Requires="a14">
+      <mc:AlternateContent xmlns:mc="http://schemas.openxmlformats.org/markup-compatibility/2006">
+        <mc:Choice xmlns:a14="http://schemas.microsoft.com/office/drawing/2010/main" Requires="a14">
           <p:sp>
             <p:nvSpPr>
               <p:cNvPr id="26" name="文本框 25"/>
@@ -7001,7 +7067,6 @@
               </a:bodyPr>
               <a:lstStyle/>
               <a:p>
-                <a:pPr/>
                 <a14:m>
                   <m:oMathPara xmlns:m="http://schemas.openxmlformats.org/officeDocument/2006/math">
                     <m:oMathParaPr>
@@ -7031,7 +7096,7 @@
             </p:txBody>
           </p:sp>
         </mc:Choice>
-        <mc:Fallback xmlns="">
+        <mc:Fallback>
           <p:sp>
             <p:nvSpPr>
               <p:cNvPr id="26" name="文本框 25"/>
@@ -7049,7 +7114,7 @@
                 <a:avLst/>
               </a:prstGeom>
               <a:blipFill rotWithShape="1">
-                <a:blip r:embed="rId3"/>
+                <a:blip r:embed="rId2"/>
                 <a:stretch>
                   <a:fillRect l="-244" t="-31" r="-14983" b="138"/>
                 </a:stretch>
@@ -7070,8 +7135,8 @@
           </p:sp>
         </mc:Fallback>
       </mc:AlternateContent>
-      <mc:AlternateContent xmlns:mc="http://schemas.openxmlformats.org/markup-compatibility/2006" xmlns:a14="http://schemas.microsoft.com/office/drawing/2010/main">
-        <mc:Choice Requires="a14">
+      <mc:AlternateContent xmlns:mc="http://schemas.openxmlformats.org/markup-compatibility/2006">
+        <mc:Choice xmlns:a14="http://schemas.microsoft.com/office/drawing/2010/main" Requires="a14">
           <p:sp>
             <p:nvSpPr>
               <p:cNvPr id="31" name="文本框 30"/>
@@ -7094,7 +7159,6 @@
               </a:bodyPr>
               <a:lstStyle/>
               <a:p>
-                <a:pPr/>
                 <a14:m>
                   <m:oMathPara xmlns:m="http://schemas.openxmlformats.org/officeDocument/2006/math">
                     <m:oMathParaPr>
@@ -7115,7 +7179,7 @@
             </p:txBody>
           </p:sp>
         </mc:Choice>
-        <mc:Fallback xmlns="">
+        <mc:Fallback>
           <p:sp>
             <p:nvSpPr>
               <p:cNvPr id="31" name="文本框 30"/>
@@ -7133,7 +7197,7 @@
                 <a:avLst/>
               </a:prstGeom>
               <a:blipFill rotWithShape="1">
-                <a:blip r:embed="rId4"/>
+                <a:blip r:embed="rId3"/>
                 <a:stretch>
                   <a:fillRect l="-137" t="-116" r="72" b="51"/>
                 </a:stretch>
@@ -7154,8 +7218,8 @@
           </p:sp>
         </mc:Fallback>
       </mc:AlternateContent>
-      <mc:AlternateContent xmlns:mc="http://schemas.openxmlformats.org/markup-compatibility/2006" xmlns:a14="http://schemas.microsoft.com/office/drawing/2010/main">
-        <mc:Choice Requires="a14">
+      <mc:AlternateContent xmlns:mc="http://schemas.openxmlformats.org/markup-compatibility/2006">
+        <mc:Choice xmlns:a14="http://schemas.microsoft.com/office/drawing/2010/main" Requires="a14">
           <p:sp>
             <p:nvSpPr>
               <p:cNvPr id="32" name="文本框 31"/>
@@ -7178,7 +7242,6 @@
               </a:bodyPr>
               <a:lstStyle/>
               <a:p>
-                <a:pPr/>
                 <a14:m>
                   <m:oMathPara xmlns:m="http://schemas.openxmlformats.org/officeDocument/2006/math">
                     <m:oMathParaPr>
@@ -7199,7 +7262,7 @@
             </p:txBody>
           </p:sp>
         </mc:Choice>
-        <mc:Fallback xmlns="">
+        <mc:Fallback>
           <p:sp>
             <p:nvSpPr>
               <p:cNvPr id="32" name="文本框 31"/>
@@ -7217,7 +7280,7 @@
                 <a:avLst/>
               </a:prstGeom>
               <a:blipFill rotWithShape="1">
-                <a:blip r:embed="rId5"/>
+                <a:blip r:embed="rId4"/>
                 <a:stretch>
                   <a:fillRect l="-16" t="-87" r="226" b="22"/>
                 </a:stretch>
@@ -7238,8 +7301,8 @@
           </p:sp>
         </mc:Fallback>
       </mc:AlternateContent>
-      <mc:AlternateContent xmlns:mc="http://schemas.openxmlformats.org/markup-compatibility/2006" xmlns:a14="http://schemas.microsoft.com/office/drawing/2010/main">
-        <mc:Choice Requires="a14">
+      <mc:AlternateContent xmlns:mc="http://schemas.openxmlformats.org/markup-compatibility/2006">
+        <mc:Choice xmlns:a14="http://schemas.microsoft.com/office/drawing/2010/main" Requires="a14">
           <p:sp>
             <p:nvSpPr>
               <p:cNvPr id="33" name="文本框 32"/>
@@ -7262,7 +7325,6 @@
               </a:bodyPr>
               <a:lstStyle/>
               <a:p>
-                <a:pPr/>
                 <a14:m>
                   <m:oMathPara xmlns:m="http://schemas.openxmlformats.org/officeDocument/2006/math">
                     <m:oMathParaPr>
@@ -7292,7 +7354,7 @@
             </p:txBody>
           </p:sp>
         </mc:Choice>
-        <mc:Fallback xmlns="">
+        <mc:Fallback>
           <p:sp>
             <p:nvSpPr>
               <p:cNvPr id="33" name="文本框 32"/>
@@ -7310,7 +7372,7 @@
                 <a:avLst/>
               </a:prstGeom>
               <a:blipFill rotWithShape="1">
-                <a:blip r:embed="rId6"/>
+                <a:blip r:embed="rId5"/>
                 <a:stretch>
                   <a:fillRect l="-265" t="-29" r="-10275" b="137"/>
                 </a:stretch>
@@ -7331,8 +7393,8 @@
           </p:sp>
         </mc:Fallback>
       </mc:AlternateContent>
-      <mc:AlternateContent xmlns:mc="http://schemas.openxmlformats.org/markup-compatibility/2006" xmlns:a14="http://schemas.microsoft.com/office/drawing/2010/main">
-        <mc:Choice Requires="a14">
+      <mc:AlternateContent xmlns:mc="http://schemas.openxmlformats.org/markup-compatibility/2006">
+        <mc:Choice xmlns:a14="http://schemas.microsoft.com/office/drawing/2010/main" Requires="a14">
           <p:sp>
             <p:nvSpPr>
               <p:cNvPr id="34" name="文本框 33"/>
@@ -7355,7 +7417,6 @@
               </a:bodyPr>
               <a:lstStyle/>
               <a:p>
-                <a:pPr/>
                 <a14:m>
                   <m:oMathPara xmlns:m="http://schemas.openxmlformats.org/officeDocument/2006/math">
                     <m:oMathParaPr>
@@ -7385,7 +7446,7 @@
             </p:txBody>
           </p:sp>
         </mc:Choice>
-        <mc:Fallback xmlns="">
+        <mc:Fallback>
           <p:sp>
             <p:nvSpPr>
               <p:cNvPr id="34" name="文本框 33"/>
@@ -7403,7 +7464,7 @@
                 <a:avLst/>
               </a:prstGeom>
               <a:blipFill rotWithShape="1">
-                <a:blip r:embed="rId7"/>
+                <a:blip r:embed="rId6"/>
                 <a:stretch>
                   <a:fillRect l="-210" t="-109" r="-13087" b="44"/>
                 </a:stretch>
@@ -7705,8 +7766,8 @@
           </a:fontRef>
         </p:style>
       </p:cxnSp>
-      <mc:AlternateContent xmlns:mc="http://schemas.openxmlformats.org/markup-compatibility/2006" xmlns:a14="http://schemas.microsoft.com/office/drawing/2010/main">
-        <mc:Choice Requires="a14">
+      <mc:AlternateContent xmlns:mc="http://schemas.openxmlformats.org/markup-compatibility/2006">
+        <mc:Choice xmlns:a14="http://schemas.microsoft.com/office/drawing/2010/main" Requires="a14">
           <p:sp>
             <p:nvSpPr>
               <p:cNvPr id="43" name="文本框 42"/>
@@ -7729,7 +7790,6 @@
               </a:bodyPr>
               <a:lstStyle/>
               <a:p>
-                <a:pPr/>
                 <a14:m>
                   <m:oMathPara xmlns:m="http://schemas.openxmlformats.org/officeDocument/2006/math">
                     <m:oMathParaPr>
@@ -7753,7 +7813,7 @@
             </p:txBody>
           </p:sp>
         </mc:Choice>
-        <mc:Fallback xmlns="">
+        <mc:Fallback>
           <p:sp>
             <p:nvSpPr>
               <p:cNvPr id="43" name="文本框 42"/>
@@ -7771,7 +7831,7 @@
                 <a:avLst/>
               </a:prstGeom>
               <a:blipFill rotWithShape="1">
-                <a:blip r:embed="rId2"/>
+                <a:blip r:embed="rId1"/>
                 <a:stretch>
                   <a:fillRect l="-160" t="-125" r="95" b="61"/>
                 </a:stretch>
@@ -7864,8 +7924,8 @@
           </a:fontRef>
         </p:style>
       </p:cxnSp>
-      <mc:AlternateContent xmlns:mc="http://schemas.openxmlformats.org/markup-compatibility/2006" xmlns:a14="http://schemas.microsoft.com/office/drawing/2010/main">
-        <mc:Choice Requires="a14">
+      <mc:AlternateContent xmlns:mc="http://schemas.openxmlformats.org/markup-compatibility/2006">
+        <mc:Choice xmlns:a14="http://schemas.microsoft.com/office/drawing/2010/main" Requires="a14">
           <p:sp>
             <p:nvSpPr>
               <p:cNvPr id="48" name="文本框 47"/>
@@ -7888,7 +7948,6 @@
               </a:bodyPr>
               <a:lstStyle/>
               <a:p>
-                <a:pPr/>
                 <a14:m>
                   <m:oMathPara xmlns:m="http://schemas.openxmlformats.org/officeDocument/2006/math">
                     <m:oMathParaPr>
@@ -7918,7 +7977,7 @@
             </p:txBody>
           </p:sp>
         </mc:Choice>
-        <mc:Fallback xmlns="">
+        <mc:Fallback>
           <p:sp>
             <p:nvSpPr>
               <p:cNvPr id="48" name="文本框 47"/>
@@ -7936,7 +7995,7 @@
                 <a:avLst/>
               </a:prstGeom>
               <a:blipFill rotWithShape="1">
-                <a:blip r:embed="rId3"/>
+                <a:blip r:embed="rId2"/>
                 <a:stretch>
                   <a:fillRect l="-166" t="-142" r="-15061" b="77"/>
                 </a:stretch>
@@ -7957,8 +8016,8 @@
           </p:sp>
         </mc:Fallback>
       </mc:AlternateContent>
-      <mc:AlternateContent xmlns:mc="http://schemas.openxmlformats.org/markup-compatibility/2006" xmlns:a14="http://schemas.microsoft.com/office/drawing/2010/main">
-        <mc:Choice Requires="a14">
+      <mc:AlternateContent xmlns:mc="http://schemas.openxmlformats.org/markup-compatibility/2006">
+        <mc:Choice xmlns:a14="http://schemas.microsoft.com/office/drawing/2010/main" Requires="a14">
           <p:sp>
             <p:nvSpPr>
               <p:cNvPr id="49" name="文本框 48"/>
@@ -7981,7 +8040,6 @@
               </a:bodyPr>
               <a:lstStyle/>
               <a:p>
-                <a:pPr/>
                 <a14:m>
                   <m:oMathPara xmlns:m="http://schemas.openxmlformats.org/officeDocument/2006/math">
                     <m:oMathParaPr>
@@ -8002,7 +8060,7 @@
             </p:txBody>
           </p:sp>
         </mc:Choice>
-        <mc:Fallback xmlns="">
+        <mc:Fallback>
           <p:sp>
             <p:nvSpPr>
               <p:cNvPr id="49" name="文本框 48"/>
@@ -8020,7 +8078,7 @@
                 <a:avLst/>
               </a:prstGeom>
               <a:blipFill rotWithShape="1">
-                <a:blip r:embed="rId4"/>
+                <a:blip r:embed="rId3"/>
                 <a:stretch>
                   <a:fillRect l="-137" t="-162" r="72" b="98"/>
                 </a:stretch>
@@ -8041,8 +8099,8 @@
           </p:sp>
         </mc:Fallback>
       </mc:AlternateContent>
-      <mc:AlternateContent xmlns:mc="http://schemas.openxmlformats.org/markup-compatibility/2006" xmlns:a14="http://schemas.microsoft.com/office/drawing/2010/main">
-        <mc:Choice Requires="a14">
+      <mc:AlternateContent xmlns:mc="http://schemas.openxmlformats.org/markup-compatibility/2006">
+        <mc:Choice xmlns:a14="http://schemas.microsoft.com/office/drawing/2010/main" Requires="a14">
           <p:sp>
             <p:nvSpPr>
               <p:cNvPr id="50" name="文本框 49"/>
@@ -8065,7 +8123,6 @@
               </a:bodyPr>
               <a:lstStyle/>
               <a:p>
-                <a:pPr/>
                 <a14:m>
                   <m:oMathPara xmlns:m="http://schemas.openxmlformats.org/officeDocument/2006/math">
                     <m:oMathParaPr>
@@ -8086,7 +8143,7 @@
             </p:txBody>
           </p:sp>
         </mc:Choice>
-        <mc:Fallback xmlns="">
+        <mc:Fallback>
           <p:sp>
             <p:nvSpPr>
               <p:cNvPr id="50" name="文本框 49"/>
@@ -8104,7 +8161,7 @@
                 <a:avLst/>
               </a:prstGeom>
               <a:blipFill rotWithShape="1">
-                <a:blip r:embed="rId5"/>
+                <a:blip r:embed="rId4"/>
                 <a:stretch>
                   <a:fillRect l="-173" t="-16" r="108" b="123"/>
                 </a:stretch>
@@ -8125,8 +8182,8 @@
           </p:sp>
         </mc:Fallback>
       </mc:AlternateContent>
-      <mc:AlternateContent xmlns:mc="http://schemas.openxmlformats.org/markup-compatibility/2006" xmlns:a14="http://schemas.microsoft.com/office/drawing/2010/main">
-        <mc:Choice Requires="a14">
+      <mc:AlternateContent xmlns:mc="http://schemas.openxmlformats.org/markup-compatibility/2006">
+        <mc:Choice xmlns:a14="http://schemas.microsoft.com/office/drawing/2010/main" Requires="a14">
           <p:sp>
             <p:nvSpPr>
               <p:cNvPr id="51" name="文本框 50"/>
@@ -8149,7 +8206,6 @@
               </a:bodyPr>
               <a:lstStyle/>
               <a:p>
-                <a:pPr/>
                 <a14:m>
                   <m:oMathPara xmlns:m="http://schemas.openxmlformats.org/officeDocument/2006/math">
                     <m:oMathParaPr>
@@ -8179,7 +8235,7 @@
             </p:txBody>
           </p:sp>
         </mc:Choice>
-        <mc:Fallback xmlns="">
+        <mc:Fallback>
           <p:sp>
             <p:nvSpPr>
               <p:cNvPr id="51" name="文本框 50"/>
@@ -8197,7 +8253,7 @@
                 <a:avLst/>
               </a:prstGeom>
               <a:blipFill rotWithShape="1">
-                <a:blip r:embed="rId6"/>
+                <a:blip r:embed="rId5"/>
                 <a:stretch>
                   <a:fillRect l="-265" t="-76" r="-10275" b="11"/>
                 </a:stretch>
@@ -8218,8 +8274,8 @@
           </p:sp>
         </mc:Fallback>
       </mc:AlternateContent>
-      <mc:AlternateContent xmlns:mc="http://schemas.openxmlformats.org/markup-compatibility/2006" xmlns:a14="http://schemas.microsoft.com/office/drawing/2010/main">
-        <mc:Choice Requires="a14">
+      <mc:AlternateContent xmlns:mc="http://schemas.openxmlformats.org/markup-compatibility/2006">
+        <mc:Choice xmlns:a14="http://schemas.microsoft.com/office/drawing/2010/main" Requires="a14">
           <p:sp>
             <p:nvSpPr>
               <p:cNvPr id="52" name="文本框 51"/>
@@ -8242,7 +8298,6 @@
               </a:bodyPr>
               <a:lstStyle/>
               <a:p>
-                <a:pPr/>
                 <a14:m>
                   <m:oMathPara xmlns:m="http://schemas.openxmlformats.org/officeDocument/2006/math">
                     <m:oMathParaPr>
@@ -8272,7 +8327,7 @@
             </p:txBody>
           </p:sp>
         </mc:Choice>
-        <mc:Fallback xmlns="">
+        <mc:Fallback>
           <p:sp>
             <p:nvSpPr>
               <p:cNvPr id="52" name="文本框 51"/>
@@ -8290,7 +8345,7 @@
                 <a:avLst/>
               </a:prstGeom>
               <a:blipFill rotWithShape="1">
-                <a:blip r:embed="rId7"/>
+                <a:blip r:embed="rId6"/>
                 <a:stretch>
                   <a:fillRect l="-162" t="-28" r="-13135" b="136"/>
                 </a:stretch>
@@ -8586,8 +8641,8 @@
           </a:fontRef>
         </p:style>
       </p:cxnSp>
-      <mc:AlternateContent xmlns:mc="http://schemas.openxmlformats.org/markup-compatibility/2006" xmlns:a14="http://schemas.microsoft.com/office/drawing/2010/main">
-        <mc:Choice Requires="a14">
+      <mc:AlternateContent xmlns:mc="http://schemas.openxmlformats.org/markup-compatibility/2006">
+        <mc:Choice xmlns:a14="http://schemas.microsoft.com/office/drawing/2010/main" Requires="a14">
           <p:sp>
             <p:nvSpPr>
               <p:cNvPr id="94" name="文本框 93"/>
@@ -8610,7 +8665,6 @@
               </a:bodyPr>
               <a:lstStyle/>
               <a:p>
-                <a:pPr/>
                 <a14:m>
                   <m:oMathPara xmlns:m="http://schemas.openxmlformats.org/officeDocument/2006/math">
                     <m:oMathParaPr>
@@ -8634,7 +8688,7 @@
             </p:txBody>
           </p:sp>
         </mc:Choice>
-        <mc:Fallback xmlns="">
+        <mc:Fallback>
           <p:sp>
             <p:nvSpPr>
               <p:cNvPr id="94" name="文本框 93"/>
@@ -8652,7 +8706,7 @@
                 <a:avLst/>
               </a:prstGeom>
               <a:blipFill rotWithShape="1">
-                <a:blip r:embed="rId2"/>
+                <a:blip r:embed="rId1"/>
                 <a:stretch>
                   <a:fillRect l="-79" t="-119" r="14" b="54"/>
                 </a:stretch>
@@ -8673,8 +8727,8 @@
           </p:sp>
         </mc:Fallback>
       </mc:AlternateContent>
-      <mc:AlternateContent xmlns:mc="http://schemas.openxmlformats.org/markup-compatibility/2006" xmlns:a14="http://schemas.microsoft.com/office/drawing/2010/main">
-        <mc:Choice Requires="a14">
+      <mc:AlternateContent xmlns:mc="http://schemas.openxmlformats.org/markup-compatibility/2006">
+        <mc:Choice xmlns:a14="http://schemas.microsoft.com/office/drawing/2010/main" Requires="a14">
           <p:sp>
             <p:nvSpPr>
               <p:cNvPr id="95" name="文本框 94"/>
@@ -8697,7 +8751,6 @@
               </a:bodyPr>
               <a:lstStyle/>
               <a:p>
-                <a:pPr/>
                 <a14:m>
                   <m:oMathPara xmlns:m="http://schemas.openxmlformats.org/officeDocument/2006/math">
                     <m:oMathParaPr>
@@ -8718,7 +8771,7 @@
             </p:txBody>
           </p:sp>
         </mc:Choice>
-        <mc:Fallback xmlns="">
+        <mc:Fallback>
           <p:sp>
             <p:nvSpPr>
               <p:cNvPr id="95" name="文本框 94"/>
@@ -8736,7 +8789,7 @@
                 <a:avLst/>
               </a:prstGeom>
               <a:blipFill rotWithShape="1">
-                <a:blip r:embed="rId4"/>
+                <a:blip r:embed="rId3"/>
                 <a:stretch>
                   <a:fillRect l="-137" t="-116" r="72" b="51"/>
                 </a:stretch>
@@ -8757,8 +8810,8 @@
           </p:sp>
         </mc:Fallback>
       </mc:AlternateContent>
-      <mc:AlternateContent xmlns:mc="http://schemas.openxmlformats.org/markup-compatibility/2006" xmlns:a14="http://schemas.microsoft.com/office/drawing/2010/main">
-        <mc:Choice Requires="a14">
+      <mc:AlternateContent xmlns:mc="http://schemas.openxmlformats.org/markup-compatibility/2006">
+        <mc:Choice xmlns:a14="http://schemas.microsoft.com/office/drawing/2010/main" Requires="a14">
           <p:sp>
             <p:nvSpPr>
               <p:cNvPr id="96" name="文本框 95"/>
@@ -8781,7 +8834,6 @@
               </a:bodyPr>
               <a:lstStyle/>
               <a:p>
-                <a:pPr/>
                 <a14:m>
                   <m:oMathPara xmlns:m="http://schemas.openxmlformats.org/officeDocument/2006/math">
                     <m:oMathParaPr>
@@ -8802,7 +8854,7 @@
             </p:txBody>
           </p:sp>
         </mc:Choice>
-        <mc:Fallback xmlns="">
+        <mc:Fallback>
           <p:sp>
             <p:nvSpPr>
               <p:cNvPr id="96" name="文本框 95"/>
@@ -8820,7 +8872,7 @@
                 <a:avLst/>
               </a:prstGeom>
               <a:blipFill rotWithShape="1">
-                <a:blip r:embed="rId5"/>
+                <a:blip r:embed="rId4"/>
                 <a:stretch>
                   <a:fillRect l="-16" t="-87" r="226" b="22"/>
                 </a:stretch>
@@ -9039,8 +9091,8 @@
           </a:fontRef>
         </p:style>
       </p:cxnSp>
-      <mc:AlternateContent xmlns:mc="http://schemas.openxmlformats.org/markup-compatibility/2006" xmlns:a14="http://schemas.microsoft.com/office/drawing/2010/main">
-        <mc:Choice Requires="a14">
+      <mc:AlternateContent xmlns:mc="http://schemas.openxmlformats.org/markup-compatibility/2006">
+        <mc:Choice xmlns:a14="http://schemas.microsoft.com/office/drawing/2010/main" Requires="a14">
           <p:sp>
             <p:nvSpPr>
               <p:cNvPr id="102" name="文本框 101"/>
@@ -9063,7 +9115,6 @@
               </a:bodyPr>
               <a:lstStyle/>
               <a:p>
-                <a:pPr/>
                 <a14:m>
                   <m:oMathPara xmlns:m="http://schemas.openxmlformats.org/officeDocument/2006/math">
                     <m:oMathParaPr>
@@ -9093,7 +9144,7 @@
             </p:txBody>
           </p:sp>
         </mc:Choice>
-        <mc:Fallback xmlns="">
+        <mc:Fallback>
           <p:sp>
             <p:nvSpPr>
               <p:cNvPr id="102" name="文本框 101"/>
@@ -9111,7 +9162,7 @@
                 <a:avLst/>
               </a:prstGeom>
               <a:blipFill rotWithShape="1">
-                <a:blip r:embed="rId3"/>
+                <a:blip r:embed="rId2"/>
                 <a:stretch>
                   <a:fillRect l="-61" t="-46" r="-15166" b="154"/>
                 </a:stretch>
@@ -9132,8 +9183,8 @@
           </p:sp>
         </mc:Fallback>
       </mc:AlternateContent>
-      <mc:AlternateContent xmlns:mc="http://schemas.openxmlformats.org/markup-compatibility/2006" xmlns:a14="http://schemas.microsoft.com/office/drawing/2010/main">
-        <mc:Choice Requires="a14">
+      <mc:AlternateContent xmlns:mc="http://schemas.openxmlformats.org/markup-compatibility/2006">
+        <mc:Choice xmlns:a14="http://schemas.microsoft.com/office/drawing/2010/main" Requires="a14">
           <p:sp>
             <p:nvSpPr>
               <p:cNvPr id="103" name="文本框 102"/>
@@ -9156,7 +9207,6 @@
               </a:bodyPr>
               <a:lstStyle/>
               <a:p>
-                <a:pPr/>
                 <a14:m>
                   <m:oMathPara xmlns:m="http://schemas.openxmlformats.org/officeDocument/2006/math">
                     <m:oMathParaPr>
@@ -9186,7 +9236,7 @@
             </p:txBody>
           </p:sp>
         </mc:Choice>
-        <mc:Fallback xmlns="">
+        <mc:Fallback>
           <p:sp>
             <p:nvSpPr>
               <p:cNvPr id="103" name="文本框 102"/>
@@ -9204,7 +9254,7 @@
                 <a:avLst/>
               </a:prstGeom>
               <a:blipFill rotWithShape="1">
-                <a:blip r:embed="rId6"/>
+                <a:blip r:embed="rId5"/>
                 <a:stretch>
                   <a:fillRect l="-265" t="-29" r="-10275" b="137"/>
                 </a:stretch>
@@ -9225,8 +9275,8 @@
           </p:sp>
         </mc:Fallback>
       </mc:AlternateContent>
-      <mc:AlternateContent xmlns:mc="http://schemas.openxmlformats.org/markup-compatibility/2006" xmlns:a14="http://schemas.microsoft.com/office/drawing/2010/main">
-        <mc:Choice Requires="a14">
+      <mc:AlternateContent xmlns:mc="http://schemas.openxmlformats.org/markup-compatibility/2006">
+        <mc:Choice xmlns:a14="http://schemas.microsoft.com/office/drawing/2010/main" Requires="a14">
           <p:sp>
             <p:nvSpPr>
               <p:cNvPr id="104" name="文本框 103"/>
@@ -9249,7 +9299,6 @@
               </a:bodyPr>
               <a:lstStyle/>
               <a:p>
-                <a:pPr/>
                 <a14:m>
                   <m:oMathPara xmlns:m="http://schemas.openxmlformats.org/officeDocument/2006/math">
                     <m:oMathParaPr>
@@ -9279,7 +9328,7 @@
             </p:txBody>
           </p:sp>
         </mc:Choice>
-        <mc:Fallback xmlns="">
+        <mc:Fallback>
           <p:sp>
             <p:nvSpPr>
               <p:cNvPr id="104" name="文本框 103"/>
@@ -9297,7 +9346,7 @@
                 <a:avLst/>
               </a:prstGeom>
               <a:blipFill rotWithShape="1">
-                <a:blip r:embed="rId7"/>
+                <a:blip r:embed="rId6"/>
                 <a:stretch>
                   <a:fillRect l="-63" t="-54" r="-13233" b="162"/>
                 </a:stretch>
@@ -9710,8 +9759,8 @@
           </a:fontRef>
         </p:style>
       </p:cxnSp>
-      <mc:AlternateContent xmlns:mc="http://schemas.openxmlformats.org/markup-compatibility/2006" xmlns:a14="http://schemas.microsoft.com/office/drawing/2010/main">
-        <mc:Choice Requires="a14">
+      <mc:AlternateContent xmlns:mc="http://schemas.openxmlformats.org/markup-compatibility/2006">
+        <mc:Choice xmlns:a14="http://schemas.microsoft.com/office/drawing/2010/main" Requires="a14">
           <p:sp>
             <p:nvSpPr>
               <p:cNvPr id="126" name="文本框 125"/>
@@ -9734,7 +9783,6 @@
               </a:bodyPr>
               <a:lstStyle/>
               <a:p>
-                <a:pPr/>
                 <a14:m>
                   <m:oMathPara xmlns:m="http://schemas.openxmlformats.org/officeDocument/2006/math">
                     <m:oMathParaPr>
@@ -9764,7 +9812,7 @@
             </p:txBody>
           </p:sp>
         </mc:Choice>
-        <mc:Fallback xmlns="">
+        <mc:Fallback>
           <p:sp>
             <p:nvSpPr>
               <p:cNvPr id="126" name="文本框 125"/>
@@ -9782,7 +9830,7 @@
                 <a:avLst/>
               </a:prstGeom>
               <a:blipFill rotWithShape="1">
-                <a:blip r:embed="rId3"/>
+                <a:blip r:embed="rId2"/>
                 <a:stretch>
                   <a:fillRect l="-3" t="-154" r="-15227" b="89"/>
                 </a:stretch>
@@ -9803,8 +9851,8 @@
           </p:sp>
         </mc:Fallback>
       </mc:AlternateContent>
-      <mc:AlternateContent xmlns:mc="http://schemas.openxmlformats.org/markup-compatibility/2006" xmlns:a14="http://schemas.microsoft.com/office/drawing/2010/main">
-        <mc:Choice Requires="a14">
+      <mc:AlternateContent xmlns:mc="http://schemas.openxmlformats.org/markup-compatibility/2006">
+        <mc:Choice xmlns:a14="http://schemas.microsoft.com/office/drawing/2010/main" Requires="a14">
           <p:sp>
             <p:nvSpPr>
               <p:cNvPr id="127" name="文本框 126"/>
@@ -9827,7 +9875,6 @@
               </a:bodyPr>
               <a:lstStyle/>
               <a:p>
-                <a:pPr/>
                 <a14:m>
                   <m:oMathPara xmlns:m="http://schemas.openxmlformats.org/officeDocument/2006/math">
                     <m:oMathParaPr>
@@ -9857,7 +9904,7 @@
             </p:txBody>
           </p:sp>
         </mc:Choice>
-        <mc:Fallback xmlns="">
+        <mc:Fallback>
           <p:sp>
             <p:nvSpPr>
               <p:cNvPr id="127" name="文本框 126"/>
@@ -9875,7 +9922,7 @@
                 <a:avLst/>
               </a:prstGeom>
               <a:blipFill rotWithShape="1">
-                <a:blip r:embed="rId6"/>
+                <a:blip r:embed="rId5"/>
                 <a:stretch>
                   <a:fillRect l="-160" t="-110" r="-10380" b="46"/>
                 </a:stretch>
@@ -9896,8 +9943,8 @@
           </p:sp>
         </mc:Fallback>
       </mc:AlternateContent>
-      <mc:AlternateContent xmlns:mc="http://schemas.openxmlformats.org/markup-compatibility/2006" xmlns:a14="http://schemas.microsoft.com/office/drawing/2010/main">
-        <mc:Choice Requires="a14">
+      <mc:AlternateContent xmlns:mc="http://schemas.openxmlformats.org/markup-compatibility/2006">
+        <mc:Choice xmlns:a14="http://schemas.microsoft.com/office/drawing/2010/main" Requires="a14">
           <p:sp>
             <p:nvSpPr>
               <p:cNvPr id="128" name="文本框 127"/>
@@ -9920,7 +9967,6 @@
               </a:bodyPr>
               <a:lstStyle/>
               <a:p>
-                <a:pPr/>
                 <a14:m>
                   <m:oMathPara xmlns:m="http://schemas.openxmlformats.org/officeDocument/2006/math">
                     <m:oMathParaPr>
@@ -9950,7 +9996,7 @@
             </p:txBody>
           </p:sp>
         </mc:Choice>
-        <mc:Fallback xmlns="">
+        <mc:Fallback>
           <p:sp>
             <p:nvSpPr>
               <p:cNvPr id="128" name="文本框 127"/>
@@ -9968,7 +10014,7 @@
                 <a:avLst/>
               </a:prstGeom>
               <a:blipFill rotWithShape="1">
-                <a:blip r:embed="rId7"/>
+                <a:blip r:embed="rId6"/>
                 <a:stretch>
                   <a:fillRect l="-25" t="-162" r="-13272" b="97"/>
                 </a:stretch>
@@ -10097,8 +10143,8 @@
           </a:fontRef>
         </p:style>
       </p:cxnSp>
-      <mc:AlternateContent xmlns:mc="http://schemas.openxmlformats.org/markup-compatibility/2006" xmlns:a14="http://schemas.microsoft.com/office/drawing/2010/main">
-        <mc:Choice Requires="a14">
+      <mc:AlternateContent xmlns:mc="http://schemas.openxmlformats.org/markup-compatibility/2006">
+        <mc:Choice xmlns:a14="http://schemas.microsoft.com/office/drawing/2010/main" Requires="a14">
           <p:sp>
             <p:nvSpPr>
               <p:cNvPr id="144" name="文本框 143"/>
@@ -10121,7 +10167,6 @@
               </a:bodyPr>
               <a:lstStyle/>
               <a:p>
-                <a:pPr/>
                 <a14:m>
                   <m:oMathPara xmlns:m="http://schemas.openxmlformats.org/officeDocument/2006/math">
                     <m:oMathParaPr>
@@ -10151,7 +10196,7 @@
             </p:txBody>
           </p:sp>
         </mc:Choice>
-        <mc:Fallback xmlns="">
+        <mc:Fallback>
           <p:sp>
             <p:nvSpPr>
               <p:cNvPr id="144" name="文本框 143"/>
@@ -10169,7 +10214,7 @@
                 <a:avLst/>
               </a:prstGeom>
               <a:blipFill rotWithShape="1">
-                <a:blip r:embed="rId8"/>
+                <a:blip r:embed="rId7"/>
                 <a:stretch>
                   <a:fillRect l="-199" t="-40" r="-77312" b="148"/>
                 </a:stretch>
@@ -10190,8 +10235,8 @@
           </p:sp>
         </mc:Fallback>
       </mc:AlternateContent>
-      <mc:AlternateContent xmlns:mc="http://schemas.openxmlformats.org/markup-compatibility/2006" xmlns:a14="http://schemas.microsoft.com/office/drawing/2010/main">
-        <mc:Choice Requires="a14">
+      <mc:AlternateContent xmlns:mc="http://schemas.openxmlformats.org/markup-compatibility/2006">
+        <mc:Choice xmlns:a14="http://schemas.microsoft.com/office/drawing/2010/main" Requires="a14">
           <p:sp>
             <p:nvSpPr>
               <p:cNvPr id="145" name="文本框 144"/>
@@ -10214,7 +10259,6 @@
               </a:bodyPr>
               <a:lstStyle/>
               <a:p>
-                <a:pPr/>
                 <a14:m>
                   <m:oMathPara xmlns:m="http://schemas.openxmlformats.org/officeDocument/2006/math">
                     <m:oMathParaPr>
@@ -10244,7 +10288,7 @@
             </p:txBody>
           </p:sp>
         </mc:Choice>
-        <mc:Fallback xmlns="">
+        <mc:Fallback>
           <p:sp>
             <p:nvSpPr>
               <p:cNvPr id="145" name="文本框 144"/>
@@ -10262,7 +10306,7 @@
                 <a:avLst/>
               </a:prstGeom>
               <a:blipFill rotWithShape="1">
-                <a:blip r:embed="rId6"/>
+                <a:blip r:embed="rId5"/>
                 <a:stretch>
                   <a:fillRect l="-197" t="-138" r="-10344" b="74"/>
                 </a:stretch>
@@ -10283,8 +10327,8 @@
           </p:sp>
         </mc:Fallback>
       </mc:AlternateContent>
-      <mc:AlternateContent xmlns:mc="http://schemas.openxmlformats.org/markup-compatibility/2006" xmlns:a14="http://schemas.microsoft.com/office/drawing/2010/main">
-        <mc:Choice Requires="a14">
+      <mc:AlternateContent xmlns:mc="http://schemas.openxmlformats.org/markup-compatibility/2006">
+        <mc:Choice xmlns:a14="http://schemas.microsoft.com/office/drawing/2010/main" Requires="a14">
           <p:sp>
             <p:nvSpPr>
               <p:cNvPr id="146" name="文本框 145"/>
@@ -10307,7 +10351,6 @@
               </a:bodyPr>
               <a:lstStyle/>
               <a:p>
-                <a:pPr/>
                 <a14:m>
                   <m:oMathPara xmlns:m="http://schemas.openxmlformats.org/officeDocument/2006/math">
                     <m:oMathParaPr>
@@ -10337,7 +10380,7 @@
             </p:txBody>
           </p:sp>
         </mc:Choice>
-        <mc:Fallback xmlns="">
+        <mc:Fallback>
           <p:sp>
             <p:nvSpPr>
               <p:cNvPr id="146" name="文本框 145"/>
@@ -10355,7 +10398,7 @@
                 <a:avLst/>
               </a:prstGeom>
               <a:blipFill rotWithShape="1">
-                <a:blip r:embed="rId7"/>
+                <a:blip r:embed="rId6"/>
                 <a:stretch>
                   <a:fillRect l="-167" t="-87" r="-13130" b="22"/>
                 </a:stretch>
@@ -10413,6 +10456,36 @@
           </a:fontRef>
         </p:style>
       </p:cxnSp>
+      <p:sp>
+        <p:nvSpPr>
+          <p:cNvPr id="2" name="文本框 1"/>
+          <p:cNvSpPr txBox="1"/>
+          <p:nvPr/>
+        </p:nvSpPr>
+        <p:spPr>
+          <a:xfrm>
+            <a:off x="8643203" y="3657476"/>
+            <a:ext cx="1838943" cy="369332"/>
+          </a:xfrm>
+          <a:prstGeom prst="rect">
+            <a:avLst/>
+          </a:prstGeom>
+          <a:noFill/>
+        </p:spPr>
+        <p:txBody>
+          <a:bodyPr wrap="square" rtlCol="0">
+            <a:spAutoFit/>
+          </a:bodyPr>
+          <a:lstStyle/>
+          <a:p>
+            <a:r>
+              <a:rPr lang="zh-CN" altLang="en-US" dirty="0"/>
+              <a:t>道威棱镜</a:t>
+            </a:r>
+            <a:endParaRPr lang="en-US" altLang="zh-CN" dirty="0"/>
+          </a:p>
+        </p:txBody>
+      </p:sp>
     </p:spTree>
   </p:cSld>
   <p:clrMapOvr>
@@ -10438,15 +10511,639 @@
           <a:chExt cx="0" cy="0"/>
         </a:xfrm>
       </p:grpSpPr>
+      <p:cxnSp>
+        <p:nvCxnSpPr>
+          <p:cNvPr id="3" name="直接连接符 2"/>
+          <p:cNvCxnSpPr/>
+          <p:nvPr/>
+        </p:nvCxnSpPr>
+        <p:spPr>
+          <a:xfrm>
+            <a:off x="2527610" y="3211551"/>
+            <a:ext cx="5538439" cy="0"/>
+          </a:xfrm>
+          <a:prstGeom prst="line">
+            <a:avLst/>
+          </a:prstGeom>
+          <a:ln w="25400">
+            <a:solidFill>
+              <a:schemeClr val="tx1"/>
+            </a:solidFill>
+          </a:ln>
+        </p:spPr>
+        <p:style>
+          <a:lnRef idx="1">
+            <a:schemeClr val="accent1"/>
+          </a:lnRef>
+          <a:fillRef idx="0">
+            <a:schemeClr val="accent1"/>
+          </a:fillRef>
+          <a:effectRef idx="0">
+            <a:schemeClr val="accent1"/>
+          </a:effectRef>
+          <a:fontRef idx="minor">
+            <a:schemeClr val="tx1"/>
+          </a:fontRef>
+        </p:style>
+      </p:cxnSp>
+      <p:sp>
+        <p:nvSpPr>
+          <p:cNvPr id="4" name="椭圆 3"/>
+          <p:cNvSpPr/>
+          <p:nvPr/>
+        </p:nvSpPr>
+        <p:spPr>
+          <a:xfrm>
+            <a:off x="4711701" y="1986002"/>
+            <a:ext cx="431800" cy="2451097"/>
+          </a:xfrm>
+          <a:prstGeom prst="ellipse">
+            <a:avLst/>
+          </a:prstGeom>
+          <a:noFill/>
+          <a:ln w="25400"/>
+        </p:spPr>
+        <p:style>
+          <a:lnRef idx="2">
+            <a:schemeClr val="accent1">
+              <a:shade val="15000"/>
+            </a:schemeClr>
+          </a:lnRef>
+          <a:fillRef idx="1">
+            <a:schemeClr val="accent1"/>
+          </a:fillRef>
+          <a:effectRef idx="0">
+            <a:schemeClr val="accent1"/>
+          </a:effectRef>
+          <a:fontRef idx="minor">
+            <a:schemeClr val="lt1"/>
+          </a:fontRef>
+        </p:style>
+        <p:txBody>
+          <a:bodyPr rtlCol="0" anchor="ctr"/>
+          <a:lstStyle/>
+          <a:p>
+            <a:pPr algn="ctr"/>
+            <a:endParaRPr lang="zh-CN" altLang="en-US"/>
+          </a:p>
+        </p:txBody>
+      </p:sp>
+      <p:cxnSp>
+        <p:nvCxnSpPr>
+          <p:cNvPr id="8" name="直接连接符 7"/>
+          <p:cNvCxnSpPr/>
+          <p:nvPr/>
+        </p:nvCxnSpPr>
+        <p:spPr>
+          <a:xfrm>
+            <a:off x="4927601" y="1320800"/>
+            <a:ext cx="0" cy="4006850"/>
+          </a:xfrm>
+          <a:prstGeom prst="line">
+            <a:avLst/>
+          </a:prstGeom>
+          <a:ln w="25400">
+            <a:solidFill>
+              <a:schemeClr val="tx1"/>
+            </a:solidFill>
+          </a:ln>
+        </p:spPr>
+        <p:style>
+          <a:lnRef idx="1">
+            <a:schemeClr val="accent1"/>
+          </a:lnRef>
+          <a:fillRef idx="0">
+            <a:schemeClr val="accent1"/>
+          </a:fillRef>
+          <a:effectRef idx="0">
+            <a:schemeClr val="accent1"/>
+          </a:effectRef>
+          <a:fontRef idx="minor">
+            <a:schemeClr val="tx1"/>
+          </a:fontRef>
+        </p:style>
+      </p:cxnSp>
       <p:grpSp>
         <p:nvGrpSpPr>
-          <p:cNvPr id="5" name="组合 4">
-            <a:extLst>
-              <a:ext uri="{FF2B5EF4-FFF2-40B4-BE49-F238E27FC236}">
-                <a16:creationId xmlns:a16="http://schemas.microsoft.com/office/drawing/2014/main" id="{91B31AC8-4EF2-97C0-92D6-D0CBA4FC0FDC}"/>
-              </a:ext>
-            </a:extLst>
-          </p:cNvPr>
+          <p:cNvPr id="23" name="组合 22"/>
+          <p:cNvGrpSpPr/>
+          <p:nvPr/>
+        </p:nvGrpSpPr>
+        <p:grpSpPr>
+          <a:xfrm>
+            <a:off x="7251700" y="1471654"/>
+            <a:ext cx="349250" cy="1016000"/>
+            <a:chOff x="7245350" y="1511300"/>
+            <a:chExt cx="349250" cy="1016000"/>
+          </a:xfrm>
+        </p:grpSpPr>
+        <p:cxnSp>
+          <p:nvCxnSpPr>
+            <p:cNvPr id="13" name="直接连接符 12"/>
+            <p:cNvCxnSpPr/>
+            <p:nvPr/>
+          </p:nvCxnSpPr>
+          <p:spPr>
+            <a:xfrm>
+              <a:off x="7429500" y="1511300"/>
+              <a:ext cx="0" cy="1016000"/>
+            </a:xfrm>
+            <a:prstGeom prst="line">
+              <a:avLst/>
+            </a:prstGeom>
+            <a:ln w="25400">
+              <a:solidFill>
+                <a:schemeClr val="tx1"/>
+              </a:solidFill>
+            </a:ln>
+          </p:spPr>
+          <p:style>
+            <a:lnRef idx="1">
+              <a:schemeClr val="accent1"/>
+            </a:lnRef>
+            <a:fillRef idx="0">
+              <a:schemeClr val="accent1"/>
+            </a:fillRef>
+            <a:effectRef idx="0">
+              <a:schemeClr val="accent1"/>
+            </a:effectRef>
+            <a:fontRef idx="minor">
+              <a:schemeClr val="tx1"/>
+            </a:fontRef>
+          </p:style>
+        </p:cxnSp>
+        <p:cxnSp>
+          <p:nvCxnSpPr>
+            <p:cNvPr id="15" name="直接连接符 14"/>
+            <p:cNvCxnSpPr/>
+            <p:nvPr/>
+          </p:nvCxnSpPr>
+          <p:spPr>
+            <a:xfrm flipH="1">
+              <a:off x="7245350" y="2520950"/>
+              <a:ext cx="349250" cy="0"/>
+            </a:xfrm>
+            <a:prstGeom prst="line">
+              <a:avLst/>
+            </a:prstGeom>
+            <a:ln w="25400">
+              <a:solidFill>
+                <a:schemeClr val="tx1"/>
+              </a:solidFill>
+            </a:ln>
+          </p:spPr>
+          <p:style>
+            <a:lnRef idx="1">
+              <a:schemeClr val="accent1"/>
+            </a:lnRef>
+            <a:fillRef idx="0">
+              <a:schemeClr val="accent1"/>
+            </a:fillRef>
+            <a:effectRef idx="0">
+              <a:schemeClr val="accent1"/>
+            </a:effectRef>
+            <a:fontRef idx="minor">
+              <a:schemeClr val="tx1"/>
+            </a:fontRef>
+          </p:style>
+        </p:cxnSp>
+      </p:grpSp>
+      <p:grpSp>
+        <p:nvGrpSpPr>
+          <p:cNvPr id="22" name="组合 21"/>
+          <p:cNvGrpSpPr/>
+          <p:nvPr/>
+        </p:nvGrpSpPr>
+        <p:grpSpPr>
+          <a:xfrm flipV="1">
+            <a:off x="7242175" y="3929099"/>
+            <a:ext cx="349250" cy="1016000"/>
+            <a:chOff x="7235825" y="3498850"/>
+            <a:chExt cx="349250" cy="1016000"/>
+          </a:xfrm>
+        </p:grpSpPr>
+        <p:cxnSp>
+          <p:nvCxnSpPr>
+            <p:cNvPr id="20" name="直接连接符 19"/>
+            <p:cNvCxnSpPr/>
+            <p:nvPr/>
+          </p:nvCxnSpPr>
+          <p:spPr>
+            <a:xfrm>
+              <a:off x="7419975" y="3498850"/>
+              <a:ext cx="0" cy="1016000"/>
+            </a:xfrm>
+            <a:prstGeom prst="line">
+              <a:avLst/>
+            </a:prstGeom>
+            <a:ln w="25400">
+              <a:solidFill>
+                <a:schemeClr val="tx1"/>
+              </a:solidFill>
+            </a:ln>
+          </p:spPr>
+          <p:style>
+            <a:lnRef idx="1">
+              <a:schemeClr val="accent1"/>
+            </a:lnRef>
+            <a:fillRef idx="0">
+              <a:schemeClr val="accent1"/>
+            </a:fillRef>
+            <a:effectRef idx="0">
+              <a:schemeClr val="accent1"/>
+            </a:effectRef>
+            <a:fontRef idx="minor">
+              <a:schemeClr val="tx1"/>
+            </a:fontRef>
+          </p:style>
+        </p:cxnSp>
+        <p:cxnSp>
+          <p:nvCxnSpPr>
+            <p:cNvPr id="21" name="直接连接符 20"/>
+            <p:cNvCxnSpPr/>
+            <p:nvPr/>
+          </p:nvCxnSpPr>
+          <p:spPr>
+            <a:xfrm flipH="1">
+              <a:off x="7235825" y="4508500"/>
+              <a:ext cx="349250" cy="0"/>
+            </a:xfrm>
+            <a:prstGeom prst="line">
+              <a:avLst/>
+            </a:prstGeom>
+            <a:ln w="25400">
+              <a:solidFill>
+                <a:schemeClr val="tx1"/>
+              </a:solidFill>
+            </a:ln>
+          </p:spPr>
+          <p:style>
+            <a:lnRef idx="1">
+              <a:schemeClr val="accent1"/>
+            </a:lnRef>
+            <a:fillRef idx="0">
+              <a:schemeClr val="accent1"/>
+            </a:fillRef>
+            <a:effectRef idx="0">
+              <a:schemeClr val="accent1"/>
+            </a:effectRef>
+            <a:fontRef idx="minor">
+              <a:schemeClr val="tx1"/>
+            </a:fontRef>
+          </p:style>
+        </p:cxnSp>
+      </p:grpSp>
+      <p:cxnSp>
+        <p:nvCxnSpPr>
+          <p:cNvPr id="25" name="直接箭头连接符 24"/>
+          <p:cNvCxnSpPr/>
+          <p:nvPr/>
+        </p:nvCxnSpPr>
+        <p:spPr>
+          <a:xfrm>
+            <a:off x="4927601" y="4813300"/>
+            <a:ext cx="2489199" cy="0"/>
+          </a:xfrm>
+          <a:prstGeom prst="straightConnector1">
+            <a:avLst/>
+          </a:prstGeom>
+          <a:ln w="25400">
+            <a:solidFill>
+              <a:schemeClr val="tx1"/>
+            </a:solidFill>
+            <a:headEnd type="triangle"/>
+            <a:tailEnd type="triangle"/>
+          </a:ln>
+        </p:spPr>
+        <p:style>
+          <a:lnRef idx="1">
+            <a:schemeClr val="accent1"/>
+          </a:lnRef>
+          <a:fillRef idx="0">
+            <a:schemeClr val="accent1"/>
+          </a:fillRef>
+          <a:effectRef idx="0">
+            <a:schemeClr val="accent1"/>
+          </a:effectRef>
+          <a:fontRef idx="minor">
+            <a:schemeClr val="tx1"/>
+          </a:fontRef>
+        </p:style>
+      </p:cxnSp>
+      <p:cxnSp>
+        <p:nvCxnSpPr>
+          <p:cNvPr id="27" name="直接连接符 26"/>
+          <p:cNvCxnSpPr>
+            <a:stCxn id="4" idx="6"/>
+          </p:cNvCxnSpPr>
+          <p:nvPr/>
+        </p:nvCxnSpPr>
+        <p:spPr>
+          <a:xfrm>
+            <a:off x="5143501" y="3211551"/>
+            <a:ext cx="0" cy="1061999"/>
+          </a:xfrm>
+          <a:prstGeom prst="line">
+            <a:avLst/>
+          </a:prstGeom>
+          <a:ln w="25400">
+            <a:solidFill>
+              <a:schemeClr val="tx1"/>
+            </a:solidFill>
+          </a:ln>
+        </p:spPr>
+        <p:style>
+          <a:lnRef idx="1">
+            <a:schemeClr val="accent1"/>
+          </a:lnRef>
+          <a:fillRef idx="0">
+            <a:schemeClr val="accent1"/>
+          </a:fillRef>
+          <a:effectRef idx="0">
+            <a:schemeClr val="accent1"/>
+          </a:effectRef>
+          <a:fontRef idx="minor">
+            <a:schemeClr val="tx1"/>
+          </a:fontRef>
+        </p:style>
+      </p:cxnSp>
+      <p:cxnSp>
+        <p:nvCxnSpPr>
+          <p:cNvPr id="30" name="直接箭头连接符 29"/>
+          <p:cNvCxnSpPr/>
+          <p:nvPr/>
+        </p:nvCxnSpPr>
+        <p:spPr>
+          <a:xfrm>
+            <a:off x="5143501" y="4184650"/>
+            <a:ext cx="2273299" cy="0"/>
+          </a:xfrm>
+          <a:prstGeom prst="straightConnector1">
+            <a:avLst/>
+          </a:prstGeom>
+          <a:ln w="25400">
+            <a:solidFill>
+              <a:schemeClr val="tx1"/>
+            </a:solidFill>
+            <a:headEnd type="triangle"/>
+            <a:tailEnd type="triangle"/>
+          </a:ln>
+        </p:spPr>
+        <p:style>
+          <a:lnRef idx="1">
+            <a:schemeClr val="accent1"/>
+          </a:lnRef>
+          <a:fillRef idx="0">
+            <a:schemeClr val="accent1"/>
+          </a:fillRef>
+          <a:effectRef idx="0">
+            <a:schemeClr val="accent1"/>
+          </a:effectRef>
+          <a:fontRef idx="minor">
+            <a:schemeClr val="tx1"/>
+          </a:fontRef>
+        </p:style>
+      </p:cxnSp>
+      <mc:AlternateContent xmlns:mc="http://schemas.openxmlformats.org/markup-compatibility/2006">
+        <mc:Choice xmlns:a14="http://schemas.microsoft.com/office/drawing/2010/main" Requires="a14">
+          <p:sp>
+            <p:nvSpPr>
+              <p:cNvPr id="32" name="文本框 31"/>
+              <p:cNvSpPr txBox="1"/>
+              <p:nvPr/>
+            </p:nvSpPr>
+            <p:spPr>
+              <a:xfrm>
+                <a:off x="5862638" y="4443968"/>
+                <a:ext cx="844550" cy="369332"/>
+              </a:xfrm>
+              <a:prstGeom prst="rect">
+                <a:avLst/>
+              </a:prstGeom>
+              <a:noFill/>
+            </p:spPr>
+            <p:txBody>
+              <a:bodyPr wrap="square" rtlCol="0">
+                <a:spAutoFit/>
+              </a:bodyPr>
+              <a:lstStyle/>
+              <a:p>
+                <a14:m>
+                  <m:oMathPara xmlns:m="http://schemas.openxmlformats.org/officeDocument/2006/math">
+                    <m:oMathParaPr>
+                      <m:jc m:val="centerGroup"/>
+                    </m:oMathParaPr>
+                    <m:oMath xmlns:m="http://schemas.openxmlformats.org/officeDocument/2006/math">
+                      <m:sSubSup>
+                        <m:sSubSupPr>
+                          <m:ctrlPr>
+                            <a:rPr lang="en-US" altLang="zh-CN" b="0" i="1" smtClean="0">
+                              <a:latin typeface="Cambria Math" panose="02040503050406030204" pitchFamily="18" charset="0"/>
+                            </a:rPr>
+                          </m:ctrlPr>
+                        </m:sSubSupPr>
+                        <m:e>
+                          <m:r>
+                            <a:rPr lang="en-US" altLang="zh-CN" b="0" i="1" smtClean="0">
+                              <a:latin typeface="Cambria Math" panose="02040503050406030204" pitchFamily="18" charset="0"/>
+                            </a:rPr>
+                            <m:t>𝑙</m:t>
+                          </m:r>
+                        </m:e>
+                        <m:sub>
+                          <m:r>
+                            <a:rPr lang="en-US" altLang="zh-CN" b="0" i="1" smtClean="0">
+                              <a:latin typeface="Cambria Math" panose="02040503050406030204" pitchFamily="18" charset="0"/>
+                            </a:rPr>
+                            <m:t>𝑧</m:t>
+                          </m:r>
+                        </m:sub>
+                        <m:sup>
+                          <m:r>
+                            <a:rPr lang="en-US" altLang="zh-CN" b="0" i="1" smtClean="0">
+                              <a:latin typeface="Cambria Math" panose="02040503050406030204" pitchFamily="18" charset="0"/>
+                            </a:rPr>
+                            <m:t>′</m:t>
+                          </m:r>
+                        </m:sup>
+                      </m:sSubSup>
+                    </m:oMath>
+                  </m:oMathPara>
+                </a14:m>
+                <a:endParaRPr lang="en-US" altLang="zh-CN" b="0" dirty="0"/>
+              </a:p>
+            </p:txBody>
+          </p:sp>
+        </mc:Choice>
+        <mc:Fallback>
+          <p:sp>
+            <p:nvSpPr>
+              <p:cNvPr id="32" name="文本框 31"/>
+              <p:cNvSpPr txBox="1">
+                <a:spLocks noRot="1" noChangeAspect="1" noMove="1" noResize="1" noEditPoints="1" noAdjustHandles="1" noChangeArrowheads="1" noChangeShapeType="1" noTextEdit="1"/>
+              </p:cNvSpPr>
+              <p:nvPr/>
+            </p:nvSpPr>
+            <p:spPr>
+              <a:xfrm>
+                <a:off x="5862638" y="4443968"/>
+                <a:ext cx="844550" cy="369332"/>
+              </a:xfrm>
+              <a:prstGeom prst="rect">
+                <a:avLst/>
+              </a:prstGeom>
+              <a:blipFill rotWithShape="1">
+                <a:blip r:embed="rId1"/>
+                <a:stretch>
+                  <a:fillRect l="-38" t="-64" r="38"/>
+                </a:stretch>
+              </a:blipFill>
+            </p:spPr>
+            <p:txBody>
+              <a:bodyPr/>
+              <a:lstStyle/>
+              <a:p>
+                <a:r>
+                  <a:rPr lang="zh-CN" altLang="en-US">
+                    <a:noFill/>
+                  </a:rPr>
+                  <a:t> </a:t>
+                </a:r>
+              </a:p>
+            </p:txBody>
+          </p:sp>
+        </mc:Fallback>
+      </mc:AlternateContent>
+      <mc:AlternateContent xmlns:mc="http://schemas.openxmlformats.org/markup-compatibility/2006">
+        <mc:Choice xmlns:a14="http://schemas.microsoft.com/office/drawing/2010/main" Requires="a14">
+          <p:sp>
+            <p:nvSpPr>
+              <p:cNvPr id="33" name="文本框 32"/>
+              <p:cNvSpPr txBox="1"/>
+              <p:nvPr/>
+            </p:nvSpPr>
+            <p:spPr>
+              <a:xfrm>
+                <a:off x="5853113" y="3751302"/>
+                <a:ext cx="844550" cy="369332"/>
+              </a:xfrm>
+              <a:prstGeom prst="rect">
+                <a:avLst/>
+              </a:prstGeom>
+              <a:noFill/>
+            </p:spPr>
+            <p:txBody>
+              <a:bodyPr wrap="square" rtlCol="0">
+                <a:spAutoFit/>
+              </a:bodyPr>
+              <a:lstStyle/>
+              <a:p>
+                <a14:m>
+                  <m:oMathPara xmlns:m="http://schemas.openxmlformats.org/officeDocument/2006/math">
+                    <m:oMathParaPr>
+                      <m:jc m:val="centerGroup"/>
+                    </m:oMathParaPr>
+                    <m:oMath xmlns:m="http://schemas.openxmlformats.org/officeDocument/2006/math">
+                      <m:sSup>
+                        <m:sSupPr>
+                          <m:ctrlPr>
+                            <a:rPr lang="en-US" altLang="zh-CN" b="0" i="1" smtClean="0">
+                              <a:latin typeface="Cambria Math" panose="02040503050406030204" pitchFamily="18" charset="0"/>
+                            </a:rPr>
+                          </m:ctrlPr>
+                        </m:sSupPr>
+                        <m:e>
+                          <m:r>
+                            <a:rPr lang="en-US" altLang="zh-CN" b="0" i="1" smtClean="0">
+                              <a:latin typeface="Cambria Math" panose="02040503050406030204" pitchFamily="18" charset="0"/>
+                            </a:rPr>
+                            <m:t>𝑝</m:t>
+                          </m:r>
+                        </m:e>
+                        <m:sup>
+                          <m:r>
+                            <a:rPr lang="en-US" altLang="zh-CN" b="0" i="1" smtClean="0">
+                              <a:latin typeface="Cambria Math" panose="02040503050406030204" pitchFamily="18" charset="0"/>
+                            </a:rPr>
+                            <m:t>′</m:t>
+                          </m:r>
+                        </m:sup>
+                      </m:sSup>
+                    </m:oMath>
+                  </m:oMathPara>
+                </a14:m>
+                <a:endParaRPr lang="en-US" altLang="zh-CN" b="0" dirty="0"/>
+              </a:p>
+            </p:txBody>
+          </p:sp>
+        </mc:Choice>
+        <mc:Fallback>
+          <p:sp>
+            <p:nvSpPr>
+              <p:cNvPr id="33" name="文本框 32"/>
+              <p:cNvSpPr txBox="1">
+                <a:spLocks noRot="1" noChangeAspect="1" noMove="1" noResize="1" noEditPoints="1" noAdjustHandles="1" noChangeArrowheads="1" noChangeShapeType="1" noTextEdit="1"/>
+              </p:cNvSpPr>
+              <p:nvPr/>
+            </p:nvSpPr>
+            <p:spPr>
+              <a:xfrm>
+                <a:off x="5853113" y="3751302"/>
+                <a:ext cx="844550" cy="369332"/>
+              </a:xfrm>
+              <a:prstGeom prst="rect">
+                <a:avLst/>
+              </a:prstGeom>
+              <a:blipFill rotWithShape="1">
+                <a:blip r:embed="rId2"/>
+                <a:stretch>
+                  <a:fillRect l="-38" t="-97" r="38" b="32"/>
+                </a:stretch>
+              </a:blipFill>
+            </p:spPr>
+            <p:txBody>
+              <a:bodyPr/>
+              <a:lstStyle/>
+              <a:p>
+                <a:r>
+                  <a:rPr lang="zh-CN" altLang="en-US">
+                    <a:noFill/>
+                  </a:rPr>
+                  <a:t> </a:t>
+                </a:r>
+              </a:p>
+            </p:txBody>
+          </p:sp>
+        </mc:Fallback>
+      </mc:AlternateContent>
+    </p:spTree>
+  </p:cSld>
+  <p:clrMapOvr>
+    <a:masterClrMapping/>
+  </p:clrMapOvr>
+</p:sld>
+</file>
+
+<file path=ppt/slides/slide4.xml><?xml version="1.0" encoding="utf-8"?>
+<p:sld xmlns:a="http://schemas.openxmlformats.org/drawingml/2006/main" xmlns:r="http://schemas.openxmlformats.org/officeDocument/2006/relationships" xmlns:p="http://schemas.openxmlformats.org/presentationml/2006/main">
+  <p:cSld>
+    <p:spTree>
+      <p:nvGrpSpPr>
+        <p:cNvPr id="1" name=""/>
+        <p:cNvGrpSpPr/>
+        <p:nvPr/>
+      </p:nvGrpSpPr>
+      <p:grpSpPr>
+        <a:xfrm>
+          <a:off x="0" y="0"/>
+          <a:ext cx="0" cy="0"/>
+          <a:chOff x="0" y="0"/>
+          <a:chExt cx="0" cy="0"/>
+        </a:xfrm>
+      </p:grpSpPr>
+      <p:grpSp>
+        <p:nvGrpSpPr>
+          <p:cNvPr id="5" name="组合 4"/>
           <p:cNvGrpSpPr/>
           <p:nvPr/>
         </p:nvGrpSpPr>
@@ -10495,10 +11192,10 @@
                 </a:gdLst>
                 <a:ahLst/>
                 <a:cxnLst>
-                  <a:cxn ang="3cd4">
+                  <a:cxn ang="3">
                     <a:pos x="hc" y="t"/>
                   </a:cxn>
-                  <a:cxn ang="3cd4">
+                  <a:cxn ang="3">
                     <a:pos x="il" y="it"/>
                   </a:cxn>
                   <a:cxn ang="cd2">
@@ -10516,7 +11213,7 @@
                   <a:cxn ang="0">
                     <a:pos x="r" y="vc"/>
                   </a:cxn>
-                  <a:cxn ang="3cd4">
+                  <a:cxn ang="3">
                     <a:pos x="ir" y="it"/>
                   </a:cxn>
                 </a:cxnLst>
@@ -10728,7 +11425,6 @@
                 </a:bodyPr>
                 <a:lstStyle/>
                 <a:p>
-                  <a:pPr/>
                   <a14:m>
                     <m:oMathPara xmlns:m="http://schemas.openxmlformats.org/officeDocument/2006/math">
                       <m:oMathParaPr>
@@ -10767,11 +11463,8 @@
                 <a:prstGeom prst="rect">
                   <a:avLst/>
                 </a:prstGeom>
-                <a:blipFill>
-                  <a:blip r:embed="rId2"/>
-                  <a:stretch>
-                    <a:fillRect l="-53846" r="-238462"/>
-                  </a:stretch>
+                <a:blipFill rotWithShape="1">
+                  <a:blip r:embed="rId1"/>
                 </a:blipFill>
               </p:spPr>
               <p:txBody>
@@ -10813,7 +11506,6 @@
                 </a:bodyPr>
                 <a:lstStyle/>
                 <a:p>
-                  <a:pPr/>
                   <a14:m>
                     <m:oMathPara xmlns:m="http://schemas.openxmlformats.org/officeDocument/2006/math">
                       <m:oMathParaPr>
@@ -10852,11 +11544,8 @@
                 <a:prstGeom prst="rect">
                   <a:avLst/>
                 </a:prstGeom>
-                <a:blipFill>
-                  <a:blip r:embed="rId3"/>
-                  <a:stretch>
-                    <a:fillRect l="-53846" r="-246154"/>
-                  </a:stretch>
+                <a:blipFill rotWithShape="1">
+                  <a:blip r:embed="rId2"/>
                 </a:blipFill>
               </p:spPr>
               <p:txBody>
@@ -10898,7 +11587,6 @@
                 </a:bodyPr>
                 <a:lstStyle/>
                 <a:p>
-                  <a:pPr/>
                   <a14:m>
                     <m:oMathPara xmlns:m="http://schemas.openxmlformats.org/officeDocument/2006/math">
                       <m:oMathParaPr>
@@ -10949,7 +11637,6 @@
                   </a:endParaRPr>
                 </a:p>
                 <a:p>
-                  <a:pPr/>
                   <a14:m>
                     <m:oMathPara xmlns:m="http://schemas.openxmlformats.org/officeDocument/2006/math">
                       <m:oMathParaPr>
@@ -10991,11 +11678,8 @@
                 <a:prstGeom prst="rect">
                   <a:avLst/>
                 </a:prstGeom>
-                <a:blipFill>
-                  <a:blip r:embed="rId4"/>
-                  <a:stretch>
-                    <a:fillRect b="-38462"/>
-                  </a:stretch>
+                <a:blipFill rotWithShape="1">
+                  <a:blip r:embed="rId3"/>
                 </a:blipFill>
               </p:spPr>
               <p:txBody>
@@ -11016,13 +11700,7 @@
       </p:grpSp>
       <p:grpSp>
         <p:nvGrpSpPr>
-          <p:cNvPr id="4" name="组合 3">
-            <a:extLst>
-              <a:ext uri="{FF2B5EF4-FFF2-40B4-BE49-F238E27FC236}">
-                <a16:creationId xmlns:a16="http://schemas.microsoft.com/office/drawing/2014/main" id="{C0FF7CD8-90C0-B16E-8D0C-150D586B1825}"/>
-              </a:ext>
-            </a:extLst>
-          </p:cNvPr>
+          <p:cNvPr id="4" name="组合 3"/>
           <p:cNvGrpSpPr/>
           <p:nvPr/>
         </p:nvGrpSpPr>
@@ -11315,7 +11993,6 @@
                 </a:bodyPr>
                 <a:lstStyle/>
                 <a:p>
-                  <a:pPr/>
                   <a14:m>
                     <m:oMathPara xmlns:m="http://schemas.openxmlformats.org/officeDocument/2006/math">
                       <m:oMathParaPr>
@@ -11354,11 +12031,8 @@
                 <a:prstGeom prst="rect">
                   <a:avLst/>
                 </a:prstGeom>
-                <a:blipFill>
-                  <a:blip r:embed="rId5"/>
-                  <a:stretch>
-                    <a:fillRect l="-53846" r="-238462"/>
-                  </a:stretch>
+                <a:blipFill rotWithShape="1">
+                  <a:blip r:embed="rId1"/>
                 </a:blipFill>
               </p:spPr>
               <p:txBody>
@@ -11400,7 +12074,6 @@
                 </a:bodyPr>
                 <a:lstStyle/>
                 <a:p>
-                  <a:pPr/>
                   <a14:m>
                     <m:oMathPara xmlns:m="http://schemas.openxmlformats.org/officeDocument/2006/math">
                       <m:oMathParaPr>
@@ -11439,11 +12112,8 @@
                 <a:prstGeom prst="rect">
                   <a:avLst/>
                 </a:prstGeom>
-                <a:blipFill>
-                  <a:blip r:embed="rId6"/>
-                  <a:stretch>
-                    <a:fillRect l="-53846" r="-246154"/>
-                  </a:stretch>
+                <a:blipFill rotWithShape="1">
+                  <a:blip r:embed="rId2"/>
                 </a:blipFill>
               </p:spPr>
               <p:txBody>
@@ -11485,7 +12155,6 @@
                 </a:bodyPr>
                 <a:lstStyle/>
                 <a:p>
-                  <a:pPr/>
                   <a14:m>
                     <m:oMathPara xmlns:m="http://schemas.openxmlformats.org/officeDocument/2006/math">
                       <m:oMathParaPr>
@@ -11536,7 +12205,6 @@
                   </a:endParaRPr>
                 </a:p>
                 <a:p>
-                  <a:pPr/>
                   <a14:m>
                     <m:oMathPara xmlns:m="http://schemas.openxmlformats.org/officeDocument/2006/math">
                       <m:oMathParaPr>
@@ -11578,11 +12246,8 @@
                 <a:prstGeom prst="rect">
                   <a:avLst/>
                 </a:prstGeom>
-                <a:blipFill>
-                  <a:blip r:embed="rId7"/>
-                  <a:stretch>
-                    <a:fillRect b="-37879"/>
-                  </a:stretch>
+                <a:blipFill rotWithShape="1">
+                  <a:blip r:embed="rId4"/>
                 </a:blipFill>
               </p:spPr>
               <p:txBody>
@@ -11603,13 +12268,7 @@
       </p:grpSp>
       <p:grpSp>
         <p:nvGrpSpPr>
-          <p:cNvPr id="2" name="组合 1">
-            <a:extLst>
-              <a:ext uri="{FF2B5EF4-FFF2-40B4-BE49-F238E27FC236}">
-                <a16:creationId xmlns:a16="http://schemas.microsoft.com/office/drawing/2014/main" id="{3C049A94-4A64-44FA-0B85-7ED319B145CB}"/>
-              </a:ext>
-            </a:extLst>
-          </p:cNvPr>
+          <p:cNvPr id="2" name="组合 1"/>
           <p:cNvGrpSpPr/>
           <p:nvPr/>
         </p:nvGrpSpPr>
@@ -11807,7 +12466,6 @@
                 </a:bodyPr>
                 <a:lstStyle/>
                 <a:p>
-                  <a:pPr/>
                   <a14:m>
                     <m:oMathPara xmlns:m="http://schemas.openxmlformats.org/officeDocument/2006/math">
                       <m:oMathParaPr>
@@ -11846,11 +12504,8 @@
                 <a:prstGeom prst="rect">
                   <a:avLst/>
                 </a:prstGeom>
-                <a:blipFill>
-                  <a:blip r:embed="rId8"/>
-                  <a:stretch>
-                    <a:fillRect l="-53846" r="-238462"/>
-                  </a:stretch>
+                <a:blipFill rotWithShape="1">
+                  <a:blip r:embed="rId1"/>
                 </a:blipFill>
               </p:spPr>
               <p:txBody>
@@ -11892,7 +12547,6 @@
                 </a:bodyPr>
                 <a:lstStyle/>
                 <a:p>
-                  <a:pPr/>
                   <a14:m>
                     <m:oMathPara xmlns:m="http://schemas.openxmlformats.org/officeDocument/2006/math">
                       <m:oMathParaPr>
@@ -11948,7 +12602,6 @@
                   </a:endParaRPr>
                 </a:p>
                 <a:p>
-                  <a:pPr/>
                   <a14:m>
                     <m:oMathPara xmlns:m="http://schemas.openxmlformats.org/officeDocument/2006/math">
                       <m:oMathParaPr>
@@ -11990,11 +12643,8 @@
                 <a:prstGeom prst="rect">
                   <a:avLst/>
                 </a:prstGeom>
-                <a:blipFill>
-                  <a:blip r:embed="rId9"/>
-                  <a:stretch>
-                    <a:fillRect b="-109231"/>
-                  </a:stretch>
+                <a:blipFill rotWithShape="1">
+                  <a:blip r:embed="rId5"/>
                 </a:blipFill>
               </p:spPr>
               <p:txBody>
@@ -12015,13 +12665,7 @@
       </p:grpSp>
       <p:sp>
         <p:nvSpPr>
-          <p:cNvPr id="7" name="任意多边形 22">
-            <a:extLst>
-              <a:ext uri="{FF2B5EF4-FFF2-40B4-BE49-F238E27FC236}">
-                <a16:creationId xmlns:a16="http://schemas.microsoft.com/office/drawing/2014/main" id="{7E9073F6-7EE8-618D-F080-5DA2609841DF}"/>
-              </a:ext>
-            </a:extLst>
-          </p:cNvPr>
+          <p:cNvPr id="7" name="任意多边形 22"/>
           <p:cNvSpPr/>
           <p:nvPr/>
         </p:nvSpPr>
@@ -12173,13 +12817,7 @@
       </p:sp>
       <p:cxnSp>
         <p:nvCxnSpPr>
-          <p:cNvPr id="8" name="直接连接符 7">
-            <a:extLst>
-              <a:ext uri="{FF2B5EF4-FFF2-40B4-BE49-F238E27FC236}">
-                <a16:creationId xmlns:a16="http://schemas.microsoft.com/office/drawing/2014/main" id="{9D1F204E-9409-CAF8-B806-248277B688A4}"/>
-              </a:ext>
-            </a:extLst>
-          </p:cNvPr>
+          <p:cNvPr id="8" name="直接连接符 7"/>
           <p:cNvCxnSpPr/>
           <p:nvPr/>
         </p:nvCxnSpPr>
@@ -12214,13 +12852,7 @@
       </p:cxnSp>
       <p:cxnSp>
         <p:nvCxnSpPr>
-          <p:cNvPr id="9" name="直接连接符 8">
-            <a:extLst>
-              <a:ext uri="{FF2B5EF4-FFF2-40B4-BE49-F238E27FC236}">
-                <a16:creationId xmlns:a16="http://schemas.microsoft.com/office/drawing/2014/main" id="{C363737D-D9B5-6DA3-7368-7BAD56DF55DD}"/>
-              </a:ext>
-            </a:extLst>
-          </p:cNvPr>
+          <p:cNvPr id="9" name="直接连接符 8"/>
           <p:cNvCxnSpPr/>
           <p:nvPr/>
         </p:nvCxnSpPr>
@@ -12255,13 +12887,7 @@
       </p:cxnSp>
       <p:cxnSp>
         <p:nvCxnSpPr>
-          <p:cNvPr id="10" name="直接连接符 9">
-            <a:extLst>
-              <a:ext uri="{FF2B5EF4-FFF2-40B4-BE49-F238E27FC236}">
-                <a16:creationId xmlns:a16="http://schemas.microsoft.com/office/drawing/2014/main" id="{3988586D-E25A-E04D-0CBF-BA80CD5C9834}"/>
-              </a:ext>
-            </a:extLst>
-          </p:cNvPr>
+          <p:cNvPr id="10" name="直接连接符 9"/>
           <p:cNvCxnSpPr/>
           <p:nvPr/>
         </p:nvCxnSpPr>
@@ -12298,13 +12924,7 @@
         <mc:Choice xmlns:a14="http://schemas.microsoft.com/office/drawing/2010/main" Requires="a14">
           <p:sp>
             <p:nvSpPr>
-              <p:cNvPr id="11" name="文本框 10">
-                <a:extLst>
-                  <a:ext uri="{FF2B5EF4-FFF2-40B4-BE49-F238E27FC236}">
-                    <a16:creationId xmlns:a16="http://schemas.microsoft.com/office/drawing/2014/main" id="{4BC67BFC-5F04-1449-B21B-957CEA86A410}"/>
-                  </a:ext>
-                </a:extLst>
-              </p:cNvPr>
+              <p:cNvPr id="11" name="文本框 10"/>
               <p:cNvSpPr txBox="1"/>
               <p:nvPr/>
             </p:nvSpPr>
@@ -12324,7 +12944,6 @@
               </a:bodyPr>
               <a:lstStyle/>
               <a:p>
-                <a:pPr/>
                 <a14:m>
                   <m:oMathPara xmlns:m="http://schemas.openxmlformats.org/officeDocument/2006/math">
                     <m:oMathParaPr>
@@ -12349,13 +12968,7 @@
         <mc:Fallback>
           <p:sp>
             <p:nvSpPr>
-              <p:cNvPr id="11" name="文本框 10">
-                <a:extLst>
-                  <a:ext uri="{FF2B5EF4-FFF2-40B4-BE49-F238E27FC236}">
-                    <a16:creationId xmlns:a16="http://schemas.microsoft.com/office/drawing/2014/main" id="{4BC67BFC-5F04-1449-B21B-957CEA86A410}"/>
-                  </a:ext>
-                </a:extLst>
-              </p:cNvPr>
+              <p:cNvPr id="11" name="文本框 10"/>
               <p:cNvSpPr txBox="1">
                 <a:spLocks noRot="1" noChangeAspect="1" noMove="1" noResize="1" noEditPoints="1" noAdjustHandles="1" noChangeArrowheads="1" noChangeShapeType="1" noTextEdit="1"/>
               </p:cNvSpPr>
@@ -12369,10 +12982,10 @@
               <a:prstGeom prst="rect">
                 <a:avLst/>
               </a:prstGeom>
-              <a:blipFill>
-                <a:blip r:embed="rId10"/>
+              <a:blipFill rotWithShape="1">
+                <a:blip r:embed="rId1"/>
                 <a:stretch>
-                  <a:fillRect l="-58333" r="-266667"/>
+                  <a:fillRect l="-657" t="-86" r="-139343" b="86"/>
                 </a:stretch>
               </a:blipFill>
             </p:spPr>
@@ -12395,13 +13008,7 @@
         <mc:Choice xmlns:a14="http://schemas.microsoft.com/office/drawing/2010/main" Requires="a14">
           <p:sp>
             <p:nvSpPr>
-              <p:cNvPr id="12" name="文本框 11">
-                <a:extLst>
-                  <a:ext uri="{FF2B5EF4-FFF2-40B4-BE49-F238E27FC236}">
-                    <a16:creationId xmlns:a16="http://schemas.microsoft.com/office/drawing/2014/main" id="{9EC065E0-F4F8-CFD0-3B5E-BC2F6FE7A06C}"/>
-                  </a:ext>
-                </a:extLst>
-              </p:cNvPr>
+              <p:cNvPr id="12" name="文本框 11"/>
               <p:cNvSpPr txBox="1"/>
               <p:nvPr/>
             </p:nvSpPr>
@@ -12421,7 +13028,6 @@
               </a:bodyPr>
               <a:lstStyle/>
               <a:p>
-                <a:pPr/>
                 <a14:m>
                   <m:oMathPara xmlns:m="http://schemas.openxmlformats.org/officeDocument/2006/math">
                     <m:oMathParaPr>
@@ -12446,13 +13052,7 @@
         <mc:Fallback>
           <p:sp>
             <p:nvSpPr>
-              <p:cNvPr id="12" name="文本框 11">
-                <a:extLst>
-                  <a:ext uri="{FF2B5EF4-FFF2-40B4-BE49-F238E27FC236}">
-                    <a16:creationId xmlns:a16="http://schemas.microsoft.com/office/drawing/2014/main" id="{9EC065E0-F4F8-CFD0-3B5E-BC2F6FE7A06C}"/>
-                  </a:ext>
-                </a:extLst>
-              </p:cNvPr>
+              <p:cNvPr id="12" name="文本框 11"/>
               <p:cNvSpPr txBox="1">
                 <a:spLocks noRot="1" noChangeAspect="1" noMove="1" noResize="1" noEditPoints="1" noAdjustHandles="1" noChangeArrowheads="1" noChangeShapeType="1" noTextEdit="1"/>
               </p:cNvSpPr>
@@ -12466,10 +13066,10 @@
               <a:prstGeom prst="rect">
                 <a:avLst/>
               </a:prstGeom>
-              <a:blipFill>
-                <a:blip r:embed="rId11"/>
+              <a:blipFill rotWithShape="1">
+                <a:blip r:embed="rId2"/>
                 <a:stretch>
-                  <a:fillRect l="-58333" r="-275000"/>
+                  <a:fillRect l="-657" t="-86" r="-146009" b="86"/>
                 </a:stretch>
               </a:blipFill>
             </p:spPr>
@@ -12492,13 +13092,7 @@
         <mc:Choice xmlns:a14="http://schemas.microsoft.com/office/drawing/2010/main" Requires="a14">
           <p:sp>
             <p:nvSpPr>
-              <p:cNvPr id="13" name="文本框 12">
-                <a:extLst>
-                  <a:ext uri="{FF2B5EF4-FFF2-40B4-BE49-F238E27FC236}">
-                    <a16:creationId xmlns:a16="http://schemas.microsoft.com/office/drawing/2014/main" id="{DB931779-632C-4262-CF35-C27280C4C3C9}"/>
-                  </a:ext>
-                </a:extLst>
-              </p:cNvPr>
+              <p:cNvPr id="13" name="文本框 12"/>
               <p:cNvSpPr txBox="1"/>
               <p:nvPr/>
             </p:nvSpPr>
@@ -12518,7 +13112,6 @@
               </a:bodyPr>
               <a:lstStyle/>
               <a:p>
-                <a:pPr/>
                 <a14:m>
                   <m:oMathPara xmlns:m="http://schemas.openxmlformats.org/officeDocument/2006/math">
                     <m:oMathParaPr>
@@ -12569,7 +13162,6 @@
                 </a:endParaRPr>
               </a:p>
               <a:p>
-                <a:pPr/>
                 <a14:m>
                   <m:oMathPara xmlns:m="http://schemas.openxmlformats.org/officeDocument/2006/math">
                     <m:oMathParaPr>
@@ -12597,13 +13189,7 @@
         <mc:Fallback>
           <p:sp>
             <p:nvSpPr>
-              <p:cNvPr id="13" name="文本框 12">
-                <a:extLst>
-                  <a:ext uri="{FF2B5EF4-FFF2-40B4-BE49-F238E27FC236}">
-                    <a16:creationId xmlns:a16="http://schemas.microsoft.com/office/drawing/2014/main" id="{DB931779-632C-4262-CF35-C27280C4C3C9}"/>
-                  </a:ext>
-                </a:extLst>
-              </p:cNvPr>
+              <p:cNvPr id="13" name="文本框 12"/>
               <p:cNvSpPr txBox="1">
                 <a:spLocks noRot="1" noChangeAspect="1" noMove="1" noResize="1" noEditPoints="1" noAdjustHandles="1" noChangeArrowheads="1" noChangeShapeType="1" noTextEdit="1"/>
               </p:cNvSpPr>
@@ -12617,10 +13203,10 @@
               <a:prstGeom prst="rect">
                 <a:avLst/>
               </a:prstGeom>
-              <a:blipFill>
-                <a:blip r:embed="rId12"/>
+              <a:blipFill rotWithShape="1">
+                <a:blip r:embed="rId4"/>
                 <a:stretch>
-                  <a:fillRect b="-37879"/>
+                  <a:fillRect l="-28" t="-80" r="28" b="-49680"/>
                 </a:stretch>
               </a:blipFill>
             </p:spPr>
@@ -12641,13 +13227,7 @@
       </mc:AlternateContent>
       <p:sp>
         <p:nvSpPr>
-          <p:cNvPr id="16" name="弧形 15">
-            <a:extLst>
-              <a:ext uri="{FF2B5EF4-FFF2-40B4-BE49-F238E27FC236}">
-                <a16:creationId xmlns:a16="http://schemas.microsoft.com/office/drawing/2014/main" id="{51483A03-C72B-39C7-A70A-DBCB3BF9DB04}"/>
-              </a:ext>
-            </a:extLst>
-          </p:cNvPr>
+          <p:cNvPr id="16" name="弧形 15"/>
           <p:cNvSpPr/>
           <p:nvPr/>
         </p:nvSpPr>
@@ -12699,7 +13279,7 @@
 </p:sld>
 </file>
 
-<file path=ppt/slides/slide4.xml><?xml version="1.0" encoding="utf-8"?>
+<file path=ppt/slides/slide5.xml><?xml version="1.0" encoding="utf-8"?>
 <p:sld xmlns:a="http://schemas.openxmlformats.org/drawingml/2006/main" xmlns:r="http://schemas.openxmlformats.org/officeDocument/2006/relationships" xmlns:p="http://schemas.openxmlformats.org/presentationml/2006/main">
   <p:cSld>
     <p:spTree>
@@ -12718,13 +13298,7 @@
       </p:grpSpPr>
       <p:sp>
         <p:nvSpPr>
-          <p:cNvPr id="2" name="任意多边形 22">
-            <a:extLst>
-              <a:ext uri="{FF2B5EF4-FFF2-40B4-BE49-F238E27FC236}">
-                <a16:creationId xmlns:a16="http://schemas.microsoft.com/office/drawing/2014/main" id="{33306745-B73A-F314-1D72-7A6B6B4D5A95}"/>
-              </a:ext>
-            </a:extLst>
-          </p:cNvPr>
+          <p:cNvPr id="2" name="任意多边形 22"/>
           <p:cNvSpPr/>
           <p:nvPr/>
         </p:nvSpPr>
@@ -12876,13 +13450,7 @@
       </p:sp>
       <p:cxnSp>
         <p:nvCxnSpPr>
-          <p:cNvPr id="3" name="直接连接符 2">
-            <a:extLst>
-              <a:ext uri="{FF2B5EF4-FFF2-40B4-BE49-F238E27FC236}">
-                <a16:creationId xmlns:a16="http://schemas.microsoft.com/office/drawing/2014/main" id="{460897DB-4A01-F92D-34D7-3AA1D5EA9FCE}"/>
-              </a:ext>
-            </a:extLst>
-          </p:cNvPr>
+          <p:cNvPr id="3" name="直接连接符 2"/>
           <p:cNvCxnSpPr/>
           <p:nvPr/>
         </p:nvCxnSpPr>
@@ -12917,13 +13485,7 @@
       </p:cxnSp>
       <p:cxnSp>
         <p:nvCxnSpPr>
-          <p:cNvPr id="4" name="直接连接符 3">
-            <a:extLst>
-              <a:ext uri="{FF2B5EF4-FFF2-40B4-BE49-F238E27FC236}">
-                <a16:creationId xmlns:a16="http://schemas.microsoft.com/office/drawing/2014/main" id="{18214DEC-24AF-4B17-90FF-153829477A1B}"/>
-              </a:ext>
-            </a:extLst>
-          </p:cNvPr>
+          <p:cNvPr id="4" name="直接连接符 3"/>
           <p:cNvCxnSpPr/>
           <p:nvPr/>
         </p:nvCxnSpPr>
@@ -12960,13 +13522,7 @@
         <mc:Choice xmlns:a14="http://schemas.microsoft.com/office/drawing/2010/main" Requires="a14">
           <p:sp>
             <p:nvSpPr>
-              <p:cNvPr id="6" name="文本框 5">
-                <a:extLst>
-                  <a:ext uri="{FF2B5EF4-FFF2-40B4-BE49-F238E27FC236}">
-                    <a16:creationId xmlns:a16="http://schemas.microsoft.com/office/drawing/2014/main" id="{39FA1381-CB88-054A-EE19-9280205178BD}"/>
-                  </a:ext>
-                </a:extLst>
-              </p:cNvPr>
+              <p:cNvPr id="6" name="文本框 5"/>
               <p:cNvSpPr txBox="1"/>
               <p:nvPr/>
             </p:nvSpPr>
@@ -12986,7 +13542,6 @@
               </a:bodyPr>
               <a:lstStyle/>
               <a:p>
-                <a:pPr/>
                 <a14:m>
                   <m:oMathPara xmlns:m="http://schemas.openxmlformats.org/officeDocument/2006/math">
                     <m:oMathParaPr>
@@ -13011,13 +13566,7 @@
         <mc:Fallback>
           <p:sp>
             <p:nvSpPr>
-              <p:cNvPr id="6" name="文本框 5">
-                <a:extLst>
-                  <a:ext uri="{FF2B5EF4-FFF2-40B4-BE49-F238E27FC236}">
-                    <a16:creationId xmlns:a16="http://schemas.microsoft.com/office/drawing/2014/main" id="{39FA1381-CB88-054A-EE19-9280205178BD}"/>
-                  </a:ext>
-                </a:extLst>
-              </p:cNvPr>
+              <p:cNvPr id="6" name="文本框 5"/>
               <p:cNvSpPr txBox="1">
                 <a:spLocks noRot="1" noChangeAspect="1" noMove="1" noResize="1" noEditPoints="1" noAdjustHandles="1" noChangeArrowheads="1" noChangeShapeType="1" noTextEdit="1"/>
               </p:cNvSpPr>
@@ -13031,10 +13580,10 @@
               <a:prstGeom prst="rect">
                 <a:avLst/>
               </a:prstGeom>
-              <a:blipFill>
-                <a:blip r:embed="rId2"/>
+              <a:blipFill rotWithShape="1">
+                <a:blip r:embed="rId1"/>
                 <a:stretch>
-                  <a:fillRect l="-58333" r="-266667"/>
+                  <a:fillRect l="-657" t="-86" r="-139343" b="86"/>
                 </a:stretch>
               </a:blipFill>
             </p:spPr>
@@ -13057,13 +13606,7 @@
         <mc:Choice xmlns:a14="http://schemas.microsoft.com/office/drawing/2010/main" Requires="a14">
           <p:sp>
             <p:nvSpPr>
-              <p:cNvPr id="7" name="文本框 6">
-                <a:extLst>
-                  <a:ext uri="{FF2B5EF4-FFF2-40B4-BE49-F238E27FC236}">
-                    <a16:creationId xmlns:a16="http://schemas.microsoft.com/office/drawing/2014/main" id="{964AFC79-5E41-F5DA-4AF0-5EF8BCBC4570}"/>
-                  </a:ext>
-                </a:extLst>
-              </p:cNvPr>
+              <p:cNvPr id="7" name="文本框 6"/>
               <p:cNvSpPr txBox="1"/>
               <p:nvPr/>
             </p:nvSpPr>
@@ -13083,7 +13626,6 @@
               </a:bodyPr>
               <a:lstStyle/>
               <a:p>
-                <a:pPr/>
                 <a14:m>
                   <m:oMathPara xmlns:m="http://schemas.openxmlformats.org/officeDocument/2006/math">
                     <m:oMathParaPr>
@@ -13108,13 +13650,7 @@
         <mc:Fallback>
           <p:sp>
             <p:nvSpPr>
-              <p:cNvPr id="7" name="文本框 6">
-                <a:extLst>
-                  <a:ext uri="{FF2B5EF4-FFF2-40B4-BE49-F238E27FC236}">
-                    <a16:creationId xmlns:a16="http://schemas.microsoft.com/office/drawing/2014/main" id="{964AFC79-5E41-F5DA-4AF0-5EF8BCBC4570}"/>
-                  </a:ext>
-                </a:extLst>
-              </p:cNvPr>
+              <p:cNvPr id="7" name="文本框 6"/>
               <p:cNvSpPr txBox="1">
                 <a:spLocks noRot="1" noChangeAspect="1" noMove="1" noResize="1" noEditPoints="1" noAdjustHandles="1" noChangeArrowheads="1" noChangeShapeType="1" noTextEdit="1"/>
               </p:cNvSpPr>
@@ -13128,10 +13664,10 @@
               <a:prstGeom prst="rect">
                 <a:avLst/>
               </a:prstGeom>
-              <a:blipFill>
-                <a:blip r:embed="rId3"/>
+              <a:blipFill rotWithShape="1">
+                <a:blip r:embed="rId2"/>
                 <a:stretch>
-                  <a:fillRect l="-58333" r="-275000"/>
+                  <a:fillRect l="-657" t="-86" r="-146009" b="86"/>
                 </a:stretch>
               </a:blipFill>
             </p:spPr>
@@ -13154,13 +13690,7 @@
         <mc:Choice xmlns:a14="http://schemas.microsoft.com/office/drawing/2010/main" Requires="a14">
           <p:sp>
             <p:nvSpPr>
-              <p:cNvPr id="8" name="文本框 7">
-                <a:extLst>
-                  <a:ext uri="{FF2B5EF4-FFF2-40B4-BE49-F238E27FC236}">
-                    <a16:creationId xmlns:a16="http://schemas.microsoft.com/office/drawing/2014/main" id="{A9F68C3E-CFCC-AC7A-D7DA-CA8D42BE284D}"/>
-                  </a:ext>
-                </a:extLst>
-              </p:cNvPr>
+              <p:cNvPr id="8" name="文本框 7"/>
               <p:cNvSpPr txBox="1"/>
               <p:nvPr/>
             </p:nvSpPr>
@@ -13180,7 +13710,6 @@
               </a:bodyPr>
               <a:lstStyle/>
               <a:p>
-                <a:pPr/>
                 <a14:m>
                   <m:oMathPara xmlns:m="http://schemas.openxmlformats.org/officeDocument/2006/math">
                     <m:oMathParaPr>
@@ -13203,7 +13732,6 @@
                 </a:endParaRPr>
               </a:p>
               <a:p>
-                <a:pPr/>
                 <a14:m>
                   <m:oMathPara xmlns:m="http://schemas.openxmlformats.org/officeDocument/2006/math">
                     <m:oMathParaPr>
@@ -13231,13 +13759,7 @@
         <mc:Fallback>
           <p:sp>
             <p:nvSpPr>
-              <p:cNvPr id="8" name="文本框 7">
-                <a:extLst>
-                  <a:ext uri="{FF2B5EF4-FFF2-40B4-BE49-F238E27FC236}">
-                    <a16:creationId xmlns:a16="http://schemas.microsoft.com/office/drawing/2014/main" id="{A9F68C3E-CFCC-AC7A-D7DA-CA8D42BE284D}"/>
-                  </a:ext>
-                </a:extLst>
-              </p:cNvPr>
+              <p:cNvPr id="8" name="文本框 7"/>
               <p:cNvSpPr txBox="1">
                 <a:spLocks noRot="1" noChangeAspect="1" noMove="1" noResize="1" noEditPoints="1" noAdjustHandles="1" noChangeArrowheads="1" noChangeShapeType="1" noTextEdit="1"/>
               </p:cNvSpPr>
@@ -13251,10 +13773,10 @@
               <a:prstGeom prst="rect">
                 <a:avLst/>
               </a:prstGeom>
-              <a:blipFill>
-                <a:blip r:embed="rId4"/>
+              <a:blipFill rotWithShape="1">
+                <a:blip r:embed="rId3"/>
                 <a:stretch>
-                  <a:fillRect b="-38462"/>
+                  <a:fillRect l="-28" t="-31" r="28" b="-49729"/>
                 </a:stretch>
               </a:blipFill>
             </p:spPr>
@@ -13275,13 +13797,7 @@
       </mc:AlternateContent>
       <p:sp>
         <p:nvSpPr>
-          <p:cNvPr id="9" name="弧形 8">
-            <a:extLst>
-              <a:ext uri="{FF2B5EF4-FFF2-40B4-BE49-F238E27FC236}">
-                <a16:creationId xmlns:a16="http://schemas.microsoft.com/office/drawing/2014/main" id="{F312FB37-338A-D535-8233-EB977491D50F}"/>
-              </a:ext>
-            </a:extLst>
-          </p:cNvPr>
+          <p:cNvPr id="9" name="弧形 8"/>
           <p:cNvSpPr/>
           <p:nvPr/>
         </p:nvSpPr>
@@ -13327,13 +13843,7 @@
       </p:sp>
       <p:sp>
         <p:nvSpPr>
-          <p:cNvPr id="10" name="任意多边形 22">
-            <a:extLst>
-              <a:ext uri="{FF2B5EF4-FFF2-40B4-BE49-F238E27FC236}">
-                <a16:creationId xmlns:a16="http://schemas.microsoft.com/office/drawing/2014/main" id="{F8859CDC-30C2-03A9-5AD9-656277EE9086}"/>
-              </a:ext>
-            </a:extLst>
-          </p:cNvPr>
+          <p:cNvPr id="10" name="任意多边形 22"/>
           <p:cNvSpPr/>
           <p:nvPr/>
         </p:nvSpPr>
@@ -13485,16 +13995,8 @@
       </p:sp>
       <p:cxnSp>
         <p:nvCxnSpPr>
-          <p:cNvPr id="12" name="直接连接符 11">
-            <a:extLst>
-              <a:ext uri="{FF2B5EF4-FFF2-40B4-BE49-F238E27FC236}">
-                <a16:creationId xmlns:a16="http://schemas.microsoft.com/office/drawing/2014/main" id="{C5E62040-8447-05AC-240F-4408DA697103}"/>
-              </a:ext>
-            </a:extLst>
-          </p:cNvPr>
-          <p:cNvCxnSpPr>
-            <a:cxnSpLocks/>
-          </p:cNvCxnSpPr>
+          <p:cNvPr id="12" name="直接连接符 11"/>
+          <p:cNvCxnSpPr/>
           <p:nvPr/>
         </p:nvCxnSpPr>
         <p:spPr>
@@ -13528,13 +14030,7 @@
       </p:cxnSp>
       <p:cxnSp>
         <p:nvCxnSpPr>
-          <p:cNvPr id="13" name="直接连接符 12">
-            <a:extLst>
-              <a:ext uri="{FF2B5EF4-FFF2-40B4-BE49-F238E27FC236}">
-                <a16:creationId xmlns:a16="http://schemas.microsoft.com/office/drawing/2014/main" id="{C29E64D3-A808-C3CC-52F2-543B8A4B53A3}"/>
-              </a:ext>
-            </a:extLst>
-          </p:cNvPr>
+          <p:cNvPr id="13" name="直接连接符 12"/>
           <p:cNvCxnSpPr/>
           <p:nvPr/>
         </p:nvCxnSpPr>
@@ -13571,13 +14067,7 @@
         <mc:Choice xmlns:a14="http://schemas.microsoft.com/office/drawing/2010/main" Requires="a14">
           <p:sp>
             <p:nvSpPr>
-              <p:cNvPr id="15" name="文本框 14">
-                <a:extLst>
-                  <a:ext uri="{FF2B5EF4-FFF2-40B4-BE49-F238E27FC236}">
-                    <a16:creationId xmlns:a16="http://schemas.microsoft.com/office/drawing/2014/main" id="{3D1E9FD2-A1B9-21DF-12B6-87BF8F7E4375}"/>
-                  </a:ext>
-                </a:extLst>
-              </p:cNvPr>
+              <p:cNvPr id="15" name="文本框 14"/>
               <p:cNvSpPr txBox="1"/>
               <p:nvPr/>
             </p:nvSpPr>
@@ -13597,7 +14087,6 @@
               </a:bodyPr>
               <a:lstStyle/>
               <a:p>
-                <a:pPr/>
                 <a14:m>
                   <m:oMathPara xmlns:m="http://schemas.openxmlformats.org/officeDocument/2006/math">
                     <m:oMathParaPr>
@@ -13622,13 +14111,7 @@
         <mc:Fallback>
           <p:sp>
             <p:nvSpPr>
-              <p:cNvPr id="15" name="文本框 14">
-                <a:extLst>
-                  <a:ext uri="{FF2B5EF4-FFF2-40B4-BE49-F238E27FC236}">
-                    <a16:creationId xmlns:a16="http://schemas.microsoft.com/office/drawing/2014/main" id="{3D1E9FD2-A1B9-21DF-12B6-87BF8F7E4375}"/>
-                  </a:ext>
-                </a:extLst>
-              </p:cNvPr>
+              <p:cNvPr id="15" name="文本框 14"/>
               <p:cNvSpPr txBox="1">
                 <a:spLocks noRot="1" noChangeAspect="1" noMove="1" noResize="1" noEditPoints="1" noAdjustHandles="1" noChangeArrowheads="1" noChangeShapeType="1" noTextEdit="1"/>
               </p:cNvSpPr>
@@ -13642,10 +14125,10 @@
               <a:prstGeom prst="rect">
                 <a:avLst/>
               </a:prstGeom>
-              <a:blipFill>
-                <a:blip r:embed="rId5"/>
+              <a:blipFill rotWithShape="1">
+                <a:blip r:embed="rId4"/>
                 <a:stretch>
-                  <a:fillRect/>
+                  <a:fillRect l="-14" t="-86" r="42" b="86"/>
                 </a:stretch>
               </a:blipFill>
             </p:spPr>
@@ -13668,13 +14151,7 @@
         <mc:Choice xmlns:a14="http://schemas.microsoft.com/office/drawing/2010/main" Requires="a14">
           <p:sp>
             <p:nvSpPr>
-              <p:cNvPr id="16" name="文本框 15">
-                <a:extLst>
-                  <a:ext uri="{FF2B5EF4-FFF2-40B4-BE49-F238E27FC236}">
-                    <a16:creationId xmlns:a16="http://schemas.microsoft.com/office/drawing/2014/main" id="{7263E0E5-8FEA-4637-84C1-A7A86F2306E2}"/>
-                  </a:ext>
-                </a:extLst>
-              </p:cNvPr>
+              <p:cNvPr id="16" name="文本框 15"/>
               <p:cNvSpPr txBox="1"/>
               <p:nvPr/>
             </p:nvSpPr>
@@ -13694,7 +14171,6 @@
               </a:bodyPr>
               <a:lstStyle/>
               <a:p>
-                <a:pPr/>
                 <a14:m>
                   <m:oMathPara xmlns:m="http://schemas.openxmlformats.org/officeDocument/2006/math">
                     <m:oMathParaPr>
@@ -13717,7 +14193,6 @@
                 </a:endParaRPr>
               </a:p>
               <a:p>
-                <a:pPr/>
                 <a14:m>
                   <m:oMathPara xmlns:m="http://schemas.openxmlformats.org/officeDocument/2006/math">
                     <m:oMathParaPr>
@@ -13745,13 +14220,7 @@
         <mc:Fallback>
           <p:sp>
             <p:nvSpPr>
-              <p:cNvPr id="16" name="文本框 15">
-                <a:extLst>
-                  <a:ext uri="{FF2B5EF4-FFF2-40B4-BE49-F238E27FC236}">
-                    <a16:creationId xmlns:a16="http://schemas.microsoft.com/office/drawing/2014/main" id="{7263E0E5-8FEA-4637-84C1-A7A86F2306E2}"/>
-                  </a:ext>
-                </a:extLst>
-              </p:cNvPr>
+              <p:cNvPr id="16" name="文本框 15"/>
               <p:cNvSpPr txBox="1">
                 <a:spLocks noRot="1" noChangeAspect="1" noMove="1" noResize="1" noEditPoints="1" noAdjustHandles="1" noChangeArrowheads="1" noChangeShapeType="1" noTextEdit="1"/>
               </p:cNvSpPr>
@@ -13765,10 +14234,10 @@
               <a:prstGeom prst="rect">
                 <a:avLst/>
               </a:prstGeom>
-              <a:blipFill>
-                <a:blip r:embed="rId6"/>
+              <a:blipFill rotWithShape="1">
+                <a:blip r:embed="rId5"/>
                 <a:stretch>
-                  <a:fillRect b="-38462"/>
+                  <a:fillRect l="-28" t="-70" r="28" b="-49690"/>
                 </a:stretch>
               </a:blipFill>
             </p:spPr>
@@ -13789,13 +14258,7 @@
       </mc:AlternateContent>
       <p:sp>
         <p:nvSpPr>
-          <p:cNvPr id="17" name="弧形 16">
-            <a:extLst>
-              <a:ext uri="{FF2B5EF4-FFF2-40B4-BE49-F238E27FC236}">
-                <a16:creationId xmlns:a16="http://schemas.microsoft.com/office/drawing/2014/main" id="{2B43BF60-F457-4F71-BFD5-1334D78CF146}"/>
-              </a:ext>
-            </a:extLst>
-          </p:cNvPr>
+          <p:cNvPr id="17" name="弧形 16"/>
           <p:cNvSpPr/>
           <p:nvPr/>
         </p:nvSpPr>
@@ -13841,15 +14304,8 @@
       </p:sp>
       <p:cxnSp>
         <p:nvCxnSpPr>
-          <p:cNvPr id="20" name="连接符: 肘形 19">
-            <a:extLst>
-              <a:ext uri="{FF2B5EF4-FFF2-40B4-BE49-F238E27FC236}">
-                <a16:creationId xmlns:a16="http://schemas.microsoft.com/office/drawing/2014/main" id="{AF8A0D73-70CA-B349-36B8-8F181007AEE7}"/>
-              </a:ext>
-            </a:extLst>
-          </p:cNvPr>
+          <p:cNvPr id="20" name="连接符: 肘形 19"/>
           <p:cNvCxnSpPr>
-            <a:cxnSpLocks/>
             <a:stCxn id="2" idx="2"/>
           </p:cNvCxnSpPr>
           <p:nvPr/>
@@ -13883,31 +14339,6 @@
           </a:fontRef>
         </p:style>
       </p:cxnSp>
-    </p:spTree>
-  </p:cSld>
-  <p:clrMapOvr>
-    <a:masterClrMapping/>
-  </p:clrMapOvr>
-</p:sld>
-</file>
-
-<file path=ppt/slides/slide5.xml><?xml version="1.0" encoding="utf-8"?>
-<p:sld xmlns:a="http://schemas.openxmlformats.org/drawingml/2006/main" xmlns:r="http://schemas.openxmlformats.org/officeDocument/2006/relationships" xmlns:p="http://schemas.openxmlformats.org/presentationml/2006/main">
-  <p:cSld>
-    <p:spTree>
-      <p:nvGrpSpPr>
-        <p:cNvPr id="1" name=""/>
-        <p:cNvGrpSpPr/>
-        <p:nvPr/>
-      </p:nvGrpSpPr>
-      <p:grpSpPr>
-        <a:xfrm>
-          <a:off x="0" y="0"/>
-          <a:ext cx="0" cy="0"/>
-          <a:chOff x="0" y="0"/>
-          <a:chExt cx="0" cy="0"/>
-        </a:xfrm>
-      </p:grpSpPr>
     </p:spTree>
   </p:cSld>
   <p:clrMapOvr>
@@ -13933,6 +14364,395 @@
           <a:chExt cx="0" cy="0"/>
         </a:xfrm>
       </p:grpSpPr>
+      <p:grpSp>
+        <p:nvGrpSpPr>
+          <p:cNvPr id="6" name="组合 5"/>
+          <p:cNvGrpSpPr/>
+          <p:nvPr/>
+        </p:nvGrpSpPr>
+        <p:grpSpPr>
+          <a:xfrm>
+            <a:off x="663575" y="564515"/>
+            <a:ext cx="2681605" cy="2602865"/>
+            <a:chOff x="1045" y="889"/>
+            <a:chExt cx="5306" cy="5150"/>
+          </a:xfrm>
+        </p:grpSpPr>
+        <p:sp>
+          <p:nvSpPr>
+            <p:cNvPr id="2" name="矩形 1"/>
+            <p:cNvSpPr/>
+            <p:nvPr/>
+          </p:nvSpPr>
+          <p:spPr>
+            <a:xfrm>
+              <a:off x="1045" y="889"/>
+              <a:ext cx="3877" cy="3778"/>
+            </a:xfrm>
+            <a:prstGeom prst="rect">
+              <a:avLst/>
+            </a:prstGeom>
+            <a:noFill/>
+            <a:ln w="25400" cmpd="sng">
+              <a:solidFill>
+                <a:schemeClr val="tx1"/>
+              </a:solidFill>
+              <a:prstDash val="solid"/>
+            </a:ln>
+          </p:spPr>
+          <p:style>
+            <a:lnRef idx="2">
+              <a:schemeClr val="accent1">
+                <a:lumMod val="75000"/>
+              </a:schemeClr>
+            </a:lnRef>
+            <a:fillRef idx="1">
+              <a:schemeClr val="accent1"/>
+            </a:fillRef>
+            <a:effectRef idx="0">
+              <a:srgbClr val="FFFFFF"/>
+            </a:effectRef>
+            <a:fontRef idx="minor">
+              <a:schemeClr val="lt1"/>
+            </a:fontRef>
+          </p:style>
+          <p:txBody>
+            <a:bodyPr rtlCol="0" anchor="ctr"/>
+            <a:p>
+              <a:pPr algn="ctr"/>
+              <a:endParaRPr lang="zh-CN" altLang="en-US"/>
+            </a:p>
+          </p:txBody>
+        </p:sp>
+        <p:sp>
+          <p:nvSpPr>
+            <p:cNvPr id="3" name="矩形 2"/>
+            <p:cNvSpPr/>
+            <p:nvPr/>
+          </p:nvSpPr>
+          <p:spPr>
+            <a:xfrm>
+              <a:off x="2475" y="2261"/>
+              <a:ext cx="3877" cy="3778"/>
+            </a:xfrm>
+            <a:prstGeom prst="rect">
+              <a:avLst/>
+            </a:prstGeom>
+            <a:noFill/>
+            <a:ln w="25400" cmpd="sng">
+              <a:solidFill>
+                <a:schemeClr val="tx1"/>
+              </a:solidFill>
+              <a:prstDash val="solid"/>
+            </a:ln>
+          </p:spPr>
+          <p:style>
+            <a:lnRef idx="2">
+              <a:schemeClr val="accent1">
+                <a:lumMod val="75000"/>
+              </a:schemeClr>
+            </a:lnRef>
+            <a:fillRef idx="1">
+              <a:schemeClr val="accent1"/>
+            </a:fillRef>
+            <a:effectRef idx="0">
+              <a:srgbClr val="FFFFFF"/>
+            </a:effectRef>
+            <a:fontRef idx="minor">
+              <a:schemeClr val="lt1"/>
+            </a:fontRef>
+          </p:style>
+          <p:txBody>
+            <a:bodyPr rtlCol="0" anchor="ctr"/>
+            <a:p>
+              <a:pPr algn="ctr"/>
+              <a:endParaRPr lang="zh-CN" altLang="en-US"/>
+            </a:p>
+          </p:txBody>
+        </p:sp>
+      </p:grpSp>
+      <p:sp>
+        <p:nvSpPr>
+          <p:cNvPr id="8" name="任意多边形 7"/>
+          <p:cNvSpPr/>
+          <p:nvPr/>
+        </p:nvSpPr>
+        <p:spPr>
+          <a:xfrm>
+            <a:off x="4613275" y="691515"/>
+            <a:ext cx="2682240" cy="2602865"/>
+          </a:xfrm>
+          <a:custGeom>
+            <a:avLst/>
+            <a:gdLst/>
+            <a:ahLst/>
+            <a:cxnLst>
+              <a:cxn ang="3cd4">
+                <a:pos x="hc" y="t"/>
+              </a:cxn>
+              <a:cxn ang="cd2">
+                <a:pos x="l" y="vc"/>
+              </a:cxn>
+              <a:cxn ang="cd4">
+                <a:pos x="hc" y="b"/>
+              </a:cxn>
+              <a:cxn ang="0">
+                <a:pos x="r" y="vc"/>
+              </a:cxn>
+            </a:cxnLst>
+            <a:rect l="l" t="t" r="r" b="b"/>
+            <a:pathLst>
+              <a:path w="4224" h="4099">
+                <a:moveTo>
+                  <a:pt x="0" y="0"/>
+                </a:moveTo>
+                <a:lnTo>
+                  <a:pt x="3086" y="0"/>
+                </a:lnTo>
+                <a:lnTo>
+                  <a:pt x="3086" y="1092"/>
+                </a:lnTo>
+                <a:lnTo>
+                  <a:pt x="4224" y="1092"/>
+                </a:lnTo>
+                <a:lnTo>
+                  <a:pt x="4224" y="4099"/>
+                </a:lnTo>
+                <a:lnTo>
+                  <a:pt x="1138" y="4099"/>
+                </a:lnTo>
+                <a:lnTo>
+                  <a:pt x="1138" y="3007"/>
+                </a:lnTo>
+                <a:lnTo>
+                  <a:pt x="0" y="3007"/>
+                </a:lnTo>
+                <a:lnTo>
+                  <a:pt x="0" y="0"/>
+                </a:lnTo>
+                <a:close/>
+              </a:path>
+            </a:pathLst>
+          </a:custGeom>
+          <a:solidFill>
+            <a:schemeClr val="accent5">
+              <a:lumMod val="40000"/>
+              <a:lumOff val="60000"/>
+            </a:schemeClr>
+          </a:solidFill>
+          <a:ln w="25400" cmpd="sng">
+            <a:solidFill>
+              <a:schemeClr val="tx1"/>
+            </a:solidFill>
+            <a:prstDash val="solid"/>
+          </a:ln>
+        </p:spPr>
+        <p:style>
+          <a:lnRef idx="2">
+            <a:schemeClr val="accent1">
+              <a:lumMod val="75000"/>
+            </a:schemeClr>
+          </a:lnRef>
+          <a:fillRef idx="1">
+            <a:schemeClr val="accent1"/>
+          </a:fillRef>
+          <a:effectRef idx="0">
+            <a:srgbClr val="FFFFFF"/>
+          </a:effectRef>
+          <a:fontRef idx="minor">
+            <a:schemeClr val="lt1"/>
+          </a:fontRef>
+        </p:style>
+        <p:txBody>
+          <a:bodyPr wrap="square" rtlCol="0" anchor="ctr">
+            <a:noAutofit/>
+          </a:bodyPr>
+          <a:p>
+            <a:pPr algn="ctr"/>
+            <a:endParaRPr lang="zh-CN" altLang="en-US"/>
+          </a:p>
+        </p:txBody>
+      </p:sp>
+      <p:sp>
+        <p:nvSpPr>
+          <p:cNvPr id="11" name="任意多边形 10"/>
+          <p:cNvSpPr/>
+          <p:nvPr/>
+        </p:nvSpPr>
+        <p:spPr>
+          <a:xfrm>
+            <a:off x="9083040" y="1384935"/>
+            <a:ext cx="1236980" cy="1216025"/>
+          </a:xfrm>
+          <a:custGeom>
+            <a:avLst/>
+            <a:gdLst/>
+            <a:ahLst/>
+            <a:cxnLst>
+              <a:cxn ang="3cd4">
+                <a:pos x="hc" y="t"/>
+              </a:cxn>
+              <a:cxn ang="cd2">
+                <a:pos x="l" y="vc"/>
+              </a:cxn>
+              <a:cxn ang="cd4">
+                <a:pos x="hc" y="b"/>
+              </a:cxn>
+              <a:cxn ang="0">
+                <a:pos x="r" y="vc"/>
+              </a:cxn>
+            </a:cxnLst>
+            <a:rect l="l" t="t" r="r" b="b"/>
+            <a:pathLst>
+              <a:path w="1948" h="1915">
+                <a:moveTo>
+                  <a:pt x="0" y="0"/>
+                </a:moveTo>
+                <a:lnTo>
+                  <a:pt x="1948" y="0"/>
+                </a:lnTo>
+                <a:lnTo>
+                  <a:pt x="1948" y="1915"/>
+                </a:lnTo>
+                <a:lnTo>
+                  <a:pt x="0" y="1915"/>
+                </a:lnTo>
+                <a:lnTo>
+                  <a:pt x="0" y="0"/>
+                </a:lnTo>
+                <a:close/>
+              </a:path>
+            </a:pathLst>
+          </a:custGeom>
+          <a:solidFill>
+            <a:schemeClr val="accent5">
+              <a:lumMod val="40000"/>
+              <a:lumOff val="60000"/>
+            </a:schemeClr>
+          </a:solidFill>
+          <a:ln w="25400" cmpd="sng">
+            <a:noFill/>
+            <a:prstDash val="solid"/>
+          </a:ln>
+        </p:spPr>
+        <p:style>
+          <a:lnRef idx="2">
+            <a:schemeClr val="accent1">
+              <a:lumMod val="75000"/>
+            </a:schemeClr>
+          </a:lnRef>
+          <a:fillRef idx="1">
+            <a:schemeClr val="accent1"/>
+          </a:fillRef>
+          <a:effectRef idx="0">
+            <a:srgbClr val="FFFFFF"/>
+          </a:effectRef>
+          <a:fontRef idx="minor">
+            <a:schemeClr val="lt1"/>
+          </a:fontRef>
+        </p:style>
+        <p:txBody>
+          <a:bodyPr wrap="square" rtlCol="0" anchor="ctr">
+            <a:noAutofit/>
+          </a:bodyPr>
+          <a:p>
+            <a:pPr algn="ctr"/>
+            <a:endParaRPr lang="zh-CN" altLang="en-US"/>
+          </a:p>
+        </p:txBody>
+      </p:sp>
+      <p:sp>
+        <p:nvSpPr>
+          <p:cNvPr id="15" name="矩形 14"/>
+          <p:cNvSpPr/>
+          <p:nvPr/>
+        </p:nvSpPr>
+        <p:spPr>
+          <a:xfrm>
+            <a:off x="8360410" y="691515"/>
+            <a:ext cx="1959610" cy="1909445"/>
+          </a:xfrm>
+          <a:prstGeom prst="rect">
+            <a:avLst/>
+          </a:prstGeom>
+          <a:noFill/>
+          <a:ln w="25400" cmpd="sng">
+            <a:solidFill>
+              <a:schemeClr val="tx1"/>
+            </a:solidFill>
+            <a:prstDash val="solid"/>
+          </a:ln>
+        </p:spPr>
+        <p:style>
+          <a:lnRef idx="2">
+            <a:schemeClr val="accent1">
+              <a:lumMod val="75000"/>
+            </a:schemeClr>
+          </a:lnRef>
+          <a:fillRef idx="1">
+            <a:schemeClr val="accent1"/>
+          </a:fillRef>
+          <a:effectRef idx="0">
+            <a:srgbClr val="FFFFFF"/>
+          </a:effectRef>
+          <a:fontRef idx="minor">
+            <a:schemeClr val="lt1"/>
+          </a:fontRef>
+        </p:style>
+        <p:txBody>
+          <a:bodyPr rtlCol="0" anchor="ctr"/>
+          <a:p>
+            <a:pPr algn="ctr"/>
+            <a:endParaRPr lang="zh-CN" altLang="en-US"/>
+          </a:p>
+        </p:txBody>
+      </p:sp>
+      <p:sp>
+        <p:nvSpPr>
+          <p:cNvPr id="16" name="矩形 15"/>
+          <p:cNvSpPr/>
+          <p:nvPr/>
+        </p:nvSpPr>
+        <p:spPr>
+          <a:xfrm>
+            <a:off x="9083040" y="1384935"/>
+            <a:ext cx="1959610" cy="1909445"/>
+          </a:xfrm>
+          <a:prstGeom prst="rect">
+            <a:avLst/>
+          </a:prstGeom>
+          <a:noFill/>
+          <a:ln w="25400" cmpd="sng">
+            <a:solidFill>
+              <a:schemeClr val="tx1"/>
+            </a:solidFill>
+            <a:prstDash val="solid"/>
+          </a:ln>
+        </p:spPr>
+        <p:style>
+          <a:lnRef idx="2">
+            <a:schemeClr val="accent1">
+              <a:lumMod val="75000"/>
+            </a:schemeClr>
+          </a:lnRef>
+          <a:fillRef idx="1">
+            <a:schemeClr val="accent1"/>
+          </a:fillRef>
+          <a:effectRef idx="0">
+            <a:srgbClr val="FFFFFF"/>
+          </a:effectRef>
+          <a:fontRef idx="minor">
+            <a:schemeClr val="lt1"/>
+          </a:fontRef>
+        </p:style>
+        <p:txBody>
+          <a:bodyPr rtlCol="0" anchor="ctr"/>
+          <a:p>
+            <a:pPr algn="ctr"/>
+            <a:endParaRPr lang="zh-CN" altLang="en-US"/>
+          </a:p>
+        </p:txBody>
+      </p:sp>
     </p:spTree>
   </p:cSld>
   <p:clrMapOvr>
@@ -13966,8 +14786,33 @@
 </p:sld>
 </file>
 
+<file path=ppt/slides/slide8.xml><?xml version="1.0" encoding="utf-8"?>
+<p:sld xmlns:a="http://schemas.openxmlformats.org/drawingml/2006/main" xmlns:r="http://schemas.openxmlformats.org/officeDocument/2006/relationships" xmlns:p="http://schemas.openxmlformats.org/presentationml/2006/main">
+  <p:cSld>
+    <p:spTree>
+      <p:nvGrpSpPr>
+        <p:cNvPr id="1" name=""/>
+        <p:cNvGrpSpPr/>
+        <p:nvPr/>
+      </p:nvGrpSpPr>
+      <p:grpSpPr>
+        <a:xfrm>
+          <a:off x="0" y="0"/>
+          <a:ext cx="0" cy="0"/>
+          <a:chOff x="0" y="0"/>
+          <a:chExt cx="0" cy="0"/>
+        </a:xfrm>
+      </p:grpSpPr>
+    </p:spTree>
+  </p:cSld>
+  <p:clrMapOvr>
+    <a:masterClrMapping/>
+  </p:clrMapOvr>
+</p:sld>
+</file>
+
 <file path=ppt/tags/tag1.xml><?xml version="1.0" encoding="utf-8"?>
-<p:tagLst xmlns:a="http://schemas.openxmlformats.org/drawingml/2006/main" xmlns:r="http://schemas.openxmlformats.org/officeDocument/2006/relationships" xmlns:p="http://schemas.openxmlformats.org/presentationml/2006/main">
+<p:tagLst xmlns:p="http://schemas.openxmlformats.org/presentationml/2006/main">
   <p:tag name="COMMONDATA" val="eyJoZGlkIjoiMWNkOTg5MjZlZjEzNTdlYjk5YTg3ZTczZTZlMGJkOGMifQ=="/>
 </p:tagLst>
 </file>
@@ -14223,8 +15068,6 @@
       </a:bgFillStyleLst>
     </a:fmtScheme>
   </a:themeElements>
-  <a:objectDefaults/>
-  <a:extraClrSchemeLst/>
   <a:extLst>
     <a:ext uri="{05A4C25C-085E-4340-85A3-A5531E510DB2}">
       <thm15:themeFamily xmlns:thm15="http://schemas.microsoft.com/office/thememl/2012/main" name="Office Theme" id="{62F939B6-93AF-4DB8-9C6B-D6C7DFDC589F}" vid="{4A3C46E8-61CC-4603-A589-7422A47A8E4A}"/>
@@ -14484,8 +15327,6 @@
       </a:bgFillStyleLst>
     </a:fmtScheme>
   </a:themeElements>
-  <a:objectDefaults/>
-  <a:extraClrSchemeLst/>
   <a:extLst>
     <a:ext uri="{05A4C25C-085E-4340-85A3-A5531E510DB2}">
       <thm15:themeFamily xmlns:thm15="http://schemas.microsoft.com/office/thememl/2012/main" name="Office Theme" id="{62F939B6-93AF-4DB8-9C6B-D6C7DFDC589F}" vid="{4A3C46E8-61CC-4603-A589-7422A47A8E4A}"/>

--- a/PPT/el.pptx
+++ b/PPT/el.pptx
@@ -3,22 +3,22 @@
 <p:presentation xmlns:a="http://schemas.openxmlformats.org/drawingml/2006/main" xmlns:r="http://schemas.openxmlformats.org/officeDocument/2006/relationships" xmlns:p="http://schemas.openxmlformats.org/presentationml/2006/main">
   <p:sldMasterIdLst>
     <p:sldMasterId id="2147483648" r:id="rId1"/>
-    <p:sldMasterId id="2147483660" r:id="rId3"/>
+    <p:sldMasterId id="2147483660" r:id="rId2"/>
   </p:sldMasterIdLst>
   <p:sldIdLst>
+    <p:sldId id="261" r:id="rId3"/>
     <p:sldId id="256" r:id="rId4"/>
     <p:sldId id="257" r:id="rId5"/>
     <p:sldId id="263" r:id="rId6"/>
     <p:sldId id="258" r:id="rId7"/>
     <p:sldId id="259" r:id="rId8"/>
     <p:sldId id="260" r:id="rId9"/>
-    <p:sldId id="261" r:id="rId10"/>
-    <p:sldId id="262" r:id="rId11"/>
+    <p:sldId id="262" r:id="rId10"/>
   </p:sldIdLst>
   <p:sldSz cx="12192000" cy="6858000"/>
   <p:notesSz cx="6858000" cy="9144000"/>
   <p:custDataLst>
-    <p:tags r:id="rId15"/>
+    <p:tags r:id="rId11"/>
   </p:custDataLst>
   <p:defaultTextStyle>
     <a:defPPr>
@@ -115,6 +115,11 @@
       </a:defRPr>
     </a:lvl9pPr>
   </p:defaultTextStyle>
+  <p:extLst>
+    <p:ext uri="{EFAFB233-063F-42B5-8137-9DF3F51BA10A}">
+      <p15:sldGuideLst xmlns:p15="http://schemas.microsoft.com/office/powerpoint/2012/main"/>
+    </p:ext>
+  </p:extLst>
 </p:presentation>
 </file>
 
@@ -163,7 +168,6 @@
               <a:rPr lang="zh-CN" altLang="en-US"/>
               <a:t>单击此处编辑母版标题样式</a:t>
             </a:r>
-            <a:endParaRPr lang="zh-CN" altLang="en-US"/>
           </a:p>
         </p:txBody>
       </p:sp>
@@ -228,7 +232,6 @@
               <a:rPr lang="zh-CN" altLang="en-US"/>
               <a:t>单击此处编辑母版副标题样式</a:t>
             </a:r>
-            <a:endParaRPr lang="zh-CN" altLang="en-US"/>
           </a:p>
         </p:txBody>
       </p:sp>
@@ -249,6 +252,7 @@
           <a:p>
             <a:fld id="{0E3CF729-EF3B-40C4-90BC-C2086AADCC60}" type="datetimeFigureOut">
               <a:rPr lang="zh-CN" altLang="en-US" smtClean="0"/>
+              <a:t>2024-06-16</a:t>
             </a:fld>
             <a:endParaRPr lang="zh-CN" altLang="en-US"/>
           </a:p>
@@ -290,6 +294,7 @@
           <a:p>
             <a:fld id="{EC58ADBA-A0F5-48D7-ABCF-49CF523FE9C6}" type="slidenum">
               <a:rPr lang="zh-CN" altLang="en-US" smtClean="0"/>
+              <a:t>‹#›</a:t>
             </a:fld>
             <a:endParaRPr lang="zh-CN" altLang="en-US"/>
           </a:p>
@@ -339,7 +344,6 @@
               <a:rPr lang="zh-CN" altLang="en-US"/>
               <a:t>单击此处编辑母版标题样式</a:t>
             </a:r>
-            <a:endParaRPr lang="zh-CN" altLang="en-US"/>
           </a:p>
         </p:txBody>
       </p:sp>
@@ -363,7 +367,6 @@
               <a:rPr lang="zh-CN" altLang="en-US"/>
               <a:t>单击此处编辑母版文本样式</a:t>
             </a:r>
-            <a:endParaRPr lang="zh-CN" altLang="en-US"/>
           </a:p>
           <a:p>
             <a:pPr lvl="1"/>
@@ -371,7 +374,6 @@
               <a:rPr lang="zh-CN" altLang="en-US"/>
               <a:t>二级</a:t>
             </a:r>
-            <a:endParaRPr lang="zh-CN" altLang="en-US"/>
           </a:p>
           <a:p>
             <a:pPr lvl="2"/>
@@ -379,7 +381,6 @@
               <a:rPr lang="zh-CN" altLang="en-US"/>
               <a:t>三级</a:t>
             </a:r>
-            <a:endParaRPr lang="zh-CN" altLang="en-US"/>
           </a:p>
           <a:p>
             <a:pPr lvl="3"/>
@@ -387,7 +388,6 @@
               <a:rPr lang="zh-CN" altLang="en-US"/>
               <a:t>四级</a:t>
             </a:r>
-            <a:endParaRPr lang="zh-CN" altLang="en-US"/>
           </a:p>
           <a:p>
             <a:pPr lvl="4"/>
@@ -395,7 +395,6 @@
               <a:rPr lang="zh-CN" altLang="en-US"/>
               <a:t>五级</a:t>
             </a:r>
-            <a:endParaRPr lang="zh-CN" altLang="en-US"/>
           </a:p>
         </p:txBody>
       </p:sp>
@@ -416,6 +415,7 @@
           <a:p>
             <a:fld id="{0E3CF729-EF3B-40C4-90BC-C2086AADCC60}" type="datetimeFigureOut">
               <a:rPr lang="zh-CN" altLang="en-US" smtClean="0"/>
+              <a:t>2024-06-16</a:t>
             </a:fld>
             <a:endParaRPr lang="zh-CN" altLang="en-US"/>
           </a:p>
@@ -457,6 +457,7 @@
           <a:p>
             <a:fld id="{EC58ADBA-A0F5-48D7-ABCF-49CF523FE9C6}" type="slidenum">
               <a:rPr lang="zh-CN" altLang="en-US" smtClean="0"/>
+              <a:t>‹#›</a:t>
             </a:fld>
             <a:endParaRPr lang="zh-CN" altLang="en-US"/>
           </a:p>
@@ -511,7 +512,6 @@
               <a:rPr lang="zh-CN" altLang="en-US"/>
               <a:t>单击此处编辑母版标题样式</a:t>
             </a:r>
-            <a:endParaRPr lang="zh-CN" altLang="en-US"/>
           </a:p>
         </p:txBody>
       </p:sp>
@@ -540,7 +540,6 @@
               <a:rPr lang="zh-CN" altLang="en-US"/>
               <a:t>单击此处编辑母版文本样式</a:t>
             </a:r>
-            <a:endParaRPr lang="zh-CN" altLang="en-US"/>
           </a:p>
           <a:p>
             <a:pPr lvl="1"/>
@@ -548,7 +547,6 @@
               <a:rPr lang="zh-CN" altLang="en-US"/>
               <a:t>二级</a:t>
             </a:r>
-            <a:endParaRPr lang="zh-CN" altLang="en-US"/>
           </a:p>
           <a:p>
             <a:pPr lvl="2"/>
@@ -556,7 +554,6 @@
               <a:rPr lang="zh-CN" altLang="en-US"/>
               <a:t>三级</a:t>
             </a:r>
-            <a:endParaRPr lang="zh-CN" altLang="en-US"/>
           </a:p>
           <a:p>
             <a:pPr lvl="3"/>
@@ -564,7 +561,6 @@
               <a:rPr lang="zh-CN" altLang="en-US"/>
               <a:t>四级</a:t>
             </a:r>
-            <a:endParaRPr lang="zh-CN" altLang="en-US"/>
           </a:p>
           <a:p>
             <a:pPr lvl="4"/>
@@ -572,7 +568,6 @@
               <a:rPr lang="zh-CN" altLang="en-US"/>
               <a:t>五级</a:t>
             </a:r>
-            <a:endParaRPr lang="zh-CN" altLang="en-US"/>
           </a:p>
         </p:txBody>
       </p:sp>
@@ -593,6 +588,7 @@
           <a:p>
             <a:fld id="{0E3CF729-EF3B-40C4-90BC-C2086AADCC60}" type="datetimeFigureOut">
               <a:rPr lang="zh-CN" altLang="en-US" smtClean="0"/>
+              <a:t>2024-06-16</a:t>
             </a:fld>
             <a:endParaRPr lang="zh-CN" altLang="en-US"/>
           </a:p>
@@ -634,6 +630,7 @@
           <a:p>
             <a:fld id="{EC58ADBA-A0F5-48D7-ABCF-49CF523FE9C6}" type="slidenum">
               <a:rPr lang="zh-CN" altLang="en-US" smtClean="0"/>
+              <a:t>‹#›</a:t>
             </a:fld>
             <a:endParaRPr lang="zh-CN" altLang="en-US"/>
           </a:p>
@@ -692,7 +689,6 @@
               <a:rPr lang="zh-CN" altLang="en-US"/>
               <a:t>单击此处编辑母版标题样式</a:t>
             </a:r>
-            <a:endParaRPr lang="zh-CN" altLang="en-US"/>
           </a:p>
         </p:txBody>
       </p:sp>
@@ -757,7 +753,6 @@
               <a:rPr lang="zh-CN" altLang="en-US"/>
               <a:t>单击此处编辑母版副标题样式</a:t>
             </a:r>
-            <a:endParaRPr lang="zh-CN" altLang="en-US"/>
           </a:p>
         </p:txBody>
       </p:sp>
@@ -778,6 +773,7 @@
           <a:p>
             <a:fld id="{0E3CF729-EF3B-40C4-90BC-C2086AADCC60}" type="datetimeFigureOut">
               <a:rPr lang="zh-CN" altLang="en-US" smtClean="0"/>
+              <a:t>2024-06-16</a:t>
             </a:fld>
             <a:endParaRPr lang="zh-CN" altLang="en-US"/>
           </a:p>
@@ -819,6 +815,7 @@
           <a:p>
             <a:fld id="{EC58ADBA-A0F5-48D7-ABCF-49CF523FE9C6}" type="slidenum">
               <a:rPr lang="zh-CN" altLang="en-US" smtClean="0"/>
+              <a:t>‹#›</a:t>
             </a:fld>
             <a:endParaRPr lang="zh-CN" altLang="en-US"/>
           </a:p>
@@ -868,7 +865,6 @@
               <a:rPr lang="zh-CN" altLang="en-US"/>
               <a:t>单击此处编辑母版标题样式</a:t>
             </a:r>
-            <a:endParaRPr lang="zh-CN" altLang="en-US"/>
           </a:p>
         </p:txBody>
       </p:sp>
@@ -892,7 +888,6 @@
               <a:rPr lang="zh-CN" altLang="en-US"/>
               <a:t>单击此处编辑母版文本样式</a:t>
             </a:r>
-            <a:endParaRPr lang="zh-CN" altLang="en-US"/>
           </a:p>
           <a:p>
             <a:pPr lvl="1"/>
@@ -900,7 +895,6 @@
               <a:rPr lang="zh-CN" altLang="en-US"/>
               <a:t>二级</a:t>
             </a:r>
-            <a:endParaRPr lang="zh-CN" altLang="en-US"/>
           </a:p>
           <a:p>
             <a:pPr lvl="2"/>
@@ -908,7 +902,6 @@
               <a:rPr lang="zh-CN" altLang="en-US"/>
               <a:t>三级</a:t>
             </a:r>
-            <a:endParaRPr lang="zh-CN" altLang="en-US"/>
           </a:p>
           <a:p>
             <a:pPr lvl="3"/>
@@ -916,7 +909,6 @@
               <a:rPr lang="zh-CN" altLang="en-US"/>
               <a:t>四级</a:t>
             </a:r>
-            <a:endParaRPr lang="zh-CN" altLang="en-US"/>
           </a:p>
           <a:p>
             <a:pPr lvl="4"/>
@@ -924,7 +916,6 @@
               <a:rPr lang="zh-CN" altLang="en-US"/>
               <a:t>五级</a:t>
             </a:r>
-            <a:endParaRPr lang="zh-CN" altLang="en-US"/>
           </a:p>
         </p:txBody>
       </p:sp>
@@ -945,6 +936,7 @@
           <a:p>
             <a:fld id="{0E3CF729-EF3B-40C4-90BC-C2086AADCC60}" type="datetimeFigureOut">
               <a:rPr lang="zh-CN" altLang="en-US" smtClean="0"/>
+              <a:t>2024-06-16</a:t>
             </a:fld>
             <a:endParaRPr lang="zh-CN" altLang="en-US"/>
           </a:p>
@@ -986,6 +978,7 @@
           <a:p>
             <a:fld id="{EC58ADBA-A0F5-48D7-ABCF-49CF523FE9C6}" type="slidenum">
               <a:rPr lang="zh-CN" altLang="en-US" smtClean="0"/>
+              <a:t>‹#›</a:t>
             </a:fld>
             <a:endParaRPr lang="zh-CN" altLang="en-US"/>
           </a:p>
@@ -1044,7 +1037,6 @@
               <a:rPr lang="zh-CN" altLang="en-US"/>
               <a:t>单击此处编辑母版标题样式</a:t>
             </a:r>
-            <a:endParaRPr lang="zh-CN" altLang="en-US"/>
           </a:p>
         </p:txBody>
       </p:sp>
@@ -1164,7 +1156,6 @@
               <a:rPr lang="zh-CN" altLang="en-US"/>
               <a:t>单击此处编辑母版文本样式</a:t>
             </a:r>
-            <a:endParaRPr lang="zh-CN" altLang="en-US"/>
           </a:p>
         </p:txBody>
       </p:sp>
@@ -1185,6 +1176,7 @@
           <a:p>
             <a:fld id="{0E3CF729-EF3B-40C4-90BC-C2086AADCC60}" type="datetimeFigureOut">
               <a:rPr lang="zh-CN" altLang="en-US" smtClean="0"/>
+              <a:t>2024-06-16</a:t>
             </a:fld>
             <a:endParaRPr lang="zh-CN" altLang="en-US"/>
           </a:p>
@@ -1226,6 +1218,7 @@
           <a:p>
             <a:fld id="{EC58ADBA-A0F5-48D7-ABCF-49CF523FE9C6}" type="slidenum">
               <a:rPr lang="zh-CN" altLang="en-US" smtClean="0"/>
+              <a:t>‹#›</a:t>
             </a:fld>
             <a:endParaRPr lang="zh-CN" altLang="en-US"/>
           </a:p>
@@ -1275,7 +1268,6 @@
               <a:rPr lang="zh-CN" altLang="en-US"/>
               <a:t>单击此处编辑母版标题样式</a:t>
             </a:r>
-            <a:endParaRPr lang="zh-CN" altLang="en-US"/>
           </a:p>
         </p:txBody>
       </p:sp>
@@ -1304,7 +1296,6 @@
               <a:rPr lang="zh-CN" altLang="en-US"/>
               <a:t>单击此处编辑母版文本样式</a:t>
             </a:r>
-            <a:endParaRPr lang="zh-CN" altLang="en-US"/>
           </a:p>
           <a:p>
             <a:pPr lvl="1"/>
@@ -1312,7 +1303,6 @@
               <a:rPr lang="zh-CN" altLang="en-US"/>
               <a:t>二级</a:t>
             </a:r>
-            <a:endParaRPr lang="zh-CN" altLang="en-US"/>
           </a:p>
           <a:p>
             <a:pPr lvl="2"/>
@@ -1320,7 +1310,6 @@
               <a:rPr lang="zh-CN" altLang="en-US"/>
               <a:t>三级</a:t>
             </a:r>
-            <a:endParaRPr lang="zh-CN" altLang="en-US"/>
           </a:p>
           <a:p>
             <a:pPr lvl="3"/>
@@ -1328,7 +1317,6 @@
               <a:rPr lang="zh-CN" altLang="en-US"/>
               <a:t>四级</a:t>
             </a:r>
-            <a:endParaRPr lang="zh-CN" altLang="en-US"/>
           </a:p>
           <a:p>
             <a:pPr lvl="4"/>
@@ -1336,7 +1324,6 @@
               <a:rPr lang="zh-CN" altLang="en-US"/>
               <a:t>五级</a:t>
             </a:r>
-            <a:endParaRPr lang="zh-CN" altLang="en-US"/>
           </a:p>
         </p:txBody>
       </p:sp>
@@ -1365,7 +1352,6 @@
               <a:rPr lang="zh-CN" altLang="en-US"/>
               <a:t>单击此处编辑母版文本样式</a:t>
             </a:r>
-            <a:endParaRPr lang="zh-CN" altLang="en-US"/>
           </a:p>
           <a:p>
             <a:pPr lvl="1"/>
@@ -1373,7 +1359,6 @@
               <a:rPr lang="zh-CN" altLang="en-US"/>
               <a:t>二级</a:t>
             </a:r>
-            <a:endParaRPr lang="zh-CN" altLang="en-US"/>
           </a:p>
           <a:p>
             <a:pPr lvl="2"/>
@@ -1381,7 +1366,6 @@
               <a:rPr lang="zh-CN" altLang="en-US"/>
               <a:t>三级</a:t>
             </a:r>
-            <a:endParaRPr lang="zh-CN" altLang="en-US"/>
           </a:p>
           <a:p>
             <a:pPr lvl="3"/>
@@ -1389,7 +1373,6 @@
               <a:rPr lang="zh-CN" altLang="en-US"/>
               <a:t>四级</a:t>
             </a:r>
-            <a:endParaRPr lang="zh-CN" altLang="en-US"/>
           </a:p>
           <a:p>
             <a:pPr lvl="4"/>
@@ -1397,7 +1380,6 @@
               <a:rPr lang="zh-CN" altLang="en-US"/>
               <a:t>五级</a:t>
             </a:r>
-            <a:endParaRPr lang="zh-CN" altLang="en-US"/>
           </a:p>
         </p:txBody>
       </p:sp>
@@ -1418,6 +1400,7 @@
           <a:p>
             <a:fld id="{0E3CF729-EF3B-40C4-90BC-C2086AADCC60}" type="datetimeFigureOut">
               <a:rPr lang="zh-CN" altLang="en-US" smtClean="0"/>
+              <a:t>2024-06-16</a:t>
             </a:fld>
             <a:endParaRPr lang="zh-CN" altLang="en-US"/>
           </a:p>
@@ -1459,6 +1442,7 @@
           <a:p>
             <a:fld id="{EC58ADBA-A0F5-48D7-ABCF-49CF523FE9C6}" type="slidenum">
               <a:rPr lang="zh-CN" altLang="en-US" smtClean="0"/>
+              <a:t>‹#›</a:t>
             </a:fld>
             <a:endParaRPr lang="zh-CN" altLang="en-US"/>
           </a:p>
@@ -1513,7 +1497,6 @@
               <a:rPr lang="zh-CN" altLang="en-US"/>
               <a:t>单击此处编辑母版标题样式</a:t>
             </a:r>
-            <a:endParaRPr lang="zh-CN" altLang="en-US"/>
           </a:p>
         </p:txBody>
       </p:sp>
@@ -1579,7 +1562,6 @@
               <a:rPr lang="zh-CN" altLang="en-US"/>
               <a:t>单击此处编辑母版文本样式</a:t>
             </a:r>
-            <a:endParaRPr lang="zh-CN" altLang="en-US"/>
           </a:p>
         </p:txBody>
       </p:sp>
@@ -1608,7 +1590,6 @@
               <a:rPr lang="zh-CN" altLang="en-US"/>
               <a:t>单击此处编辑母版文本样式</a:t>
             </a:r>
-            <a:endParaRPr lang="zh-CN" altLang="en-US"/>
           </a:p>
           <a:p>
             <a:pPr lvl="1"/>
@@ -1616,7 +1597,6 @@
               <a:rPr lang="zh-CN" altLang="en-US"/>
               <a:t>二级</a:t>
             </a:r>
-            <a:endParaRPr lang="zh-CN" altLang="en-US"/>
           </a:p>
           <a:p>
             <a:pPr lvl="2"/>
@@ -1624,7 +1604,6 @@
               <a:rPr lang="zh-CN" altLang="en-US"/>
               <a:t>三级</a:t>
             </a:r>
-            <a:endParaRPr lang="zh-CN" altLang="en-US"/>
           </a:p>
           <a:p>
             <a:pPr lvl="3"/>
@@ -1632,7 +1611,6 @@
               <a:rPr lang="zh-CN" altLang="en-US"/>
               <a:t>四级</a:t>
             </a:r>
-            <a:endParaRPr lang="zh-CN" altLang="en-US"/>
           </a:p>
           <a:p>
             <a:pPr lvl="4"/>
@@ -1640,7 +1618,6 @@
               <a:rPr lang="zh-CN" altLang="en-US"/>
               <a:t>五级</a:t>
             </a:r>
-            <a:endParaRPr lang="zh-CN" altLang="en-US"/>
           </a:p>
         </p:txBody>
       </p:sp>
@@ -1706,7 +1683,6 @@
               <a:rPr lang="zh-CN" altLang="en-US"/>
               <a:t>单击此处编辑母版文本样式</a:t>
             </a:r>
-            <a:endParaRPr lang="zh-CN" altLang="en-US"/>
           </a:p>
         </p:txBody>
       </p:sp>
@@ -1735,7 +1711,6 @@
               <a:rPr lang="zh-CN" altLang="en-US"/>
               <a:t>单击此处编辑母版文本样式</a:t>
             </a:r>
-            <a:endParaRPr lang="zh-CN" altLang="en-US"/>
           </a:p>
           <a:p>
             <a:pPr lvl="1"/>
@@ -1743,7 +1718,6 @@
               <a:rPr lang="zh-CN" altLang="en-US"/>
               <a:t>二级</a:t>
             </a:r>
-            <a:endParaRPr lang="zh-CN" altLang="en-US"/>
           </a:p>
           <a:p>
             <a:pPr lvl="2"/>
@@ -1751,7 +1725,6 @@
               <a:rPr lang="zh-CN" altLang="en-US"/>
               <a:t>三级</a:t>
             </a:r>
-            <a:endParaRPr lang="zh-CN" altLang="en-US"/>
           </a:p>
           <a:p>
             <a:pPr lvl="3"/>
@@ -1759,7 +1732,6 @@
               <a:rPr lang="zh-CN" altLang="en-US"/>
               <a:t>四级</a:t>
             </a:r>
-            <a:endParaRPr lang="zh-CN" altLang="en-US"/>
           </a:p>
           <a:p>
             <a:pPr lvl="4"/>
@@ -1767,7 +1739,6 @@
               <a:rPr lang="zh-CN" altLang="en-US"/>
               <a:t>五级</a:t>
             </a:r>
-            <a:endParaRPr lang="zh-CN" altLang="en-US"/>
           </a:p>
         </p:txBody>
       </p:sp>
@@ -1788,6 +1759,7 @@
           <a:p>
             <a:fld id="{0E3CF729-EF3B-40C4-90BC-C2086AADCC60}" type="datetimeFigureOut">
               <a:rPr lang="zh-CN" altLang="en-US" smtClean="0"/>
+              <a:t>2024-06-16</a:t>
             </a:fld>
             <a:endParaRPr lang="zh-CN" altLang="en-US"/>
           </a:p>
@@ -1829,6 +1801,7 @@
           <a:p>
             <a:fld id="{EC58ADBA-A0F5-48D7-ABCF-49CF523FE9C6}" type="slidenum">
               <a:rPr lang="zh-CN" altLang="en-US" smtClean="0"/>
+              <a:t>‹#›</a:t>
             </a:fld>
             <a:endParaRPr lang="zh-CN" altLang="en-US"/>
           </a:p>
@@ -1878,7 +1851,6 @@
               <a:rPr lang="zh-CN" altLang="en-US"/>
               <a:t>单击此处编辑母版标题样式</a:t>
             </a:r>
-            <a:endParaRPr lang="zh-CN" altLang="en-US"/>
           </a:p>
         </p:txBody>
       </p:sp>
@@ -1899,6 +1871,7 @@
           <a:p>
             <a:fld id="{0E3CF729-EF3B-40C4-90BC-C2086AADCC60}" type="datetimeFigureOut">
               <a:rPr lang="zh-CN" altLang="en-US" smtClean="0"/>
+              <a:t>2024-06-16</a:t>
             </a:fld>
             <a:endParaRPr lang="zh-CN" altLang="en-US"/>
           </a:p>
@@ -1940,6 +1913,7 @@
           <a:p>
             <a:fld id="{EC58ADBA-A0F5-48D7-ABCF-49CF523FE9C6}" type="slidenum">
               <a:rPr lang="zh-CN" altLang="en-US" smtClean="0"/>
+              <a:t>‹#›</a:t>
             </a:fld>
             <a:endParaRPr lang="zh-CN" altLang="en-US"/>
           </a:p>
@@ -1987,6 +1961,7 @@
           <a:p>
             <a:fld id="{0E3CF729-EF3B-40C4-90BC-C2086AADCC60}" type="datetimeFigureOut">
               <a:rPr lang="zh-CN" altLang="en-US" smtClean="0"/>
+              <a:t>2024-06-16</a:t>
             </a:fld>
             <a:endParaRPr lang="zh-CN" altLang="en-US"/>
           </a:p>
@@ -2028,6 +2003,7 @@
           <a:p>
             <a:fld id="{EC58ADBA-A0F5-48D7-ABCF-49CF523FE9C6}" type="slidenum">
               <a:rPr lang="zh-CN" altLang="en-US" smtClean="0"/>
+              <a:t>‹#›</a:t>
             </a:fld>
             <a:endParaRPr lang="zh-CN" altLang="en-US"/>
           </a:p>
@@ -2086,7 +2062,6 @@
               <a:rPr lang="zh-CN" altLang="en-US"/>
               <a:t>单击此处编辑母版标题样式</a:t>
             </a:r>
-            <a:endParaRPr lang="zh-CN" altLang="en-US"/>
           </a:p>
         </p:txBody>
       </p:sp>
@@ -2143,7 +2118,6 @@
               <a:rPr lang="zh-CN" altLang="en-US"/>
               <a:t>单击此处编辑母版文本样式</a:t>
             </a:r>
-            <a:endParaRPr lang="zh-CN" altLang="en-US"/>
           </a:p>
           <a:p>
             <a:pPr lvl="1"/>
@@ -2151,7 +2125,6 @@
               <a:rPr lang="zh-CN" altLang="en-US"/>
               <a:t>二级</a:t>
             </a:r>
-            <a:endParaRPr lang="zh-CN" altLang="en-US"/>
           </a:p>
           <a:p>
             <a:pPr lvl="2"/>
@@ -2159,7 +2132,6 @@
               <a:rPr lang="zh-CN" altLang="en-US"/>
               <a:t>三级</a:t>
             </a:r>
-            <a:endParaRPr lang="zh-CN" altLang="en-US"/>
           </a:p>
           <a:p>
             <a:pPr lvl="3"/>
@@ -2167,7 +2139,6 @@
               <a:rPr lang="zh-CN" altLang="en-US"/>
               <a:t>四级</a:t>
             </a:r>
-            <a:endParaRPr lang="zh-CN" altLang="en-US"/>
           </a:p>
           <a:p>
             <a:pPr lvl="4"/>
@@ -2175,7 +2146,6 @@
               <a:rPr lang="zh-CN" altLang="en-US"/>
               <a:t>五级</a:t>
             </a:r>
-            <a:endParaRPr lang="zh-CN" altLang="en-US"/>
           </a:p>
         </p:txBody>
       </p:sp>
@@ -2241,7 +2211,6 @@
               <a:rPr lang="zh-CN" altLang="en-US"/>
               <a:t>单击此处编辑母版文本样式</a:t>
             </a:r>
-            <a:endParaRPr lang="zh-CN" altLang="en-US"/>
           </a:p>
         </p:txBody>
       </p:sp>
@@ -2262,6 +2231,7 @@
           <a:p>
             <a:fld id="{0E3CF729-EF3B-40C4-90BC-C2086AADCC60}" type="datetimeFigureOut">
               <a:rPr lang="zh-CN" altLang="en-US" smtClean="0"/>
+              <a:t>2024-06-16</a:t>
             </a:fld>
             <a:endParaRPr lang="zh-CN" altLang="en-US"/>
           </a:p>
@@ -2303,6 +2273,7 @@
           <a:p>
             <a:fld id="{EC58ADBA-A0F5-48D7-ABCF-49CF523FE9C6}" type="slidenum">
               <a:rPr lang="zh-CN" altLang="en-US" smtClean="0"/>
+              <a:t>‹#›</a:t>
             </a:fld>
             <a:endParaRPr lang="zh-CN" altLang="en-US"/>
           </a:p>
@@ -2352,7 +2323,6 @@
               <a:rPr lang="zh-CN" altLang="en-US"/>
               <a:t>单击此处编辑母版标题样式</a:t>
             </a:r>
-            <a:endParaRPr lang="zh-CN" altLang="en-US"/>
           </a:p>
         </p:txBody>
       </p:sp>
@@ -2376,7 +2346,6 @@
               <a:rPr lang="zh-CN" altLang="en-US"/>
               <a:t>单击此处编辑母版文本样式</a:t>
             </a:r>
-            <a:endParaRPr lang="zh-CN" altLang="en-US"/>
           </a:p>
           <a:p>
             <a:pPr lvl="1"/>
@@ -2384,7 +2353,6 @@
               <a:rPr lang="zh-CN" altLang="en-US"/>
               <a:t>二级</a:t>
             </a:r>
-            <a:endParaRPr lang="zh-CN" altLang="en-US"/>
           </a:p>
           <a:p>
             <a:pPr lvl="2"/>
@@ -2392,7 +2360,6 @@
               <a:rPr lang="zh-CN" altLang="en-US"/>
               <a:t>三级</a:t>
             </a:r>
-            <a:endParaRPr lang="zh-CN" altLang="en-US"/>
           </a:p>
           <a:p>
             <a:pPr lvl="3"/>
@@ -2400,7 +2367,6 @@
               <a:rPr lang="zh-CN" altLang="en-US"/>
               <a:t>四级</a:t>
             </a:r>
-            <a:endParaRPr lang="zh-CN" altLang="en-US"/>
           </a:p>
           <a:p>
             <a:pPr lvl="4"/>
@@ -2408,7 +2374,6 @@
               <a:rPr lang="zh-CN" altLang="en-US"/>
               <a:t>五级</a:t>
             </a:r>
-            <a:endParaRPr lang="zh-CN" altLang="en-US"/>
           </a:p>
         </p:txBody>
       </p:sp>
@@ -2429,6 +2394,7 @@
           <a:p>
             <a:fld id="{0E3CF729-EF3B-40C4-90BC-C2086AADCC60}" type="datetimeFigureOut">
               <a:rPr lang="zh-CN" altLang="en-US" smtClean="0"/>
+              <a:t>2024-06-16</a:t>
             </a:fld>
             <a:endParaRPr lang="zh-CN" altLang="en-US"/>
           </a:p>
@@ -2470,6 +2436,7 @@
           <a:p>
             <a:fld id="{EC58ADBA-A0F5-48D7-ABCF-49CF523FE9C6}" type="slidenum">
               <a:rPr lang="zh-CN" altLang="en-US" smtClean="0"/>
+              <a:t>‹#›</a:t>
             </a:fld>
             <a:endParaRPr lang="zh-CN" altLang="en-US"/>
           </a:p>
@@ -2528,7 +2495,6 @@
               <a:rPr lang="zh-CN" altLang="en-US"/>
               <a:t>单击此处编辑母版标题样式</a:t>
             </a:r>
-            <a:endParaRPr lang="zh-CN" altLang="en-US"/>
           </a:p>
         </p:txBody>
       </p:sp>
@@ -2655,7 +2621,6 @@
               <a:rPr lang="zh-CN" altLang="en-US"/>
               <a:t>单击此处编辑母版文本样式</a:t>
             </a:r>
-            <a:endParaRPr lang="zh-CN" altLang="en-US"/>
           </a:p>
         </p:txBody>
       </p:sp>
@@ -2676,6 +2641,7 @@
           <a:p>
             <a:fld id="{0E3CF729-EF3B-40C4-90BC-C2086AADCC60}" type="datetimeFigureOut">
               <a:rPr lang="zh-CN" altLang="en-US" smtClean="0"/>
+              <a:t>2024-06-16</a:t>
             </a:fld>
             <a:endParaRPr lang="zh-CN" altLang="en-US"/>
           </a:p>
@@ -2717,6 +2683,7 @@
           <a:p>
             <a:fld id="{EC58ADBA-A0F5-48D7-ABCF-49CF523FE9C6}" type="slidenum">
               <a:rPr lang="zh-CN" altLang="en-US" smtClean="0"/>
+              <a:t>‹#›</a:t>
             </a:fld>
             <a:endParaRPr lang="zh-CN" altLang="en-US"/>
           </a:p>
@@ -2766,7 +2733,6 @@
               <a:rPr lang="zh-CN" altLang="en-US"/>
               <a:t>单击此处编辑母版标题样式</a:t>
             </a:r>
-            <a:endParaRPr lang="zh-CN" altLang="en-US"/>
           </a:p>
         </p:txBody>
       </p:sp>
@@ -2790,7 +2756,6 @@
               <a:rPr lang="zh-CN" altLang="en-US"/>
               <a:t>单击此处编辑母版文本样式</a:t>
             </a:r>
-            <a:endParaRPr lang="zh-CN" altLang="en-US"/>
           </a:p>
           <a:p>
             <a:pPr lvl="1"/>
@@ -2798,7 +2763,6 @@
               <a:rPr lang="zh-CN" altLang="en-US"/>
               <a:t>二级</a:t>
             </a:r>
-            <a:endParaRPr lang="zh-CN" altLang="en-US"/>
           </a:p>
           <a:p>
             <a:pPr lvl="2"/>
@@ -2806,7 +2770,6 @@
               <a:rPr lang="zh-CN" altLang="en-US"/>
               <a:t>三级</a:t>
             </a:r>
-            <a:endParaRPr lang="zh-CN" altLang="en-US"/>
           </a:p>
           <a:p>
             <a:pPr lvl="3"/>
@@ -2814,7 +2777,6 @@
               <a:rPr lang="zh-CN" altLang="en-US"/>
               <a:t>四级</a:t>
             </a:r>
-            <a:endParaRPr lang="zh-CN" altLang="en-US"/>
           </a:p>
           <a:p>
             <a:pPr lvl="4"/>
@@ -2822,7 +2784,6 @@
               <a:rPr lang="zh-CN" altLang="en-US"/>
               <a:t>五级</a:t>
             </a:r>
-            <a:endParaRPr lang="zh-CN" altLang="en-US"/>
           </a:p>
         </p:txBody>
       </p:sp>
@@ -2843,6 +2804,7 @@
           <a:p>
             <a:fld id="{0E3CF729-EF3B-40C4-90BC-C2086AADCC60}" type="datetimeFigureOut">
               <a:rPr lang="zh-CN" altLang="en-US" smtClean="0"/>
+              <a:t>2024-06-16</a:t>
             </a:fld>
             <a:endParaRPr lang="zh-CN" altLang="en-US"/>
           </a:p>
@@ -2884,6 +2846,7 @@
           <a:p>
             <a:fld id="{EC58ADBA-A0F5-48D7-ABCF-49CF523FE9C6}" type="slidenum">
               <a:rPr lang="zh-CN" altLang="en-US" smtClean="0"/>
+              <a:t>‹#›</a:t>
             </a:fld>
             <a:endParaRPr lang="zh-CN" altLang="en-US"/>
           </a:p>
@@ -2938,7 +2901,6 @@
               <a:rPr lang="zh-CN" altLang="en-US"/>
               <a:t>单击此处编辑母版标题样式</a:t>
             </a:r>
-            <a:endParaRPr lang="zh-CN" altLang="en-US"/>
           </a:p>
         </p:txBody>
       </p:sp>
@@ -2967,7 +2929,6 @@
               <a:rPr lang="zh-CN" altLang="en-US"/>
               <a:t>单击此处编辑母版文本样式</a:t>
             </a:r>
-            <a:endParaRPr lang="zh-CN" altLang="en-US"/>
           </a:p>
           <a:p>
             <a:pPr lvl="1"/>
@@ -2975,7 +2936,6 @@
               <a:rPr lang="zh-CN" altLang="en-US"/>
               <a:t>二级</a:t>
             </a:r>
-            <a:endParaRPr lang="zh-CN" altLang="en-US"/>
           </a:p>
           <a:p>
             <a:pPr lvl="2"/>
@@ -2983,7 +2943,6 @@
               <a:rPr lang="zh-CN" altLang="en-US"/>
               <a:t>三级</a:t>
             </a:r>
-            <a:endParaRPr lang="zh-CN" altLang="en-US"/>
           </a:p>
           <a:p>
             <a:pPr lvl="3"/>
@@ -2991,7 +2950,6 @@
               <a:rPr lang="zh-CN" altLang="en-US"/>
               <a:t>四级</a:t>
             </a:r>
-            <a:endParaRPr lang="zh-CN" altLang="en-US"/>
           </a:p>
           <a:p>
             <a:pPr lvl="4"/>
@@ -2999,7 +2957,6 @@
               <a:rPr lang="zh-CN" altLang="en-US"/>
               <a:t>五级</a:t>
             </a:r>
-            <a:endParaRPr lang="zh-CN" altLang="en-US"/>
           </a:p>
         </p:txBody>
       </p:sp>
@@ -3020,6 +2977,7 @@
           <a:p>
             <a:fld id="{0E3CF729-EF3B-40C4-90BC-C2086AADCC60}" type="datetimeFigureOut">
               <a:rPr lang="zh-CN" altLang="en-US" smtClean="0"/>
+              <a:t>2024-06-16</a:t>
             </a:fld>
             <a:endParaRPr lang="zh-CN" altLang="en-US"/>
           </a:p>
@@ -3061,6 +3019,7 @@
           <a:p>
             <a:fld id="{EC58ADBA-A0F5-48D7-ABCF-49CF523FE9C6}" type="slidenum">
               <a:rPr lang="zh-CN" altLang="en-US" smtClean="0"/>
+              <a:t>‹#›</a:t>
             </a:fld>
             <a:endParaRPr lang="zh-CN" altLang="en-US"/>
           </a:p>
@@ -3119,7 +3078,6 @@
               <a:rPr lang="zh-CN" altLang="en-US"/>
               <a:t>单击此处编辑母版标题样式</a:t>
             </a:r>
-            <a:endParaRPr lang="zh-CN" altLang="en-US"/>
           </a:p>
         </p:txBody>
       </p:sp>
@@ -3239,7 +3197,6 @@
               <a:rPr lang="zh-CN" altLang="en-US"/>
               <a:t>单击此处编辑母版文本样式</a:t>
             </a:r>
-            <a:endParaRPr lang="zh-CN" altLang="en-US"/>
           </a:p>
         </p:txBody>
       </p:sp>
@@ -3260,6 +3217,7 @@
           <a:p>
             <a:fld id="{0E3CF729-EF3B-40C4-90BC-C2086AADCC60}" type="datetimeFigureOut">
               <a:rPr lang="zh-CN" altLang="en-US" smtClean="0"/>
+              <a:t>2024-06-16</a:t>
             </a:fld>
             <a:endParaRPr lang="zh-CN" altLang="en-US"/>
           </a:p>
@@ -3301,6 +3259,7 @@
           <a:p>
             <a:fld id="{EC58ADBA-A0F5-48D7-ABCF-49CF523FE9C6}" type="slidenum">
               <a:rPr lang="zh-CN" altLang="en-US" smtClean="0"/>
+              <a:t>‹#›</a:t>
             </a:fld>
             <a:endParaRPr lang="zh-CN" altLang="en-US"/>
           </a:p>
@@ -3350,7 +3309,6 @@
               <a:rPr lang="zh-CN" altLang="en-US"/>
               <a:t>单击此处编辑母版标题样式</a:t>
             </a:r>
-            <a:endParaRPr lang="zh-CN" altLang="en-US"/>
           </a:p>
         </p:txBody>
       </p:sp>
@@ -3379,7 +3337,6 @@
               <a:rPr lang="zh-CN" altLang="en-US"/>
               <a:t>单击此处编辑母版文本样式</a:t>
             </a:r>
-            <a:endParaRPr lang="zh-CN" altLang="en-US"/>
           </a:p>
           <a:p>
             <a:pPr lvl="1"/>
@@ -3387,7 +3344,6 @@
               <a:rPr lang="zh-CN" altLang="en-US"/>
               <a:t>二级</a:t>
             </a:r>
-            <a:endParaRPr lang="zh-CN" altLang="en-US"/>
           </a:p>
           <a:p>
             <a:pPr lvl="2"/>
@@ -3395,7 +3351,6 @@
               <a:rPr lang="zh-CN" altLang="en-US"/>
               <a:t>三级</a:t>
             </a:r>
-            <a:endParaRPr lang="zh-CN" altLang="en-US"/>
           </a:p>
           <a:p>
             <a:pPr lvl="3"/>
@@ -3403,7 +3358,6 @@
               <a:rPr lang="zh-CN" altLang="en-US"/>
               <a:t>四级</a:t>
             </a:r>
-            <a:endParaRPr lang="zh-CN" altLang="en-US"/>
           </a:p>
           <a:p>
             <a:pPr lvl="4"/>
@@ -3411,7 +3365,6 @@
               <a:rPr lang="zh-CN" altLang="en-US"/>
               <a:t>五级</a:t>
             </a:r>
-            <a:endParaRPr lang="zh-CN" altLang="en-US"/>
           </a:p>
         </p:txBody>
       </p:sp>
@@ -3440,7 +3393,6 @@
               <a:rPr lang="zh-CN" altLang="en-US"/>
               <a:t>单击此处编辑母版文本样式</a:t>
             </a:r>
-            <a:endParaRPr lang="zh-CN" altLang="en-US"/>
           </a:p>
           <a:p>
             <a:pPr lvl="1"/>
@@ -3448,7 +3400,6 @@
               <a:rPr lang="zh-CN" altLang="en-US"/>
               <a:t>二级</a:t>
             </a:r>
-            <a:endParaRPr lang="zh-CN" altLang="en-US"/>
           </a:p>
           <a:p>
             <a:pPr lvl="2"/>
@@ -3456,7 +3407,6 @@
               <a:rPr lang="zh-CN" altLang="en-US"/>
               <a:t>三级</a:t>
             </a:r>
-            <a:endParaRPr lang="zh-CN" altLang="en-US"/>
           </a:p>
           <a:p>
             <a:pPr lvl="3"/>
@@ -3464,7 +3414,6 @@
               <a:rPr lang="zh-CN" altLang="en-US"/>
               <a:t>四级</a:t>
             </a:r>
-            <a:endParaRPr lang="zh-CN" altLang="en-US"/>
           </a:p>
           <a:p>
             <a:pPr lvl="4"/>
@@ -3472,7 +3421,6 @@
               <a:rPr lang="zh-CN" altLang="en-US"/>
               <a:t>五级</a:t>
             </a:r>
-            <a:endParaRPr lang="zh-CN" altLang="en-US"/>
           </a:p>
         </p:txBody>
       </p:sp>
@@ -3493,6 +3441,7 @@
           <a:p>
             <a:fld id="{0E3CF729-EF3B-40C4-90BC-C2086AADCC60}" type="datetimeFigureOut">
               <a:rPr lang="zh-CN" altLang="en-US" smtClean="0"/>
+              <a:t>2024-06-16</a:t>
             </a:fld>
             <a:endParaRPr lang="zh-CN" altLang="en-US"/>
           </a:p>
@@ -3534,6 +3483,7 @@
           <a:p>
             <a:fld id="{EC58ADBA-A0F5-48D7-ABCF-49CF523FE9C6}" type="slidenum">
               <a:rPr lang="zh-CN" altLang="en-US" smtClean="0"/>
+              <a:t>‹#›</a:t>
             </a:fld>
             <a:endParaRPr lang="zh-CN" altLang="en-US"/>
           </a:p>
@@ -3588,7 +3538,6 @@
               <a:rPr lang="zh-CN" altLang="en-US"/>
               <a:t>单击此处编辑母版标题样式</a:t>
             </a:r>
-            <a:endParaRPr lang="zh-CN" altLang="en-US"/>
           </a:p>
         </p:txBody>
       </p:sp>
@@ -3654,7 +3603,6 @@
               <a:rPr lang="zh-CN" altLang="en-US"/>
               <a:t>单击此处编辑母版文本样式</a:t>
             </a:r>
-            <a:endParaRPr lang="zh-CN" altLang="en-US"/>
           </a:p>
         </p:txBody>
       </p:sp>
@@ -3683,7 +3631,6 @@
               <a:rPr lang="zh-CN" altLang="en-US"/>
               <a:t>单击此处编辑母版文本样式</a:t>
             </a:r>
-            <a:endParaRPr lang="zh-CN" altLang="en-US"/>
           </a:p>
           <a:p>
             <a:pPr lvl="1"/>
@@ -3691,7 +3638,6 @@
               <a:rPr lang="zh-CN" altLang="en-US"/>
               <a:t>二级</a:t>
             </a:r>
-            <a:endParaRPr lang="zh-CN" altLang="en-US"/>
           </a:p>
           <a:p>
             <a:pPr lvl="2"/>
@@ -3699,7 +3645,6 @@
               <a:rPr lang="zh-CN" altLang="en-US"/>
               <a:t>三级</a:t>
             </a:r>
-            <a:endParaRPr lang="zh-CN" altLang="en-US"/>
           </a:p>
           <a:p>
             <a:pPr lvl="3"/>
@@ -3707,7 +3652,6 @@
               <a:rPr lang="zh-CN" altLang="en-US"/>
               <a:t>四级</a:t>
             </a:r>
-            <a:endParaRPr lang="zh-CN" altLang="en-US"/>
           </a:p>
           <a:p>
             <a:pPr lvl="4"/>
@@ -3715,7 +3659,6 @@
               <a:rPr lang="zh-CN" altLang="en-US"/>
               <a:t>五级</a:t>
             </a:r>
-            <a:endParaRPr lang="zh-CN" altLang="en-US"/>
           </a:p>
         </p:txBody>
       </p:sp>
@@ -3781,7 +3724,6 @@
               <a:rPr lang="zh-CN" altLang="en-US"/>
               <a:t>单击此处编辑母版文本样式</a:t>
             </a:r>
-            <a:endParaRPr lang="zh-CN" altLang="en-US"/>
           </a:p>
         </p:txBody>
       </p:sp>
@@ -3810,7 +3752,6 @@
               <a:rPr lang="zh-CN" altLang="en-US"/>
               <a:t>单击此处编辑母版文本样式</a:t>
             </a:r>
-            <a:endParaRPr lang="zh-CN" altLang="en-US"/>
           </a:p>
           <a:p>
             <a:pPr lvl="1"/>
@@ -3818,7 +3759,6 @@
               <a:rPr lang="zh-CN" altLang="en-US"/>
               <a:t>二级</a:t>
             </a:r>
-            <a:endParaRPr lang="zh-CN" altLang="en-US"/>
           </a:p>
           <a:p>
             <a:pPr lvl="2"/>
@@ -3826,7 +3766,6 @@
               <a:rPr lang="zh-CN" altLang="en-US"/>
               <a:t>三级</a:t>
             </a:r>
-            <a:endParaRPr lang="zh-CN" altLang="en-US"/>
           </a:p>
           <a:p>
             <a:pPr lvl="3"/>
@@ -3834,7 +3773,6 @@
               <a:rPr lang="zh-CN" altLang="en-US"/>
               <a:t>四级</a:t>
             </a:r>
-            <a:endParaRPr lang="zh-CN" altLang="en-US"/>
           </a:p>
           <a:p>
             <a:pPr lvl="4"/>
@@ -3842,7 +3780,6 @@
               <a:rPr lang="zh-CN" altLang="en-US"/>
               <a:t>五级</a:t>
             </a:r>
-            <a:endParaRPr lang="zh-CN" altLang="en-US"/>
           </a:p>
         </p:txBody>
       </p:sp>
@@ -3863,6 +3800,7 @@
           <a:p>
             <a:fld id="{0E3CF729-EF3B-40C4-90BC-C2086AADCC60}" type="datetimeFigureOut">
               <a:rPr lang="zh-CN" altLang="en-US" smtClean="0"/>
+              <a:t>2024-06-16</a:t>
             </a:fld>
             <a:endParaRPr lang="zh-CN" altLang="en-US"/>
           </a:p>
@@ -3904,6 +3842,7 @@
           <a:p>
             <a:fld id="{EC58ADBA-A0F5-48D7-ABCF-49CF523FE9C6}" type="slidenum">
               <a:rPr lang="zh-CN" altLang="en-US" smtClean="0"/>
+              <a:t>‹#›</a:t>
             </a:fld>
             <a:endParaRPr lang="zh-CN" altLang="en-US"/>
           </a:p>
@@ -3953,7 +3892,6 @@
               <a:rPr lang="zh-CN" altLang="en-US"/>
               <a:t>单击此处编辑母版标题样式</a:t>
             </a:r>
-            <a:endParaRPr lang="zh-CN" altLang="en-US"/>
           </a:p>
         </p:txBody>
       </p:sp>
@@ -3974,6 +3912,7 @@
           <a:p>
             <a:fld id="{0E3CF729-EF3B-40C4-90BC-C2086AADCC60}" type="datetimeFigureOut">
               <a:rPr lang="zh-CN" altLang="en-US" smtClean="0"/>
+              <a:t>2024-06-16</a:t>
             </a:fld>
             <a:endParaRPr lang="zh-CN" altLang="en-US"/>
           </a:p>
@@ -4015,6 +3954,7 @@
           <a:p>
             <a:fld id="{EC58ADBA-A0F5-48D7-ABCF-49CF523FE9C6}" type="slidenum">
               <a:rPr lang="zh-CN" altLang="en-US" smtClean="0"/>
+              <a:t>‹#›</a:t>
             </a:fld>
             <a:endParaRPr lang="zh-CN" altLang="en-US"/>
           </a:p>
@@ -4062,6 +4002,7 @@
           <a:p>
             <a:fld id="{0E3CF729-EF3B-40C4-90BC-C2086AADCC60}" type="datetimeFigureOut">
               <a:rPr lang="zh-CN" altLang="en-US" smtClean="0"/>
+              <a:t>2024-06-16</a:t>
             </a:fld>
             <a:endParaRPr lang="zh-CN" altLang="en-US"/>
           </a:p>
@@ -4103,6 +4044,7 @@
           <a:p>
             <a:fld id="{EC58ADBA-A0F5-48D7-ABCF-49CF523FE9C6}" type="slidenum">
               <a:rPr lang="zh-CN" altLang="en-US" smtClean="0"/>
+              <a:t>‹#›</a:t>
             </a:fld>
             <a:endParaRPr lang="zh-CN" altLang="en-US"/>
           </a:p>
@@ -4161,7 +4103,6 @@
               <a:rPr lang="zh-CN" altLang="en-US"/>
               <a:t>单击此处编辑母版标题样式</a:t>
             </a:r>
-            <a:endParaRPr lang="zh-CN" altLang="en-US"/>
           </a:p>
         </p:txBody>
       </p:sp>
@@ -4218,7 +4159,6 @@
               <a:rPr lang="zh-CN" altLang="en-US"/>
               <a:t>单击此处编辑母版文本样式</a:t>
             </a:r>
-            <a:endParaRPr lang="zh-CN" altLang="en-US"/>
           </a:p>
           <a:p>
             <a:pPr lvl="1"/>
@@ -4226,7 +4166,6 @@
               <a:rPr lang="zh-CN" altLang="en-US"/>
               <a:t>二级</a:t>
             </a:r>
-            <a:endParaRPr lang="zh-CN" altLang="en-US"/>
           </a:p>
           <a:p>
             <a:pPr lvl="2"/>
@@ -4234,7 +4173,6 @@
               <a:rPr lang="zh-CN" altLang="en-US"/>
               <a:t>三级</a:t>
             </a:r>
-            <a:endParaRPr lang="zh-CN" altLang="en-US"/>
           </a:p>
           <a:p>
             <a:pPr lvl="3"/>
@@ -4242,7 +4180,6 @@
               <a:rPr lang="zh-CN" altLang="en-US"/>
               <a:t>四级</a:t>
             </a:r>
-            <a:endParaRPr lang="zh-CN" altLang="en-US"/>
           </a:p>
           <a:p>
             <a:pPr lvl="4"/>
@@ -4250,7 +4187,6 @@
               <a:rPr lang="zh-CN" altLang="en-US"/>
               <a:t>五级</a:t>
             </a:r>
-            <a:endParaRPr lang="zh-CN" altLang="en-US"/>
           </a:p>
         </p:txBody>
       </p:sp>
@@ -4316,7 +4252,6 @@
               <a:rPr lang="zh-CN" altLang="en-US"/>
               <a:t>单击此处编辑母版文本样式</a:t>
             </a:r>
-            <a:endParaRPr lang="zh-CN" altLang="en-US"/>
           </a:p>
         </p:txBody>
       </p:sp>
@@ -4337,6 +4272,7 @@
           <a:p>
             <a:fld id="{0E3CF729-EF3B-40C4-90BC-C2086AADCC60}" type="datetimeFigureOut">
               <a:rPr lang="zh-CN" altLang="en-US" smtClean="0"/>
+              <a:t>2024-06-16</a:t>
             </a:fld>
             <a:endParaRPr lang="zh-CN" altLang="en-US"/>
           </a:p>
@@ -4378,6 +4314,7 @@
           <a:p>
             <a:fld id="{EC58ADBA-A0F5-48D7-ABCF-49CF523FE9C6}" type="slidenum">
               <a:rPr lang="zh-CN" altLang="en-US" smtClean="0"/>
+              <a:t>‹#›</a:t>
             </a:fld>
             <a:endParaRPr lang="zh-CN" altLang="en-US"/>
           </a:p>
@@ -4436,7 +4373,6 @@
               <a:rPr lang="zh-CN" altLang="en-US"/>
               <a:t>单击此处编辑母版标题样式</a:t>
             </a:r>
-            <a:endParaRPr lang="zh-CN" altLang="en-US"/>
           </a:p>
         </p:txBody>
       </p:sp>
@@ -4563,7 +4499,6 @@
               <a:rPr lang="zh-CN" altLang="en-US"/>
               <a:t>单击此处编辑母版文本样式</a:t>
             </a:r>
-            <a:endParaRPr lang="zh-CN" altLang="en-US"/>
           </a:p>
         </p:txBody>
       </p:sp>
@@ -4584,6 +4519,7 @@
           <a:p>
             <a:fld id="{0E3CF729-EF3B-40C4-90BC-C2086AADCC60}" type="datetimeFigureOut">
               <a:rPr lang="zh-CN" altLang="en-US" smtClean="0"/>
+              <a:t>2024-06-16</a:t>
             </a:fld>
             <a:endParaRPr lang="zh-CN" altLang="en-US"/>
           </a:p>
@@ -4625,6 +4561,7 @@
           <a:p>
             <a:fld id="{EC58ADBA-A0F5-48D7-ABCF-49CF523FE9C6}" type="slidenum">
               <a:rPr lang="zh-CN" altLang="en-US" smtClean="0"/>
+              <a:t>‹#›</a:t>
             </a:fld>
             <a:endParaRPr lang="zh-CN" altLang="en-US"/>
           </a:p>
@@ -4689,7 +4626,6 @@
               <a:rPr lang="zh-CN" altLang="en-US"/>
               <a:t>单击此处编辑母版标题样式</a:t>
             </a:r>
-            <a:endParaRPr lang="zh-CN" altLang="en-US"/>
           </a:p>
         </p:txBody>
       </p:sp>
@@ -4723,7 +4659,6 @@
               <a:rPr lang="zh-CN" altLang="en-US"/>
               <a:t>单击此处编辑母版文本样式</a:t>
             </a:r>
-            <a:endParaRPr lang="zh-CN" altLang="en-US"/>
           </a:p>
           <a:p>
             <a:pPr lvl="1"/>
@@ -4731,7 +4666,6 @@
               <a:rPr lang="zh-CN" altLang="en-US"/>
               <a:t>二级</a:t>
             </a:r>
-            <a:endParaRPr lang="zh-CN" altLang="en-US"/>
           </a:p>
           <a:p>
             <a:pPr lvl="2"/>
@@ -4739,7 +4673,6 @@
               <a:rPr lang="zh-CN" altLang="en-US"/>
               <a:t>三级</a:t>
             </a:r>
-            <a:endParaRPr lang="zh-CN" altLang="en-US"/>
           </a:p>
           <a:p>
             <a:pPr lvl="3"/>
@@ -4747,7 +4680,6 @@
               <a:rPr lang="zh-CN" altLang="en-US"/>
               <a:t>四级</a:t>
             </a:r>
-            <a:endParaRPr lang="zh-CN" altLang="en-US"/>
           </a:p>
           <a:p>
             <a:pPr lvl="4"/>
@@ -4755,7 +4687,6 @@
               <a:rPr lang="zh-CN" altLang="en-US"/>
               <a:t>五级</a:t>
             </a:r>
-            <a:endParaRPr lang="zh-CN" altLang="en-US"/>
           </a:p>
         </p:txBody>
       </p:sp>
@@ -4794,6 +4725,7 @@
           <a:p>
             <a:fld id="{0E3CF729-EF3B-40C4-90BC-C2086AADCC60}" type="datetimeFigureOut">
               <a:rPr lang="zh-CN" altLang="en-US" smtClean="0"/>
+              <a:t>2024-06-16</a:t>
             </a:fld>
             <a:endParaRPr lang="zh-CN" altLang="en-US"/>
           </a:p>
@@ -4871,6 +4803,7 @@
           <a:p>
             <a:fld id="{EC58ADBA-A0F5-48D7-ABCF-49CF523FE9C6}" type="slidenum">
               <a:rPr lang="zh-CN" altLang="en-US" smtClean="0"/>
+              <a:t>‹#›</a:t>
             </a:fld>
             <a:endParaRPr lang="zh-CN" altLang="en-US"/>
           </a:p>
@@ -5226,7 +5159,6 @@
               <a:rPr lang="zh-CN" altLang="en-US"/>
               <a:t>单击此处编辑母版标题样式</a:t>
             </a:r>
-            <a:endParaRPr lang="zh-CN" altLang="en-US"/>
           </a:p>
         </p:txBody>
       </p:sp>
@@ -5260,7 +5192,6 @@
               <a:rPr lang="zh-CN" altLang="en-US"/>
               <a:t>单击此处编辑母版文本样式</a:t>
             </a:r>
-            <a:endParaRPr lang="zh-CN" altLang="en-US"/>
           </a:p>
           <a:p>
             <a:pPr lvl="1"/>
@@ -5268,7 +5199,6 @@
               <a:rPr lang="zh-CN" altLang="en-US"/>
               <a:t>二级</a:t>
             </a:r>
-            <a:endParaRPr lang="zh-CN" altLang="en-US"/>
           </a:p>
           <a:p>
             <a:pPr lvl="2"/>
@@ -5276,7 +5206,6 @@
               <a:rPr lang="zh-CN" altLang="en-US"/>
               <a:t>三级</a:t>
             </a:r>
-            <a:endParaRPr lang="zh-CN" altLang="en-US"/>
           </a:p>
           <a:p>
             <a:pPr lvl="3"/>
@@ -5284,7 +5213,6 @@
               <a:rPr lang="zh-CN" altLang="en-US"/>
               <a:t>四级</a:t>
             </a:r>
-            <a:endParaRPr lang="zh-CN" altLang="en-US"/>
           </a:p>
           <a:p>
             <a:pPr lvl="4"/>
@@ -5292,7 +5220,6 @@
               <a:rPr lang="zh-CN" altLang="en-US"/>
               <a:t>五级</a:t>
             </a:r>
-            <a:endParaRPr lang="zh-CN" altLang="en-US"/>
           </a:p>
         </p:txBody>
       </p:sp>
@@ -5331,6 +5258,7 @@
           <a:p>
             <a:fld id="{0E3CF729-EF3B-40C4-90BC-C2086AADCC60}" type="datetimeFigureOut">
               <a:rPr lang="zh-CN" altLang="en-US" smtClean="0"/>
+              <a:t>2024-06-16</a:t>
             </a:fld>
             <a:endParaRPr lang="zh-CN" altLang="en-US"/>
           </a:p>
@@ -5408,6 +5336,7 @@
           <a:p>
             <a:fld id="{EC58ADBA-A0F5-48D7-ABCF-49CF523FE9C6}" type="slidenum">
               <a:rPr lang="zh-CN" altLang="en-US" smtClean="0"/>
+              <a:t>‹#›</a:t>
             </a:fld>
             <a:endParaRPr lang="zh-CN" altLang="en-US"/>
           </a:p>
@@ -5731,6 +5660,419 @@
       </p:grpSpPr>
       <p:sp>
         <p:nvSpPr>
+          <p:cNvPr id="2" name="椭圆 1">
+            <a:extLst>
+              <a:ext uri="{FF2B5EF4-FFF2-40B4-BE49-F238E27FC236}">
+                <a16:creationId xmlns:a16="http://schemas.microsoft.com/office/drawing/2014/main" id="{20B9BA12-20EC-CF66-C46C-C342DC55647F}"/>
+              </a:ext>
+            </a:extLst>
+          </p:cNvPr>
+          <p:cNvSpPr/>
+          <p:nvPr/>
+        </p:nvSpPr>
+        <p:spPr>
+          <a:xfrm>
+            <a:off x="5947317" y="3280317"/>
+            <a:ext cx="297366" cy="297366"/>
+          </a:xfrm>
+          <a:prstGeom prst="ellipse">
+            <a:avLst/>
+          </a:prstGeom>
+          <a:solidFill>
+            <a:schemeClr val="tx1"/>
+          </a:solidFill>
+          <a:ln>
+            <a:solidFill>
+              <a:schemeClr val="tx1"/>
+            </a:solidFill>
+          </a:ln>
+        </p:spPr>
+        <p:style>
+          <a:lnRef idx="2">
+            <a:schemeClr val="accent1">
+              <a:shade val="15000"/>
+            </a:schemeClr>
+          </a:lnRef>
+          <a:fillRef idx="1">
+            <a:schemeClr val="accent1"/>
+          </a:fillRef>
+          <a:effectRef idx="0">
+            <a:schemeClr val="accent1"/>
+          </a:effectRef>
+          <a:fontRef idx="minor">
+            <a:schemeClr val="lt1"/>
+          </a:fontRef>
+        </p:style>
+        <p:txBody>
+          <a:bodyPr rtlCol="0" anchor="ctr"/>
+          <a:lstStyle/>
+          <a:p>
+            <a:pPr algn="ctr"/>
+            <a:endParaRPr lang="zh-CN" altLang="en-US"/>
+          </a:p>
+        </p:txBody>
+      </p:sp>
+      <p:sp>
+        <p:nvSpPr>
+          <p:cNvPr id="4" name="椭圆 3">
+            <a:extLst>
+              <a:ext uri="{FF2B5EF4-FFF2-40B4-BE49-F238E27FC236}">
+                <a16:creationId xmlns:a16="http://schemas.microsoft.com/office/drawing/2014/main" id="{BC3B0FDD-3FB6-0154-5A27-A3FA4E79F12E}"/>
+              </a:ext>
+            </a:extLst>
+          </p:cNvPr>
+          <p:cNvSpPr/>
+          <p:nvPr/>
+        </p:nvSpPr>
+        <p:spPr>
+          <a:xfrm>
+            <a:off x="5150495" y="2483495"/>
+            <a:ext cx="1891009" cy="1891009"/>
+          </a:xfrm>
+          <a:prstGeom prst="ellipse">
+            <a:avLst/>
+          </a:prstGeom>
+          <a:noFill/>
+          <a:ln w="25400">
+            <a:solidFill>
+              <a:srgbClr val="00B0F0"/>
+            </a:solidFill>
+          </a:ln>
+        </p:spPr>
+        <p:style>
+          <a:lnRef idx="2">
+            <a:schemeClr val="accent1">
+              <a:shade val="15000"/>
+            </a:schemeClr>
+          </a:lnRef>
+          <a:fillRef idx="1">
+            <a:schemeClr val="accent1"/>
+          </a:fillRef>
+          <a:effectRef idx="0">
+            <a:schemeClr val="accent1"/>
+          </a:effectRef>
+          <a:fontRef idx="minor">
+            <a:schemeClr val="lt1"/>
+          </a:fontRef>
+        </p:style>
+        <p:txBody>
+          <a:bodyPr rtlCol="0" anchor="ctr"/>
+          <a:lstStyle/>
+          <a:p>
+            <a:pPr algn="ctr"/>
+            <a:endParaRPr lang="zh-CN" altLang="en-US" dirty="0"/>
+          </a:p>
+        </p:txBody>
+      </p:sp>
+      <p:sp>
+        <p:nvSpPr>
+          <p:cNvPr id="5" name="椭圆 4">
+            <a:extLst>
+              <a:ext uri="{FF2B5EF4-FFF2-40B4-BE49-F238E27FC236}">
+                <a16:creationId xmlns:a16="http://schemas.microsoft.com/office/drawing/2014/main" id="{9E144C4F-613C-E359-EBAD-B185F8C07865}"/>
+              </a:ext>
+            </a:extLst>
+          </p:cNvPr>
+          <p:cNvSpPr/>
+          <p:nvPr/>
+        </p:nvSpPr>
+        <p:spPr>
+          <a:xfrm>
+            <a:off x="4661727" y="1994727"/>
+            <a:ext cx="2868546" cy="2868546"/>
+          </a:xfrm>
+          <a:prstGeom prst="ellipse">
+            <a:avLst/>
+          </a:prstGeom>
+          <a:noFill/>
+          <a:ln w="25400">
+            <a:solidFill>
+              <a:srgbClr val="00B0F0"/>
+            </a:solidFill>
+          </a:ln>
+        </p:spPr>
+        <p:style>
+          <a:lnRef idx="2">
+            <a:schemeClr val="accent1">
+              <a:shade val="15000"/>
+            </a:schemeClr>
+          </a:lnRef>
+          <a:fillRef idx="1">
+            <a:schemeClr val="accent1"/>
+          </a:fillRef>
+          <a:effectRef idx="0">
+            <a:schemeClr val="accent1"/>
+          </a:effectRef>
+          <a:fontRef idx="minor">
+            <a:schemeClr val="lt1"/>
+          </a:fontRef>
+        </p:style>
+        <p:txBody>
+          <a:bodyPr rtlCol="0" anchor="ctr"/>
+          <a:lstStyle/>
+          <a:p>
+            <a:pPr algn="ctr"/>
+            <a:endParaRPr lang="zh-CN" altLang="en-US" dirty="0"/>
+          </a:p>
+        </p:txBody>
+      </p:sp>
+      <p:sp>
+        <p:nvSpPr>
+          <p:cNvPr id="6" name="椭圆 5">
+            <a:extLst>
+              <a:ext uri="{FF2B5EF4-FFF2-40B4-BE49-F238E27FC236}">
+                <a16:creationId xmlns:a16="http://schemas.microsoft.com/office/drawing/2014/main" id="{70E56930-6324-7F88-1B73-04026E26F946}"/>
+              </a:ext>
+            </a:extLst>
+          </p:cNvPr>
+          <p:cNvSpPr/>
+          <p:nvPr/>
+        </p:nvSpPr>
+        <p:spPr>
+          <a:xfrm>
+            <a:off x="4217588" y="1550588"/>
+            <a:ext cx="3756821" cy="3756821"/>
+          </a:xfrm>
+          <a:prstGeom prst="ellipse">
+            <a:avLst/>
+          </a:prstGeom>
+          <a:noFill/>
+          <a:ln w="25400">
+            <a:solidFill>
+              <a:srgbClr val="00B0F0"/>
+            </a:solidFill>
+          </a:ln>
+        </p:spPr>
+        <p:style>
+          <a:lnRef idx="2">
+            <a:schemeClr val="accent1">
+              <a:shade val="15000"/>
+            </a:schemeClr>
+          </a:lnRef>
+          <a:fillRef idx="1">
+            <a:schemeClr val="accent1"/>
+          </a:fillRef>
+          <a:effectRef idx="0">
+            <a:schemeClr val="accent1"/>
+          </a:effectRef>
+          <a:fontRef idx="minor">
+            <a:schemeClr val="lt1"/>
+          </a:fontRef>
+        </p:style>
+        <p:txBody>
+          <a:bodyPr rtlCol="0" anchor="ctr"/>
+          <a:lstStyle/>
+          <a:p>
+            <a:pPr algn="ctr"/>
+            <a:endParaRPr lang="zh-CN" altLang="en-US" dirty="0"/>
+          </a:p>
+        </p:txBody>
+      </p:sp>
+      <p:sp>
+        <p:nvSpPr>
+          <p:cNvPr id="8" name="椭圆 7">
+            <a:extLst>
+              <a:ext uri="{FF2B5EF4-FFF2-40B4-BE49-F238E27FC236}">
+                <a16:creationId xmlns:a16="http://schemas.microsoft.com/office/drawing/2014/main" id="{476A2E98-6506-FB06-4F0D-C2CF3D2F9804}"/>
+              </a:ext>
+            </a:extLst>
+          </p:cNvPr>
+          <p:cNvSpPr/>
+          <p:nvPr/>
+        </p:nvSpPr>
+        <p:spPr>
+          <a:xfrm>
+            <a:off x="5615778" y="2948778"/>
+            <a:ext cx="960439" cy="960439"/>
+          </a:xfrm>
+          <a:prstGeom prst="ellipse">
+            <a:avLst/>
+          </a:prstGeom>
+          <a:noFill/>
+          <a:ln w="25400">
+            <a:solidFill>
+              <a:srgbClr val="00B0F0"/>
+            </a:solidFill>
+          </a:ln>
+        </p:spPr>
+        <p:style>
+          <a:lnRef idx="2">
+            <a:schemeClr val="accent1">
+              <a:shade val="15000"/>
+            </a:schemeClr>
+          </a:lnRef>
+          <a:fillRef idx="1">
+            <a:schemeClr val="accent1"/>
+          </a:fillRef>
+          <a:effectRef idx="0">
+            <a:schemeClr val="accent1"/>
+          </a:effectRef>
+          <a:fontRef idx="minor">
+            <a:schemeClr val="lt1"/>
+          </a:fontRef>
+        </p:style>
+        <p:txBody>
+          <a:bodyPr rtlCol="0" anchor="ctr"/>
+          <a:lstStyle/>
+          <a:p>
+            <a:pPr algn="ctr"/>
+            <a:endParaRPr lang="zh-CN" altLang="en-US" dirty="0"/>
+          </a:p>
+        </p:txBody>
+      </p:sp>
+      <p:sp>
+        <p:nvSpPr>
+          <p:cNvPr id="9" name="文本框 8">
+            <a:extLst>
+              <a:ext uri="{FF2B5EF4-FFF2-40B4-BE49-F238E27FC236}">
+                <a16:creationId xmlns:a16="http://schemas.microsoft.com/office/drawing/2014/main" id="{861EFCB2-2FE9-EF29-BF32-874263FFCDF3}"/>
+              </a:ext>
+            </a:extLst>
+          </p:cNvPr>
+          <p:cNvSpPr txBox="1"/>
+          <p:nvPr/>
+        </p:nvSpPr>
+        <p:spPr>
+          <a:xfrm>
+            <a:off x="5671772" y="2531922"/>
+            <a:ext cx="1061200" cy="369332"/>
+          </a:xfrm>
+          <a:prstGeom prst="rect">
+            <a:avLst/>
+          </a:prstGeom>
+          <a:noFill/>
+        </p:spPr>
+        <p:txBody>
+          <a:bodyPr wrap="square" rtlCol="0">
+            <a:spAutoFit/>
+          </a:bodyPr>
+          <a:lstStyle/>
+          <a:p>
+            <a:r>
+              <a:rPr lang="en-US" altLang="zh-CN" b="1" dirty="0">
+                <a:latin typeface="Times New Roman" panose="02020603050405020304" pitchFamily="18" charset="0"/>
+                <a:cs typeface="Times New Roman" panose="02020603050405020304" pitchFamily="18" charset="0"/>
+              </a:rPr>
+              <a:t>K(n=1)</a:t>
+            </a:r>
+            <a:endParaRPr lang="zh-CN" altLang="en-US" b="1" dirty="0">
+              <a:latin typeface="Times New Roman" panose="02020603050405020304" pitchFamily="18" charset="0"/>
+              <a:cs typeface="Times New Roman" panose="02020603050405020304" pitchFamily="18" charset="0"/>
+            </a:endParaRPr>
+          </a:p>
+        </p:txBody>
+      </p:sp>
+      <p:sp>
+        <p:nvSpPr>
+          <p:cNvPr id="10" name="文本框 9">
+            <a:extLst>
+              <a:ext uri="{FF2B5EF4-FFF2-40B4-BE49-F238E27FC236}">
+                <a16:creationId xmlns:a16="http://schemas.microsoft.com/office/drawing/2014/main" id="{6117EF23-52CB-1ED6-D77B-451927A6F2F1}"/>
+              </a:ext>
+            </a:extLst>
+          </p:cNvPr>
+          <p:cNvSpPr txBox="1"/>
+          <p:nvPr/>
+        </p:nvSpPr>
+        <p:spPr>
+          <a:xfrm>
+            <a:off x="5654048" y="2076760"/>
+            <a:ext cx="1061200" cy="369332"/>
+          </a:xfrm>
+          <a:prstGeom prst="rect">
+            <a:avLst/>
+          </a:prstGeom>
+          <a:noFill/>
+        </p:spPr>
+        <p:txBody>
+          <a:bodyPr wrap="square" rtlCol="0">
+            <a:spAutoFit/>
+          </a:bodyPr>
+          <a:lstStyle/>
+          <a:p>
+            <a:r>
+              <a:rPr lang="en-US" altLang="zh-CN" b="1" dirty="0">
+                <a:latin typeface="Times New Roman" panose="02020603050405020304" pitchFamily="18" charset="0"/>
+                <a:cs typeface="Times New Roman" panose="02020603050405020304" pitchFamily="18" charset="0"/>
+              </a:rPr>
+              <a:t>L(n=2)</a:t>
+            </a:r>
+            <a:endParaRPr lang="zh-CN" altLang="en-US" b="1" dirty="0">
+              <a:latin typeface="Times New Roman" panose="02020603050405020304" pitchFamily="18" charset="0"/>
+              <a:cs typeface="Times New Roman" panose="02020603050405020304" pitchFamily="18" charset="0"/>
+            </a:endParaRPr>
+          </a:p>
+        </p:txBody>
+      </p:sp>
+      <p:sp>
+        <p:nvSpPr>
+          <p:cNvPr id="11" name="文本框 10">
+            <a:extLst>
+              <a:ext uri="{FF2B5EF4-FFF2-40B4-BE49-F238E27FC236}">
+                <a16:creationId xmlns:a16="http://schemas.microsoft.com/office/drawing/2014/main" id="{E945B9B1-2734-EA01-3834-1F485704856A}"/>
+              </a:ext>
+            </a:extLst>
+          </p:cNvPr>
+          <p:cNvSpPr txBox="1"/>
+          <p:nvPr/>
+        </p:nvSpPr>
+        <p:spPr>
+          <a:xfrm>
+            <a:off x="5615778" y="1587991"/>
+            <a:ext cx="1061200" cy="369332"/>
+          </a:xfrm>
+          <a:prstGeom prst="rect">
+            <a:avLst/>
+          </a:prstGeom>
+          <a:noFill/>
+        </p:spPr>
+        <p:txBody>
+          <a:bodyPr wrap="square" rtlCol="0">
+            <a:spAutoFit/>
+          </a:bodyPr>
+          <a:lstStyle/>
+          <a:p>
+            <a:r>
+              <a:rPr lang="en-US" altLang="zh-CN" b="1" dirty="0">
+                <a:latin typeface="Times New Roman" panose="02020603050405020304" pitchFamily="18" charset="0"/>
+                <a:cs typeface="Times New Roman" panose="02020603050405020304" pitchFamily="18" charset="0"/>
+              </a:rPr>
+              <a:t>M(n=3)</a:t>
+            </a:r>
+            <a:endParaRPr lang="zh-CN" altLang="en-US" b="1" dirty="0">
+              <a:latin typeface="Times New Roman" panose="02020603050405020304" pitchFamily="18" charset="0"/>
+              <a:cs typeface="Times New Roman" panose="02020603050405020304" pitchFamily="18" charset="0"/>
+            </a:endParaRPr>
+          </a:p>
+        </p:txBody>
+      </p:sp>
+    </p:spTree>
+  </p:cSld>
+  <p:clrMapOvr>
+    <a:masterClrMapping/>
+  </p:clrMapOvr>
+</p:sld>
+</file>
+
+<file path=ppt/slides/slide2.xml><?xml version="1.0" encoding="utf-8"?>
+<p:sld xmlns:a="http://schemas.openxmlformats.org/drawingml/2006/main" xmlns:r="http://schemas.openxmlformats.org/officeDocument/2006/relationships" xmlns:p="http://schemas.openxmlformats.org/presentationml/2006/main">
+  <p:cSld>
+    <p:spTree>
+      <p:nvGrpSpPr>
+        <p:cNvPr id="1" name=""/>
+        <p:cNvGrpSpPr/>
+        <p:nvPr/>
+      </p:nvGrpSpPr>
+      <p:grpSpPr>
+        <a:xfrm>
+          <a:off x="0" y="0"/>
+          <a:ext cx="0" cy="0"/>
+          <a:chOff x="0" y="0"/>
+          <a:chExt cx="0" cy="0"/>
+        </a:xfrm>
+      </p:grpSpPr>
+      <p:sp>
+        <p:nvSpPr>
           <p:cNvPr id="4" name="椭圆 3"/>
           <p:cNvSpPr/>
           <p:nvPr/>
@@ -5926,8 +6268,8 @@
           </a:fontRef>
         </p:style>
       </p:cxnSp>
-      <mc:AlternateContent xmlns:mc="http://schemas.openxmlformats.org/markup-compatibility/2006">
-        <mc:Choice xmlns:a14="http://schemas.microsoft.com/office/drawing/2010/main" Requires="a14">
+      <mc:AlternateContent xmlns:mc="http://schemas.openxmlformats.org/markup-compatibility/2006" xmlns:a14="http://schemas.microsoft.com/office/drawing/2010/main">
+        <mc:Choice Requires="a14">
           <p:sp>
             <p:nvSpPr>
               <p:cNvPr id="38" name="文本框 37"/>
@@ -5950,6 +6292,7 @@
               </a:bodyPr>
               <a:lstStyle/>
               <a:p>
+                <a:pPr/>
                 <a14:m>
                   <m:oMathPara xmlns:m="http://schemas.openxmlformats.org/officeDocument/2006/math">
                     <m:oMathParaPr>
@@ -5992,7 +6335,7 @@
             </p:txBody>
           </p:sp>
         </mc:Choice>
-        <mc:Fallback>
+        <mc:Fallback xmlns="">
           <p:sp>
             <p:nvSpPr>
               <p:cNvPr id="38" name="文本框 37"/>
@@ -6010,7 +6353,7 @@
                 <a:avLst/>
               </a:prstGeom>
               <a:blipFill rotWithShape="1">
-                <a:blip r:embed="rId1"/>
+                <a:blip r:embed="rId2"/>
                 <a:stretch>
                   <a:fillRect l="-6" t="-79" r="6" b="15"/>
                 </a:stretch>
@@ -6031,8 +6374,8 @@
           </p:sp>
         </mc:Fallback>
       </mc:AlternateContent>
-      <mc:AlternateContent xmlns:mc="http://schemas.openxmlformats.org/markup-compatibility/2006">
-        <mc:Choice xmlns:a14="http://schemas.microsoft.com/office/drawing/2010/main" Requires="a14">
+      <mc:AlternateContent xmlns:mc="http://schemas.openxmlformats.org/markup-compatibility/2006" xmlns:a14="http://schemas.microsoft.com/office/drawing/2010/main">
+        <mc:Choice Requires="a14">
           <p:sp>
             <p:nvSpPr>
               <p:cNvPr id="42" name="文本框 41"/>
@@ -6055,6 +6398,7 @@
               </a:bodyPr>
               <a:lstStyle/>
               <a:p>
+                <a:pPr/>
                 <a14:m>
                   <m:oMathPara xmlns:m="http://schemas.openxmlformats.org/officeDocument/2006/math">
                     <m:oMathParaPr>
@@ -6094,7 +6438,7 @@
             </p:txBody>
           </p:sp>
         </mc:Choice>
-        <mc:Fallback>
+        <mc:Fallback xmlns="">
           <p:sp>
             <p:nvSpPr>
               <p:cNvPr id="42" name="文本框 41"/>
@@ -6112,7 +6456,7 @@
                 <a:avLst/>
               </a:prstGeom>
               <a:blipFill rotWithShape="1">
-                <a:blip r:embed="rId2"/>
+                <a:blip r:embed="rId3"/>
                 <a:stretch>
                   <a:fillRect t="-165" r="25" b="100"/>
                 </a:stretch>
@@ -6240,8 +6584,8 @@
           </a:fontRef>
         </p:style>
       </p:cxnSp>
-      <mc:AlternateContent xmlns:mc="http://schemas.openxmlformats.org/markup-compatibility/2006">
-        <mc:Choice xmlns:a14="http://schemas.microsoft.com/office/drawing/2010/main" Requires="a14">
+      <mc:AlternateContent xmlns:mc="http://schemas.openxmlformats.org/markup-compatibility/2006" xmlns:a14="http://schemas.microsoft.com/office/drawing/2010/main">
+        <mc:Choice Requires="a14">
           <p:sp>
             <p:nvSpPr>
               <p:cNvPr id="60" name="文本框 59"/>
@@ -6264,6 +6608,7 @@
               </a:bodyPr>
               <a:lstStyle/>
               <a:p>
+                <a:pPr/>
                 <a14:m>
                   <m:oMathPara xmlns:m="http://schemas.openxmlformats.org/officeDocument/2006/math">
                     <m:oMathParaPr>
@@ -6284,7 +6629,7 @@
             </p:txBody>
           </p:sp>
         </mc:Choice>
-        <mc:Fallback>
+        <mc:Fallback xmlns="">
           <p:sp>
             <p:nvSpPr>
               <p:cNvPr id="60" name="文本框 59"/>
@@ -6302,7 +6647,7 @@
                 <a:avLst/>
               </a:prstGeom>
               <a:blipFill rotWithShape="1">
-                <a:blip r:embed="rId3"/>
+                <a:blip r:embed="rId4"/>
                 <a:stretch>
                   <a:fillRect l="-43" t="-169" b="105"/>
                 </a:stretch>
@@ -6323,8 +6668,8 @@
           </p:sp>
         </mc:Fallback>
       </mc:AlternateContent>
-      <mc:AlternateContent xmlns:mc="http://schemas.openxmlformats.org/markup-compatibility/2006">
-        <mc:Choice xmlns:a14="http://schemas.microsoft.com/office/drawing/2010/main" Requires="a14">
+      <mc:AlternateContent xmlns:mc="http://schemas.openxmlformats.org/markup-compatibility/2006" xmlns:a14="http://schemas.microsoft.com/office/drawing/2010/main">
+        <mc:Choice Requires="a14">
           <p:sp>
             <p:nvSpPr>
               <p:cNvPr id="61" name="文本框 60"/>
@@ -6347,6 +6692,7 @@
               </a:bodyPr>
               <a:lstStyle/>
               <a:p>
+                <a:pPr/>
                 <a14:m>
                   <m:oMathPara xmlns:m="http://schemas.openxmlformats.org/officeDocument/2006/math">
                     <m:oMathParaPr>
@@ -6367,7 +6713,7 @@
             </p:txBody>
           </p:sp>
         </mc:Choice>
-        <mc:Fallback>
+        <mc:Fallback xmlns="">
           <p:sp>
             <p:nvSpPr>
               <p:cNvPr id="61" name="文本框 60"/>
@@ -6385,7 +6731,7 @@
                 <a:avLst/>
               </a:prstGeom>
               <a:blipFill rotWithShape="1">
-                <a:blip r:embed="rId4"/>
+                <a:blip r:embed="rId5"/>
                 <a:stretch>
                   <a:fillRect l="-12" t="-87" r="8" b="22"/>
                 </a:stretch>
@@ -6406,8 +6752,8 @@
           </p:sp>
         </mc:Fallback>
       </mc:AlternateContent>
-      <mc:AlternateContent xmlns:mc="http://schemas.openxmlformats.org/markup-compatibility/2006">
-        <mc:Choice xmlns:a14="http://schemas.microsoft.com/office/drawing/2010/main" Requires="a14">
+      <mc:AlternateContent xmlns:mc="http://schemas.openxmlformats.org/markup-compatibility/2006" xmlns:a14="http://schemas.microsoft.com/office/drawing/2010/main">
+        <mc:Choice Requires="a14">
           <p:sp>
             <p:nvSpPr>
               <p:cNvPr id="66" name="文本框 65"/>
@@ -6430,6 +6776,7 @@
               </a:bodyPr>
               <a:lstStyle/>
               <a:p>
+                <a:pPr/>
                 <a14:m>
                   <m:oMathPara xmlns:m="http://schemas.openxmlformats.org/officeDocument/2006/math">
                     <m:oMathParaPr>
@@ -6453,7 +6800,7 @@
             </p:txBody>
           </p:sp>
         </mc:Choice>
-        <mc:Fallback>
+        <mc:Fallback xmlns="">
           <p:sp>
             <p:nvSpPr>
               <p:cNvPr id="66" name="文本框 65"/>
@@ -6471,7 +6818,7 @@
                 <a:avLst/>
               </a:prstGeom>
               <a:blipFill rotWithShape="1">
-                <a:blip r:embed="rId5"/>
+                <a:blip r:embed="rId6"/>
                 <a:stretch>
                   <a:fillRect l="-13" t="-119" r="26" b="55"/>
                 </a:stretch>
@@ -6546,7 +6893,7 @@
 </p:sld>
 </file>
 
-<file path=ppt/slides/slide2.xml><?xml version="1.0" encoding="utf-8"?>
+<file path=ppt/slides/slide3.xml><?xml version="1.0" encoding="utf-8"?>
 <p:sld xmlns:a="http://schemas.openxmlformats.org/drawingml/2006/main" xmlns:r="http://schemas.openxmlformats.org/officeDocument/2006/relationships" xmlns:p="http://schemas.openxmlformats.org/presentationml/2006/main">
   <p:cSld>
     <p:spTree>
@@ -6885,8 +7232,8 @@
           </a:fontRef>
         </p:style>
       </p:cxnSp>
-      <mc:AlternateContent xmlns:mc="http://schemas.openxmlformats.org/markup-compatibility/2006">
-        <mc:Choice xmlns:a14="http://schemas.microsoft.com/office/drawing/2010/main" Requires="a14">
+      <mc:AlternateContent xmlns:mc="http://schemas.openxmlformats.org/markup-compatibility/2006" xmlns:a14="http://schemas.microsoft.com/office/drawing/2010/main">
+        <mc:Choice Requires="a14">
           <p:sp>
             <p:nvSpPr>
               <p:cNvPr id="21" name="文本框 20"/>
@@ -6909,6 +7256,7 @@
               </a:bodyPr>
               <a:lstStyle/>
               <a:p>
+                <a:pPr/>
                 <a14:m>
                   <m:oMathPara xmlns:m="http://schemas.openxmlformats.org/officeDocument/2006/math">
                     <m:oMathParaPr>
@@ -6932,7 +7280,7 @@
             </p:txBody>
           </p:sp>
         </mc:Choice>
-        <mc:Fallback>
+        <mc:Fallback xmlns="">
           <p:sp>
             <p:nvSpPr>
               <p:cNvPr id="21" name="文本框 20"/>
@@ -6950,7 +7298,7 @@
                 <a:avLst/>
               </a:prstGeom>
               <a:blipFill rotWithShape="1">
-                <a:blip r:embed="rId1"/>
+                <a:blip r:embed="rId2"/>
                 <a:stretch>
                   <a:fillRect l="-79" t="-119" r="14" b="54"/>
                 </a:stretch>
@@ -7043,8 +7391,8 @@
           </a:fontRef>
         </p:style>
       </p:cxnSp>
-      <mc:AlternateContent xmlns:mc="http://schemas.openxmlformats.org/markup-compatibility/2006">
-        <mc:Choice xmlns:a14="http://schemas.microsoft.com/office/drawing/2010/main" Requires="a14">
+      <mc:AlternateContent xmlns:mc="http://schemas.openxmlformats.org/markup-compatibility/2006" xmlns:a14="http://schemas.microsoft.com/office/drawing/2010/main">
+        <mc:Choice Requires="a14">
           <p:sp>
             <p:nvSpPr>
               <p:cNvPr id="26" name="文本框 25"/>
@@ -7067,6 +7415,7 @@
               </a:bodyPr>
               <a:lstStyle/>
               <a:p>
+                <a:pPr/>
                 <a14:m>
                   <m:oMathPara xmlns:m="http://schemas.openxmlformats.org/officeDocument/2006/math">
                     <m:oMathParaPr>
@@ -7096,7 +7445,7 @@
             </p:txBody>
           </p:sp>
         </mc:Choice>
-        <mc:Fallback>
+        <mc:Fallback xmlns="">
           <p:sp>
             <p:nvSpPr>
               <p:cNvPr id="26" name="文本框 25"/>
@@ -7114,7 +7463,7 @@
                 <a:avLst/>
               </a:prstGeom>
               <a:blipFill rotWithShape="1">
-                <a:blip r:embed="rId2"/>
+                <a:blip r:embed="rId3"/>
                 <a:stretch>
                   <a:fillRect l="-244" t="-31" r="-14983" b="138"/>
                 </a:stretch>
@@ -7135,8 +7484,8 @@
           </p:sp>
         </mc:Fallback>
       </mc:AlternateContent>
-      <mc:AlternateContent xmlns:mc="http://schemas.openxmlformats.org/markup-compatibility/2006">
-        <mc:Choice xmlns:a14="http://schemas.microsoft.com/office/drawing/2010/main" Requires="a14">
+      <mc:AlternateContent xmlns:mc="http://schemas.openxmlformats.org/markup-compatibility/2006" xmlns:a14="http://schemas.microsoft.com/office/drawing/2010/main">
+        <mc:Choice Requires="a14">
           <p:sp>
             <p:nvSpPr>
               <p:cNvPr id="31" name="文本框 30"/>
@@ -7159,6 +7508,7 @@
               </a:bodyPr>
               <a:lstStyle/>
               <a:p>
+                <a:pPr/>
                 <a14:m>
                   <m:oMathPara xmlns:m="http://schemas.openxmlformats.org/officeDocument/2006/math">
                     <m:oMathParaPr>
@@ -7179,7 +7529,7 @@
             </p:txBody>
           </p:sp>
         </mc:Choice>
-        <mc:Fallback>
+        <mc:Fallback xmlns="">
           <p:sp>
             <p:nvSpPr>
               <p:cNvPr id="31" name="文本框 30"/>
@@ -7197,7 +7547,7 @@
                 <a:avLst/>
               </a:prstGeom>
               <a:blipFill rotWithShape="1">
-                <a:blip r:embed="rId3"/>
+                <a:blip r:embed="rId4"/>
                 <a:stretch>
                   <a:fillRect l="-137" t="-116" r="72" b="51"/>
                 </a:stretch>
@@ -7218,8 +7568,8 @@
           </p:sp>
         </mc:Fallback>
       </mc:AlternateContent>
-      <mc:AlternateContent xmlns:mc="http://schemas.openxmlformats.org/markup-compatibility/2006">
-        <mc:Choice xmlns:a14="http://schemas.microsoft.com/office/drawing/2010/main" Requires="a14">
+      <mc:AlternateContent xmlns:mc="http://schemas.openxmlformats.org/markup-compatibility/2006" xmlns:a14="http://schemas.microsoft.com/office/drawing/2010/main">
+        <mc:Choice Requires="a14">
           <p:sp>
             <p:nvSpPr>
               <p:cNvPr id="32" name="文本框 31"/>
@@ -7242,6 +7592,7 @@
               </a:bodyPr>
               <a:lstStyle/>
               <a:p>
+                <a:pPr/>
                 <a14:m>
                   <m:oMathPara xmlns:m="http://schemas.openxmlformats.org/officeDocument/2006/math">
                     <m:oMathParaPr>
@@ -7262,7 +7613,7 @@
             </p:txBody>
           </p:sp>
         </mc:Choice>
-        <mc:Fallback>
+        <mc:Fallback xmlns="">
           <p:sp>
             <p:nvSpPr>
               <p:cNvPr id="32" name="文本框 31"/>
@@ -7280,7 +7631,7 @@
                 <a:avLst/>
               </a:prstGeom>
               <a:blipFill rotWithShape="1">
-                <a:blip r:embed="rId4"/>
+                <a:blip r:embed="rId5"/>
                 <a:stretch>
                   <a:fillRect l="-16" t="-87" r="226" b="22"/>
                 </a:stretch>
@@ -7301,8 +7652,8 @@
           </p:sp>
         </mc:Fallback>
       </mc:AlternateContent>
-      <mc:AlternateContent xmlns:mc="http://schemas.openxmlformats.org/markup-compatibility/2006">
-        <mc:Choice xmlns:a14="http://schemas.microsoft.com/office/drawing/2010/main" Requires="a14">
+      <mc:AlternateContent xmlns:mc="http://schemas.openxmlformats.org/markup-compatibility/2006" xmlns:a14="http://schemas.microsoft.com/office/drawing/2010/main">
+        <mc:Choice Requires="a14">
           <p:sp>
             <p:nvSpPr>
               <p:cNvPr id="33" name="文本框 32"/>
@@ -7325,6 +7676,7 @@
               </a:bodyPr>
               <a:lstStyle/>
               <a:p>
+                <a:pPr/>
                 <a14:m>
                   <m:oMathPara xmlns:m="http://schemas.openxmlformats.org/officeDocument/2006/math">
                     <m:oMathParaPr>
@@ -7354,7 +7706,7 @@
             </p:txBody>
           </p:sp>
         </mc:Choice>
-        <mc:Fallback>
+        <mc:Fallback xmlns="">
           <p:sp>
             <p:nvSpPr>
               <p:cNvPr id="33" name="文本框 32"/>
@@ -7372,7 +7724,7 @@
                 <a:avLst/>
               </a:prstGeom>
               <a:blipFill rotWithShape="1">
-                <a:blip r:embed="rId5"/>
+                <a:blip r:embed="rId6"/>
                 <a:stretch>
                   <a:fillRect l="-265" t="-29" r="-10275" b="137"/>
                 </a:stretch>
@@ -7393,8 +7745,8 @@
           </p:sp>
         </mc:Fallback>
       </mc:AlternateContent>
-      <mc:AlternateContent xmlns:mc="http://schemas.openxmlformats.org/markup-compatibility/2006">
-        <mc:Choice xmlns:a14="http://schemas.microsoft.com/office/drawing/2010/main" Requires="a14">
+      <mc:AlternateContent xmlns:mc="http://schemas.openxmlformats.org/markup-compatibility/2006" xmlns:a14="http://schemas.microsoft.com/office/drawing/2010/main">
+        <mc:Choice Requires="a14">
           <p:sp>
             <p:nvSpPr>
               <p:cNvPr id="34" name="文本框 33"/>
@@ -7417,6 +7769,7 @@
               </a:bodyPr>
               <a:lstStyle/>
               <a:p>
+                <a:pPr/>
                 <a14:m>
                   <m:oMathPara xmlns:m="http://schemas.openxmlformats.org/officeDocument/2006/math">
                     <m:oMathParaPr>
@@ -7446,7 +7799,7 @@
             </p:txBody>
           </p:sp>
         </mc:Choice>
-        <mc:Fallback>
+        <mc:Fallback xmlns="">
           <p:sp>
             <p:nvSpPr>
               <p:cNvPr id="34" name="文本框 33"/>
@@ -7464,7 +7817,7 @@
                 <a:avLst/>
               </a:prstGeom>
               <a:blipFill rotWithShape="1">
-                <a:blip r:embed="rId6"/>
+                <a:blip r:embed="rId7"/>
                 <a:stretch>
                   <a:fillRect l="-210" t="-109" r="-13087" b="44"/>
                 </a:stretch>
@@ -7766,8 +8119,8 @@
           </a:fontRef>
         </p:style>
       </p:cxnSp>
-      <mc:AlternateContent xmlns:mc="http://schemas.openxmlformats.org/markup-compatibility/2006">
-        <mc:Choice xmlns:a14="http://schemas.microsoft.com/office/drawing/2010/main" Requires="a14">
+      <mc:AlternateContent xmlns:mc="http://schemas.openxmlformats.org/markup-compatibility/2006" xmlns:a14="http://schemas.microsoft.com/office/drawing/2010/main">
+        <mc:Choice Requires="a14">
           <p:sp>
             <p:nvSpPr>
               <p:cNvPr id="43" name="文本框 42"/>
@@ -7790,6 +8143,7 @@
               </a:bodyPr>
               <a:lstStyle/>
               <a:p>
+                <a:pPr/>
                 <a14:m>
                   <m:oMathPara xmlns:m="http://schemas.openxmlformats.org/officeDocument/2006/math">
                     <m:oMathParaPr>
@@ -7813,7 +8167,7 @@
             </p:txBody>
           </p:sp>
         </mc:Choice>
-        <mc:Fallback>
+        <mc:Fallback xmlns="">
           <p:sp>
             <p:nvSpPr>
               <p:cNvPr id="43" name="文本框 42"/>
@@ -7831,7 +8185,7 @@
                 <a:avLst/>
               </a:prstGeom>
               <a:blipFill rotWithShape="1">
-                <a:blip r:embed="rId1"/>
+                <a:blip r:embed="rId2"/>
                 <a:stretch>
                   <a:fillRect l="-160" t="-125" r="95" b="61"/>
                 </a:stretch>
@@ -7924,8 +8278,8 @@
           </a:fontRef>
         </p:style>
       </p:cxnSp>
-      <mc:AlternateContent xmlns:mc="http://schemas.openxmlformats.org/markup-compatibility/2006">
-        <mc:Choice xmlns:a14="http://schemas.microsoft.com/office/drawing/2010/main" Requires="a14">
+      <mc:AlternateContent xmlns:mc="http://schemas.openxmlformats.org/markup-compatibility/2006" xmlns:a14="http://schemas.microsoft.com/office/drawing/2010/main">
+        <mc:Choice Requires="a14">
           <p:sp>
             <p:nvSpPr>
               <p:cNvPr id="48" name="文本框 47"/>
@@ -7948,6 +8302,7 @@
               </a:bodyPr>
               <a:lstStyle/>
               <a:p>
+                <a:pPr/>
                 <a14:m>
                   <m:oMathPara xmlns:m="http://schemas.openxmlformats.org/officeDocument/2006/math">
                     <m:oMathParaPr>
@@ -7977,7 +8332,7 @@
             </p:txBody>
           </p:sp>
         </mc:Choice>
-        <mc:Fallback>
+        <mc:Fallback xmlns="">
           <p:sp>
             <p:nvSpPr>
               <p:cNvPr id="48" name="文本框 47"/>
@@ -7995,7 +8350,7 @@
                 <a:avLst/>
               </a:prstGeom>
               <a:blipFill rotWithShape="1">
-                <a:blip r:embed="rId2"/>
+                <a:blip r:embed="rId3"/>
                 <a:stretch>
                   <a:fillRect l="-166" t="-142" r="-15061" b="77"/>
                 </a:stretch>
@@ -8016,8 +8371,8 @@
           </p:sp>
         </mc:Fallback>
       </mc:AlternateContent>
-      <mc:AlternateContent xmlns:mc="http://schemas.openxmlformats.org/markup-compatibility/2006">
-        <mc:Choice xmlns:a14="http://schemas.microsoft.com/office/drawing/2010/main" Requires="a14">
+      <mc:AlternateContent xmlns:mc="http://schemas.openxmlformats.org/markup-compatibility/2006" xmlns:a14="http://schemas.microsoft.com/office/drawing/2010/main">
+        <mc:Choice Requires="a14">
           <p:sp>
             <p:nvSpPr>
               <p:cNvPr id="49" name="文本框 48"/>
@@ -8040,6 +8395,7 @@
               </a:bodyPr>
               <a:lstStyle/>
               <a:p>
+                <a:pPr/>
                 <a14:m>
                   <m:oMathPara xmlns:m="http://schemas.openxmlformats.org/officeDocument/2006/math">
                     <m:oMathParaPr>
@@ -8060,7 +8416,7 @@
             </p:txBody>
           </p:sp>
         </mc:Choice>
-        <mc:Fallback>
+        <mc:Fallback xmlns="">
           <p:sp>
             <p:nvSpPr>
               <p:cNvPr id="49" name="文本框 48"/>
@@ -8078,7 +8434,7 @@
                 <a:avLst/>
               </a:prstGeom>
               <a:blipFill rotWithShape="1">
-                <a:blip r:embed="rId3"/>
+                <a:blip r:embed="rId4"/>
                 <a:stretch>
                   <a:fillRect l="-137" t="-162" r="72" b="98"/>
                 </a:stretch>
@@ -8099,8 +8455,8 @@
           </p:sp>
         </mc:Fallback>
       </mc:AlternateContent>
-      <mc:AlternateContent xmlns:mc="http://schemas.openxmlformats.org/markup-compatibility/2006">
-        <mc:Choice xmlns:a14="http://schemas.microsoft.com/office/drawing/2010/main" Requires="a14">
+      <mc:AlternateContent xmlns:mc="http://schemas.openxmlformats.org/markup-compatibility/2006" xmlns:a14="http://schemas.microsoft.com/office/drawing/2010/main">
+        <mc:Choice Requires="a14">
           <p:sp>
             <p:nvSpPr>
               <p:cNvPr id="50" name="文本框 49"/>
@@ -8123,6 +8479,7 @@
               </a:bodyPr>
               <a:lstStyle/>
               <a:p>
+                <a:pPr/>
                 <a14:m>
                   <m:oMathPara xmlns:m="http://schemas.openxmlformats.org/officeDocument/2006/math">
                     <m:oMathParaPr>
@@ -8143,7 +8500,7 @@
             </p:txBody>
           </p:sp>
         </mc:Choice>
-        <mc:Fallback>
+        <mc:Fallback xmlns="">
           <p:sp>
             <p:nvSpPr>
               <p:cNvPr id="50" name="文本框 49"/>
@@ -8161,7 +8518,7 @@
                 <a:avLst/>
               </a:prstGeom>
               <a:blipFill rotWithShape="1">
-                <a:blip r:embed="rId4"/>
+                <a:blip r:embed="rId5"/>
                 <a:stretch>
                   <a:fillRect l="-173" t="-16" r="108" b="123"/>
                 </a:stretch>
@@ -8182,8 +8539,8 @@
           </p:sp>
         </mc:Fallback>
       </mc:AlternateContent>
-      <mc:AlternateContent xmlns:mc="http://schemas.openxmlformats.org/markup-compatibility/2006">
-        <mc:Choice xmlns:a14="http://schemas.microsoft.com/office/drawing/2010/main" Requires="a14">
+      <mc:AlternateContent xmlns:mc="http://schemas.openxmlformats.org/markup-compatibility/2006" xmlns:a14="http://schemas.microsoft.com/office/drawing/2010/main">
+        <mc:Choice Requires="a14">
           <p:sp>
             <p:nvSpPr>
               <p:cNvPr id="51" name="文本框 50"/>
@@ -8206,6 +8563,7 @@
               </a:bodyPr>
               <a:lstStyle/>
               <a:p>
+                <a:pPr/>
                 <a14:m>
                   <m:oMathPara xmlns:m="http://schemas.openxmlformats.org/officeDocument/2006/math">
                     <m:oMathParaPr>
@@ -8235,7 +8593,7 @@
             </p:txBody>
           </p:sp>
         </mc:Choice>
-        <mc:Fallback>
+        <mc:Fallback xmlns="">
           <p:sp>
             <p:nvSpPr>
               <p:cNvPr id="51" name="文本框 50"/>
@@ -8253,7 +8611,7 @@
                 <a:avLst/>
               </a:prstGeom>
               <a:blipFill rotWithShape="1">
-                <a:blip r:embed="rId5"/>
+                <a:blip r:embed="rId6"/>
                 <a:stretch>
                   <a:fillRect l="-265" t="-76" r="-10275" b="11"/>
                 </a:stretch>
@@ -8274,8 +8632,8 @@
           </p:sp>
         </mc:Fallback>
       </mc:AlternateContent>
-      <mc:AlternateContent xmlns:mc="http://schemas.openxmlformats.org/markup-compatibility/2006">
-        <mc:Choice xmlns:a14="http://schemas.microsoft.com/office/drawing/2010/main" Requires="a14">
+      <mc:AlternateContent xmlns:mc="http://schemas.openxmlformats.org/markup-compatibility/2006" xmlns:a14="http://schemas.microsoft.com/office/drawing/2010/main">
+        <mc:Choice Requires="a14">
           <p:sp>
             <p:nvSpPr>
               <p:cNvPr id="52" name="文本框 51"/>
@@ -8298,6 +8656,7 @@
               </a:bodyPr>
               <a:lstStyle/>
               <a:p>
+                <a:pPr/>
                 <a14:m>
                   <m:oMathPara xmlns:m="http://schemas.openxmlformats.org/officeDocument/2006/math">
                     <m:oMathParaPr>
@@ -8327,7 +8686,7 @@
             </p:txBody>
           </p:sp>
         </mc:Choice>
-        <mc:Fallback>
+        <mc:Fallback xmlns="">
           <p:sp>
             <p:nvSpPr>
               <p:cNvPr id="52" name="文本框 51"/>
@@ -8345,7 +8704,7 @@
                 <a:avLst/>
               </a:prstGeom>
               <a:blipFill rotWithShape="1">
-                <a:blip r:embed="rId6"/>
+                <a:blip r:embed="rId7"/>
                 <a:stretch>
                   <a:fillRect l="-162" t="-28" r="-13135" b="136"/>
                 </a:stretch>
@@ -8641,8 +9000,8 @@
           </a:fontRef>
         </p:style>
       </p:cxnSp>
-      <mc:AlternateContent xmlns:mc="http://schemas.openxmlformats.org/markup-compatibility/2006">
-        <mc:Choice xmlns:a14="http://schemas.microsoft.com/office/drawing/2010/main" Requires="a14">
+      <mc:AlternateContent xmlns:mc="http://schemas.openxmlformats.org/markup-compatibility/2006" xmlns:a14="http://schemas.microsoft.com/office/drawing/2010/main">
+        <mc:Choice Requires="a14">
           <p:sp>
             <p:nvSpPr>
               <p:cNvPr id="94" name="文本框 93"/>
@@ -8665,6 +9024,7 @@
               </a:bodyPr>
               <a:lstStyle/>
               <a:p>
+                <a:pPr/>
                 <a14:m>
                   <m:oMathPara xmlns:m="http://schemas.openxmlformats.org/officeDocument/2006/math">
                     <m:oMathParaPr>
@@ -8688,7 +9048,7 @@
             </p:txBody>
           </p:sp>
         </mc:Choice>
-        <mc:Fallback>
+        <mc:Fallback xmlns="">
           <p:sp>
             <p:nvSpPr>
               <p:cNvPr id="94" name="文本框 93"/>
@@ -8706,7 +9066,7 @@
                 <a:avLst/>
               </a:prstGeom>
               <a:blipFill rotWithShape="1">
-                <a:blip r:embed="rId1"/>
+                <a:blip r:embed="rId2"/>
                 <a:stretch>
                   <a:fillRect l="-79" t="-119" r="14" b="54"/>
                 </a:stretch>
@@ -8727,8 +9087,8 @@
           </p:sp>
         </mc:Fallback>
       </mc:AlternateContent>
-      <mc:AlternateContent xmlns:mc="http://schemas.openxmlformats.org/markup-compatibility/2006">
-        <mc:Choice xmlns:a14="http://schemas.microsoft.com/office/drawing/2010/main" Requires="a14">
+      <mc:AlternateContent xmlns:mc="http://schemas.openxmlformats.org/markup-compatibility/2006" xmlns:a14="http://schemas.microsoft.com/office/drawing/2010/main">
+        <mc:Choice Requires="a14">
           <p:sp>
             <p:nvSpPr>
               <p:cNvPr id="95" name="文本框 94"/>
@@ -8751,6 +9111,7 @@
               </a:bodyPr>
               <a:lstStyle/>
               <a:p>
+                <a:pPr/>
                 <a14:m>
                   <m:oMathPara xmlns:m="http://schemas.openxmlformats.org/officeDocument/2006/math">
                     <m:oMathParaPr>
@@ -8771,7 +9132,7 @@
             </p:txBody>
           </p:sp>
         </mc:Choice>
-        <mc:Fallback>
+        <mc:Fallback xmlns="">
           <p:sp>
             <p:nvSpPr>
               <p:cNvPr id="95" name="文本框 94"/>
@@ -8789,7 +9150,7 @@
                 <a:avLst/>
               </a:prstGeom>
               <a:blipFill rotWithShape="1">
-                <a:blip r:embed="rId3"/>
+                <a:blip r:embed="rId4"/>
                 <a:stretch>
                   <a:fillRect l="-137" t="-116" r="72" b="51"/>
                 </a:stretch>
@@ -8810,8 +9171,8 @@
           </p:sp>
         </mc:Fallback>
       </mc:AlternateContent>
-      <mc:AlternateContent xmlns:mc="http://schemas.openxmlformats.org/markup-compatibility/2006">
-        <mc:Choice xmlns:a14="http://schemas.microsoft.com/office/drawing/2010/main" Requires="a14">
+      <mc:AlternateContent xmlns:mc="http://schemas.openxmlformats.org/markup-compatibility/2006" xmlns:a14="http://schemas.microsoft.com/office/drawing/2010/main">
+        <mc:Choice Requires="a14">
           <p:sp>
             <p:nvSpPr>
               <p:cNvPr id="96" name="文本框 95"/>
@@ -8834,6 +9195,7 @@
               </a:bodyPr>
               <a:lstStyle/>
               <a:p>
+                <a:pPr/>
                 <a14:m>
                   <m:oMathPara xmlns:m="http://schemas.openxmlformats.org/officeDocument/2006/math">
                     <m:oMathParaPr>
@@ -8854,7 +9216,7 @@
             </p:txBody>
           </p:sp>
         </mc:Choice>
-        <mc:Fallback>
+        <mc:Fallback xmlns="">
           <p:sp>
             <p:nvSpPr>
               <p:cNvPr id="96" name="文本框 95"/>
@@ -8872,7 +9234,7 @@
                 <a:avLst/>
               </a:prstGeom>
               <a:blipFill rotWithShape="1">
-                <a:blip r:embed="rId4"/>
+                <a:blip r:embed="rId5"/>
                 <a:stretch>
                   <a:fillRect l="-16" t="-87" r="226" b="22"/>
                 </a:stretch>
@@ -9091,8 +9453,8 @@
           </a:fontRef>
         </p:style>
       </p:cxnSp>
-      <mc:AlternateContent xmlns:mc="http://schemas.openxmlformats.org/markup-compatibility/2006">
-        <mc:Choice xmlns:a14="http://schemas.microsoft.com/office/drawing/2010/main" Requires="a14">
+      <mc:AlternateContent xmlns:mc="http://schemas.openxmlformats.org/markup-compatibility/2006" xmlns:a14="http://schemas.microsoft.com/office/drawing/2010/main">
+        <mc:Choice Requires="a14">
           <p:sp>
             <p:nvSpPr>
               <p:cNvPr id="102" name="文本框 101"/>
@@ -9115,6 +9477,7 @@
               </a:bodyPr>
               <a:lstStyle/>
               <a:p>
+                <a:pPr/>
                 <a14:m>
                   <m:oMathPara xmlns:m="http://schemas.openxmlformats.org/officeDocument/2006/math">
                     <m:oMathParaPr>
@@ -9144,7 +9507,7 @@
             </p:txBody>
           </p:sp>
         </mc:Choice>
-        <mc:Fallback>
+        <mc:Fallback xmlns="">
           <p:sp>
             <p:nvSpPr>
               <p:cNvPr id="102" name="文本框 101"/>
@@ -9162,7 +9525,7 @@
                 <a:avLst/>
               </a:prstGeom>
               <a:blipFill rotWithShape="1">
-                <a:blip r:embed="rId2"/>
+                <a:blip r:embed="rId3"/>
                 <a:stretch>
                   <a:fillRect l="-61" t="-46" r="-15166" b="154"/>
                 </a:stretch>
@@ -9183,8 +9546,8 @@
           </p:sp>
         </mc:Fallback>
       </mc:AlternateContent>
-      <mc:AlternateContent xmlns:mc="http://schemas.openxmlformats.org/markup-compatibility/2006">
-        <mc:Choice xmlns:a14="http://schemas.microsoft.com/office/drawing/2010/main" Requires="a14">
+      <mc:AlternateContent xmlns:mc="http://schemas.openxmlformats.org/markup-compatibility/2006" xmlns:a14="http://schemas.microsoft.com/office/drawing/2010/main">
+        <mc:Choice Requires="a14">
           <p:sp>
             <p:nvSpPr>
               <p:cNvPr id="103" name="文本框 102"/>
@@ -9207,6 +9570,7 @@
               </a:bodyPr>
               <a:lstStyle/>
               <a:p>
+                <a:pPr/>
                 <a14:m>
                   <m:oMathPara xmlns:m="http://schemas.openxmlformats.org/officeDocument/2006/math">
                     <m:oMathParaPr>
@@ -9236,7 +9600,7 @@
             </p:txBody>
           </p:sp>
         </mc:Choice>
-        <mc:Fallback>
+        <mc:Fallback xmlns="">
           <p:sp>
             <p:nvSpPr>
               <p:cNvPr id="103" name="文本框 102"/>
@@ -9254,7 +9618,7 @@
                 <a:avLst/>
               </a:prstGeom>
               <a:blipFill rotWithShape="1">
-                <a:blip r:embed="rId5"/>
+                <a:blip r:embed="rId6"/>
                 <a:stretch>
                   <a:fillRect l="-265" t="-29" r="-10275" b="137"/>
                 </a:stretch>
@@ -9275,8 +9639,8 @@
           </p:sp>
         </mc:Fallback>
       </mc:AlternateContent>
-      <mc:AlternateContent xmlns:mc="http://schemas.openxmlformats.org/markup-compatibility/2006">
-        <mc:Choice xmlns:a14="http://schemas.microsoft.com/office/drawing/2010/main" Requires="a14">
+      <mc:AlternateContent xmlns:mc="http://schemas.openxmlformats.org/markup-compatibility/2006" xmlns:a14="http://schemas.microsoft.com/office/drawing/2010/main">
+        <mc:Choice Requires="a14">
           <p:sp>
             <p:nvSpPr>
               <p:cNvPr id="104" name="文本框 103"/>
@@ -9299,6 +9663,7 @@
               </a:bodyPr>
               <a:lstStyle/>
               <a:p>
+                <a:pPr/>
                 <a14:m>
                   <m:oMathPara xmlns:m="http://schemas.openxmlformats.org/officeDocument/2006/math">
                     <m:oMathParaPr>
@@ -9328,7 +9693,7 @@
             </p:txBody>
           </p:sp>
         </mc:Choice>
-        <mc:Fallback>
+        <mc:Fallback xmlns="">
           <p:sp>
             <p:nvSpPr>
               <p:cNvPr id="104" name="文本框 103"/>
@@ -9346,7 +9711,7 @@
                 <a:avLst/>
               </a:prstGeom>
               <a:blipFill rotWithShape="1">
-                <a:blip r:embed="rId6"/>
+                <a:blip r:embed="rId7"/>
                 <a:stretch>
                   <a:fillRect l="-63" t="-54" r="-13233" b="162"/>
                 </a:stretch>
@@ -9759,8 +10124,8 @@
           </a:fontRef>
         </p:style>
       </p:cxnSp>
-      <mc:AlternateContent xmlns:mc="http://schemas.openxmlformats.org/markup-compatibility/2006">
-        <mc:Choice xmlns:a14="http://schemas.microsoft.com/office/drawing/2010/main" Requires="a14">
+      <mc:AlternateContent xmlns:mc="http://schemas.openxmlformats.org/markup-compatibility/2006" xmlns:a14="http://schemas.microsoft.com/office/drawing/2010/main">
+        <mc:Choice Requires="a14">
           <p:sp>
             <p:nvSpPr>
               <p:cNvPr id="126" name="文本框 125"/>
@@ -9783,6 +10148,7 @@
               </a:bodyPr>
               <a:lstStyle/>
               <a:p>
+                <a:pPr/>
                 <a14:m>
                   <m:oMathPara xmlns:m="http://schemas.openxmlformats.org/officeDocument/2006/math">
                     <m:oMathParaPr>
@@ -9812,7 +10178,7 @@
             </p:txBody>
           </p:sp>
         </mc:Choice>
-        <mc:Fallback>
+        <mc:Fallback xmlns="">
           <p:sp>
             <p:nvSpPr>
               <p:cNvPr id="126" name="文本框 125"/>
@@ -9830,7 +10196,7 @@
                 <a:avLst/>
               </a:prstGeom>
               <a:blipFill rotWithShape="1">
-                <a:blip r:embed="rId2"/>
+                <a:blip r:embed="rId3"/>
                 <a:stretch>
                   <a:fillRect l="-3" t="-154" r="-15227" b="89"/>
                 </a:stretch>
@@ -9851,8 +10217,8 @@
           </p:sp>
         </mc:Fallback>
       </mc:AlternateContent>
-      <mc:AlternateContent xmlns:mc="http://schemas.openxmlformats.org/markup-compatibility/2006">
-        <mc:Choice xmlns:a14="http://schemas.microsoft.com/office/drawing/2010/main" Requires="a14">
+      <mc:AlternateContent xmlns:mc="http://schemas.openxmlformats.org/markup-compatibility/2006" xmlns:a14="http://schemas.microsoft.com/office/drawing/2010/main">
+        <mc:Choice Requires="a14">
           <p:sp>
             <p:nvSpPr>
               <p:cNvPr id="127" name="文本框 126"/>
@@ -9875,6 +10241,7 @@
               </a:bodyPr>
               <a:lstStyle/>
               <a:p>
+                <a:pPr/>
                 <a14:m>
                   <m:oMathPara xmlns:m="http://schemas.openxmlformats.org/officeDocument/2006/math">
                     <m:oMathParaPr>
@@ -9904,7 +10271,7 @@
             </p:txBody>
           </p:sp>
         </mc:Choice>
-        <mc:Fallback>
+        <mc:Fallback xmlns="">
           <p:sp>
             <p:nvSpPr>
               <p:cNvPr id="127" name="文本框 126"/>
@@ -9922,7 +10289,7 @@
                 <a:avLst/>
               </a:prstGeom>
               <a:blipFill rotWithShape="1">
-                <a:blip r:embed="rId5"/>
+                <a:blip r:embed="rId6"/>
                 <a:stretch>
                   <a:fillRect l="-160" t="-110" r="-10380" b="46"/>
                 </a:stretch>
@@ -9943,8 +10310,8 @@
           </p:sp>
         </mc:Fallback>
       </mc:AlternateContent>
-      <mc:AlternateContent xmlns:mc="http://schemas.openxmlformats.org/markup-compatibility/2006">
-        <mc:Choice xmlns:a14="http://schemas.microsoft.com/office/drawing/2010/main" Requires="a14">
+      <mc:AlternateContent xmlns:mc="http://schemas.openxmlformats.org/markup-compatibility/2006" xmlns:a14="http://schemas.microsoft.com/office/drawing/2010/main">
+        <mc:Choice Requires="a14">
           <p:sp>
             <p:nvSpPr>
               <p:cNvPr id="128" name="文本框 127"/>
@@ -9967,6 +10334,7 @@
               </a:bodyPr>
               <a:lstStyle/>
               <a:p>
+                <a:pPr/>
                 <a14:m>
                   <m:oMathPara xmlns:m="http://schemas.openxmlformats.org/officeDocument/2006/math">
                     <m:oMathParaPr>
@@ -9996,7 +10364,7 @@
             </p:txBody>
           </p:sp>
         </mc:Choice>
-        <mc:Fallback>
+        <mc:Fallback xmlns="">
           <p:sp>
             <p:nvSpPr>
               <p:cNvPr id="128" name="文本框 127"/>
@@ -10014,7 +10382,7 @@
                 <a:avLst/>
               </a:prstGeom>
               <a:blipFill rotWithShape="1">
-                <a:blip r:embed="rId6"/>
+                <a:blip r:embed="rId7"/>
                 <a:stretch>
                   <a:fillRect l="-25" t="-162" r="-13272" b="97"/>
                 </a:stretch>
@@ -10143,8 +10511,8 @@
           </a:fontRef>
         </p:style>
       </p:cxnSp>
-      <mc:AlternateContent xmlns:mc="http://schemas.openxmlformats.org/markup-compatibility/2006">
-        <mc:Choice xmlns:a14="http://schemas.microsoft.com/office/drawing/2010/main" Requires="a14">
+      <mc:AlternateContent xmlns:mc="http://schemas.openxmlformats.org/markup-compatibility/2006" xmlns:a14="http://schemas.microsoft.com/office/drawing/2010/main">
+        <mc:Choice Requires="a14">
           <p:sp>
             <p:nvSpPr>
               <p:cNvPr id="144" name="文本框 143"/>
@@ -10167,6 +10535,7 @@
               </a:bodyPr>
               <a:lstStyle/>
               <a:p>
+                <a:pPr/>
                 <a14:m>
                   <m:oMathPara xmlns:m="http://schemas.openxmlformats.org/officeDocument/2006/math">
                     <m:oMathParaPr>
@@ -10196,7 +10565,7 @@
             </p:txBody>
           </p:sp>
         </mc:Choice>
-        <mc:Fallback>
+        <mc:Fallback xmlns="">
           <p:sp>
             <p:nvSpPr>
               <p:cNvPr id="144" name="文本框 143"/>
@@ -10214,7 +10583,7 @@
                 <a:avLst/>
               </a:prstGeom>
               <a:blipFill rotWithShape="1">
-                <a:blip r:embed="rId7"/>
+                <a:blip r:embed="rId8"/>
                 <a:stretch>
                   <a:fillRect l="-199" t="-40" r="-77312" b="148"/>
                 </a:stretch>
@@ -10235,8 +10604,8 @@
           </p:sp>
         </mc:Fallback>
       </mc:AlternateContent>
-      <mc:AlternateContent xmlns:mc="http://schemas.openxmlformats.org/markup-compatibility/2006">
-        <mc:Choice xmlns:a14="http://schemas.microsoft.com/office/drawing/2010/main" Requires="a14">
+      <mc:AlternateContent xmlns:mc="http://schemas.openxmlformats.org/markup-compatibility/2006" xmlns:a14="http://schemas.microsoft.com/office/drawing/2010/main">
+        <mc:Choice Requires="a14">
           <p:sp>
             <p:nvSpPr>
               <p:cNvPr id="145" name="文本框 144"/>
@@ -10259,6 +10628,7 @@
               </a:bodyPr>
               <a:lstStyle/>
               <a:p>
+                <a:pPr/>
                 <a14:m>
                   <m:oMathPara xmlns:m="http://schemas.openxmlformats.org/officeDocument/2006/math">
                     <m:oMathParaPr>
@@ -10288,7 +10658,7 @@
             </p:txBody>
           </p:sp>
         </mc:Choice>
-        <mc:Fallback>
+        <mc:Fallback xmlns="">
           <p:sp>
             <p:nvSpPr>
               <p:cNvPr id="145" name="文本框 144"/>
@@ -10306,7 +10676,7 @@
                 <a:avLst/>
               </a:prstGeom>
               <a:blipFill rotWithShape="1">
-                <a:blip r:embed="rId5"/>
+                <a:blip r:embed="rId6"/>
                 <a:stretch>
                   <a:fillRect l="-197" t="-138" r="-10344" b="74"/>
                 </a:stretch>
@@ -10327,8 +10697,8 @@
           </p:sp>
         </mc:Fallback>
       </mc:AlternateContent>
-      <mc:AlternateContent xmlns:mc="http://schemas.openxmlformats.org/markup-compatibility/2006">
-        <mc:Choice xmlns:a14="http://schemas.microsoft.com/office/drawing/2010/main" Requires="a14">
+      <mc:AlternateContent xmlns:mc="http://schemas.openxmlformats.org/markup-compatibility/2006" xmlns:a14="http://schemas.microsoft.com/office/drawing/2010/main">
+        <mc:Choice Requires="a14">
           <p:sp>
             <p:nvSpPr>
               <p:cNvPr id="146" name="文本框 145"/>
@@ -10351,6 +10721,7 @@
               </a:bodyPr>
               <a:lstStyle/>
               <a:p>
+                <a:pPr/>
                 <a14:m>
                   <m:oMathPara xmlns:m="http://schemas.openxmlformats.org/officeDocument/2006/math">
                     <m:oMathParaPr>
@@ -10380,7 +10751,7 @@
             </p:txBody>
           </p:sp>
         </mc:Choice>
-        <mc:Fallback>
+        <mc:Fallback xmlns="">
           <p:sp>
             <p:nvSpPr>
               <p:cNvPr id="146" name="文本框 145"/>
@@ -10398,7 +10769,7 @@
                 <a:avLst/>
               </a:prstGeom>
               <a:blipFill rotWithShape="1">
-                <a:blip r:embed="rId6"/>
+                <a:blip r:embed="rId7"/>
                 <a:stretch>
                   <a:fillRect l="-167" t="-87" r="-13130" b="22"/>
                 </a:stretch>
@@ -10494,7 +10865,7 @@
 </p:sld>
 </file>
 
-<file path=ppt/slides/slide3.xml><?xml version="1.0" encoding="utf-8"?>
+<file path=ppt/slides/slide4.xml><?xml version="1.0" encoding="utf-8"?>
 <p:sld xmlns:a="http://schemas.openxmlformats.org/drawingml/2006/main" xmlns:r="http://schemas.openxmlformats.org/officeDocument/2006/relationships" xmlns:p="http://schemas.openxmlformats.org/presentationml/2006/main">
   <p:cSld>
     <p:spTree>
@@ -10904,8 +11275,8 @@
           </a:fontRef>
         </p:style>
       </p:cxnSp>
-      <mc:AlternateContent xmlns:mc="http://schemas.openxmlformats.org/markup-compatibility/2006">
-        <mc:Choice xmlns:a14="http://schemas.microsoft.com/office/drawing/2010/main" Requires="a14">
+      <mc:AlternateContent xmlns:mc="http://schemas.openxmlformats.org/markup-compatibility/2006" xmlns:a14="http://schemas.microsoft.com/office/drawing/2010/main">
+        <mc:Choice Requires="a14">
           <p:sp>
             <p:nvSpPr>
               <p:cNvPr id="32" name="文本框 31"/>
@@ -10928,6 +11299,7 @@
               </a:bodyPr>
               <a:lstStyle/>
               <a:p>
+                <a:pPr/>
                 <a14:m>
                   <m:oMathPara xmlns:m="http://schemas.openxmlformats.org/officeDocument/2006/math">
                     <m:oMathParaPr>
@@ -10975,7 +11347,7 @@
             </p:txBody>
           </p:sp>
         </mc:Choice>
-        <mc:Fallback>
+        <mc:Fallback xmlns="">
           <p:sp>
             <p:nvSpPr>
               <p:cNvPr id="32" name="文本框 31"/>
@@ -10993,7 +11365,7 @@
                 <a:avLst/>
               </a:prstGeom>
               <a:blipFill rotWithShape="1">
-                <a:blip r:embed="rId1"/>
+                <a:blip r:embed="rId2"/>
                 <a:stretch>
                   <a:fillRect l="-38" t="-64" r="38"/>
                 </a:stretch>
@@ -11014,8 +11386,8 @@
           </p:sp>
         </mc:Fallback>
       </mc:AlternateContent>
-      <mc:AlternateContent xmlns:mc="http://schemas.openxmlformats.org/markup-compatibility/2006">
-        <mc:Choice xmlns:a14="http://schemas.microsoft.com/office/drawing/2010/main" Requires="a14">
+      <mc:AlternateContent xmlns:mc="http://schemas.openxmlformats.org/markup-compatibility/2006" xmlns:a14="http://schemas.microsoft.com/office/drawing/2010/main">
+        <mc:Choice Requires="a14">
           <p:sp>
             <p:nvSpPr>
               <p:cNvPr id="33" name="文本框 32"/>
@@ -11038,6 +11410,7 @@
               </a:bodyPr>
               <a:lstStyle/>
               <a:p>
+                <a:pPr/>
                 <a14:m>
                   <m:oMathPara xmlns:m="http://schemas.openxmlformats.org/officeDocument/2006/math">
                     <m:oMathParaPr>
@@ -11077,7 +11450,7 @@
             </p:txBody>
           </p:sp>
         </mc:Choice>
-        <mc:Fallback>
+        <mc:Fallback xmlns="">
           <p:sp>
             <p:nvSpPr>
               <p:cNvPr id="33" name="文本框 32"/>
@@ -11095,7 +11468,7 @@
                 <a:avLst/>
               </a:prstGeom>
               <a:blipFill rotWithShape="1">
-                <a:blip r:embed="rId2"/>
+                <a:blip r:embed="rId3"/>
                 <a:stretch>
                   <a:fillRect l="-38" t="-97" r="38" b="32"/>
                 </a:stretch>
@@ -11124,7 +11497,7 @@
 </p:sld>
 </file>
 
-<file path=ppt/slides/slide4.xml><?xml version="1.0" encoding="utf-8"?>
+<file path=ppt/slides/slide5.xml><?xml version="1.0" encoding="utf-8"?>
 <p:sld xmlns:a="http://schemas.openxmlformats.org/drawingml/2006/main" xmlns:r="http://schemas.openxmlformats.org/officeDocument/2006/relationships" xmlns:p="http://schemas.openxmlformats.org/presentationml/2006/main">
   <p:cSld>
     <p:spTree>
@@ -11401,8 +11774,8 @@
             </p:style>
           </p:cxnSp>
         </p:grpSp>
-        <mc:AlternateContent xmlns:mc="http://schemas.openxmlformats.org/markup-compatibility/2006">
-          <mc:Choice xmlns:a14="http://schemas.microsoft.com/office/drawing/2010/main" Requires="a14">
+        <mc:AlternateContent xmlns:mc="http://schemas.openxmlformats.org/markup-compatibility/2006" xmlns:a14="http://schemas.microsoft.com/office/drawing/2010/main">
+          <mc:Choice Requires="a14">
             <p:sp>
               <p:nvSpPr>
                 <p:cNvPr id="30" name="文本框 29"/>
@@ -11425,6 +11798,7 @@
                 </a:bodyPr>
                 <a:lstStyle/>
                 <a:p>
+                  <a:pPr/>
                   <a14:m>
                     <m:oMathPara xmlns:m="http://schemas.openxmlformats.org/officeDocument/2006/math">
                       <m:oMathParaPr>
@@ -11446,7 +11820,7 @@
               </p:txBody>
             </p:sp>
           </mc:Choice>
-          <mc:Fallback>
+          <mc:Fallback xmlns="">
             <p:sp>
               <p:nvSpPr>
                 <p:cNvPr id="30" name="文本框 29"/>
@@ -11458,87 +11832,6 @@
               <p:spPr>
                 <a:xfrm>
                   <a:off x="604520" y="1707515"/>
-                  <a:ext cx="76200" cy="368300"/>
-                </a:xfrm>
-                <a:prstGeom prst="rect">
-                  <a:avLst/>
-                </a:prstGeom>
-                <a:blipFill rotWithShape="1">
-                  <a:blip r:embed="rId1"/>
-                </a:blipFill>
-              </p:spPr>
-              <p:txBody>
-                <a:bodyPr/>
-                <a:lstStyle/>
-                <a:p>
-                  <a:r>
-                    <a:rPr lang="zh-CN" altLang="en-US">
-                      <a:noFill/>
-                    </a:rPr>
-                    <a:t> </a:t>
-                  </a:r>
-                </a:p>
-              </p:txBody>
-            </p:sp>
-          </mc:Fallback>
-        </mc:AlternateContent>
-        <mc:AlternateContent xmlns:mc="http://schemas.openxmlformats.org/markup-compatibility/2006">
-          <mc:Choice xmlns:a14="http://schemas.microsoft.com/office/drawing/2010/main" Requires="a14">
-            <p:sp>
-              <p:nvSpPr>
-                <p:cNvPr id="31" name="文本框 30"/>
-                <p:cNvSpPr txBox="1"/>
-                <p:nvPr/>
-              </p:nvSpPr>
-              <p:spPr>
-                <a:xfrm>
-                  <a:off x="604520" y="2256790"/>
-                  <a:ext cx="76200" cy="368300"/>
-                </a:xfrm>
-                <a:prstGeom prst="rect">
-                  <a:avLst/>
-                </a:prstGeom>
-                <a:noFill/>
-              </p:spPr>
-              <p:txBody>
-                <a:bodyPr wrap="square" rtlCol="0">
-                  <a:spAutoFit/>
-                </a:bodyPr>
-                <a:lstStyle/>
-                <a:p>
-                  <a14:m>
-                    <m:oMathPara xmlns:m="http://schemas.openxmlformats.org/officeDocument/2006/math">
-                      <m:oMathParaPr>
-                        <m:jc m:val="centerGroup"/>
-                      </m:oMathParaPr>
-                      <m:oMath xmlns:m="http://schemas.openxmlformats.org/officeDocument/2006/math">
-                        <m:r>
-                          <a:rPr lang="en-US" altLang="zh-CN" i="1">
-                            <a:latin typeface="Cambria Math" panose="02040503050406030204" pitchFamily="18" charset="0"/>
-                            <a:cs typeface="Cambria Math" panose="02040503050406030204" pitchFamily="18" charset="0"/>
-                          </a:rPr>
-                          <m:t>𝐵</m:t>
-                        </m:r>
-                      </m:oMath>
-                    </m:oMathPara>
-                  </a14:m>
-                  <a:endParaRPr lang="en-US" altLang="zh-CN"/>
-                </a:p>
-              </p:txBody>
-            </p:sp>
-          </mc:Choice>
-          <mc:Fallback>
-            <p:sp>
-              <p:nvSpPr>
-                <p:cNvPr id="31" name="文本框 30"/>
-                <p:cNvSpPr txBox="1">
-                  <a:spLocks noRot="1" noChangeAspect="1" noMove="1" noResize="1" noEditPoints="1" noAdjustHandles="1" noChangeArrowheads="1" noChangeShapeType="1" noTextEdit="1"/>
-                </p:cNvSpPr>
-                <p:nvPr/>
-              </p:nvSpPr>
-              <p:spPr>
-                <a:xfrm>
-                  <a:off x="604520" y="2256790"/>
                   <a:ext cx="76200" cy="368300"/>
                 </a:xfrm>
                 <a:prstGeom prst="rect">
@@ -11563,8 +11856,90 @@
             </p:sp>
           </mc:Fallback>
         </mc:AlternateContent>
-        <mc:AlternateContent xmlns:mc="http://schemas.openxmlformats.org/markup-compatibility/2006">
-          <mc:Choice xmlns:a14="http://schemas.microsoft.com/office/drawing/2010/main" Requires="a14">
+        <mc:AlternateContent xmlns:mc="http://schemas.openxmlformats.org/markup-compatibility/2006" xmlns:a14="http://schemas.microsoft.com/office/drawing/2010/main">
+          <mc:Choice Requires="a14">
+            <p:sp>
+              <p:nvSpPr>
+                <p:cNvPr id="31" name="文本框 30"/>
+                <p:cNvSpPr txBox="1"/>
+                <p:nvPr/>
+              </p:nvSpPr>
+              <p:spPr>
+                <a:xfrm>
+                  <a:off x="604520" y="2256790"/>
+                  <a:ext cx="76200" cy="368300"/>
+                </a:xfrm>
+                <a:prstGeom prst="rect">
+                  <a:avLst/>
+                </a:prstGeom>
+                <a:noFill/>
+              </p:spPr>
+              <p:txBody>
+                <a:bodyPr wrap="square" rtlCol="0">
+                  <a:spAutoFit/>
+                </a:bodyPr>
+                <a:lstStyle/>
+                <a:p>
+                  <a:pPr/>
+                  <a14:m>
+                    <m:oMathPara xmlns:m="http://schemas.openxmlformats.org/officeDocument/2006/math">
+                      <m:oMathParaPr>
+                        <m:jc m:val="centerGroup"/>
+                      </m:oMathParaPr>
+                      <m:oMath xmlns:m="http://schemas.openxmlformats.org/officeDocument/2006/math">
+                        <m:r>
+                          <a:rPr lang="en-US" altLang="zh-CN" i="1">
+                            <a:latin typeface="Cambria Math" panose="02040503050406030204" pitchFamily="18" charset="0"/>
+                            <a:cs typeface="Cambria Math" panose="02040503050406030204" pitchFamily="18" charset="0"/>
+                          </a:rPr>
+                          <m:t>𝐵</m:t>
+                        </m:r>
+                      </m:oMath>
+                    </m:oMathPara>
+                  </a14:m>
+                  <a:endParaRPr lang="en-US" altLang="zh-CN"/>
+                </a:p>
+              </p:txBody>
+            </p:sp>
+          </mc:Choice>
+          <mc:Fallback xmlns="">
+            <p:sp>
+              <p:nvSpPr>
+                <p:cNvPr id="31" name="文本框 30"/>
+                <p:cNvSpPr txBox="1">
+                  <a:spLocks noRot="1" noChangeAspect="1" noMove="1" noResize="1" noEditPoints="1" noAdjustHandles="1" noChangeArrowheads="1" noChangeShapeType="1" noTextEdit="1"/>
+                </p:cNvSpPr>
+                <p:nvPr/>
+              </p:nvSpPr>
+              <p:spPr>
+                <a:xfrm>
+                  <a:off x="604520" y="2256790"/>
+                  <a:ext cx="76200" cy="368300"/>
+                </a:xfrm>
+                <a:prstGeom prst="rect">
+                  <a:avLst/>
+                </a:prstGeom>
+                <a:blipFill rotWithShape="1">
+                  <a:blip r:embed="rId3"/>
+                </a:blipFill>
+              </p:spPr>
+              <p:txBody>
+                <a:bodyPr/>
+                <a:lstStyle/>
+                <a:p>
+                  <a:r>
+                    <a:rPr lang="zh-CN" altLang="en-US">
+                      <a:noFill/>
+                    </a:rPr>
+                    <a:t> </a:t>
+                  </a:r>
+                </a:p>
+              </p:txBody>
+            </p:sp>
+          </mc:Fallback>
+        </mc:AlternateContent>
+        <mc:AlternateContent xmlns:mc="http://schemas.openxmlformats.org/markup-compatibility/2006" xmlns:a14="http://schemas.microsoft.com/office/drawing/2010/main">
+          <mc:Choice Requires="a14">
             <p:sp>
               <p:nvSpPr>
                 <p:cNvPr id="33" name="文本框 32"/>
@@ -11587,6 +11962,7 @@
                 </a:bodyPr>
                 <a:lstStyle/>
                 <a:p>
+                  <a:pPr/>
                   <a14:m>
                     <m:oMathPara xmlns:m="http://schemas.openxmlformats.org/officeDocument/2006/math">
                       <m:oMathParaPr>
@@ -11637,6 +12013,7 @@
                   </a:endParaRPr>
                 </a:p>
                 <a:p>
+                  <a:pPr/>
                   <a14:m>
                     <m:oMathPara xmlns:m="http://schemas.openxmlformats.org/officeDocument/2006/math">
                       <m:oMathParaPr>
@@ -11661,7 +12038,7 @@
               </p:txBody>
             </p:sp>
           </mc:Choice>
-          <mc:Fallback>
+          <mc:Fallback xmlns="">
             <p:sp>
               <p:nvSpPr>
                 <p:cNvPr id="33" name="文本框 32"/>
@@ -11679,7 +12056,7 @@
                   <a:avLst/>
                 </a:prstGeom>
                 <a:blipFill rotWithShape="1">
-                  <a:blip r:embed="rId3"/>
+                  <a:blip r:embed="rId4"/>
                 </a:blipFill>
               </p:spPr>
               <p:txBody>
@@ -11969,8 +12346,8 @@
             </a:fontRef>
           </p:style>
         </p:cxnSp>
-        <mc:AlternateContent xmlns:mc="http://schemas.openxmlformats.org/markup-compatibility/2006">
-          <mc:Choice xmlns:a14="http://schemas.microsoft.com/office/drawing/2010/main" Requires="a14">
+        <mc:AlternateContent xmlns:mc="http://schemas.openxmlformats.org/markup-compatibility/2006" xmlns:a14="http://schemas.microsoft.com/office/drawing/2010/main">
+          <mc:Choice Requires="a14">
             <p:sp>
               <p:nvSpPr>
                 <p:cNvPr id="39" name="文本框 38"/>
@@ -11993,6 +12370,7 @@
                 </a:bodyPr>
                 <a:lstStyle/>
                 <a:p>
+                  <a:pPr/>
                   <a14:m>
                     <m:oMathPara xmlns:m="http://schemas.openxmlformats.org/officeDocument/2006/math">
                       <m:oMathParaPr>
@@ -12014,7 +12392,7 @@
               </p:txBody>
             </p:sp>
           </mc:Choice>
-          <mc:Fallback>
+          <mc:Fallback xmlns="">
             <p:sp>
               <p:nvSpPr>
                 <p:cNvPr id="39" name="文本框 38"/>
@@ -12026,87 +12404,6 @@
               <p:spPr>
                 <a:xfrm>
                   <a:off x="518160" y="3523615"/>
-                  <a:ext cx="76200" cy="368300"/>
-                </a:xfrm>
-                <a:prstGeom prst="rect">
-                  <a:avLst/>
-                </a:prstGeom>
-                <a:blipFill rotWithShape="1">
-                  <a:blip r:embed="rId1"/>
-                </a:blipFill>
-              </p:spPr>
-              <p:txBody>
-                <a:bodyPr/>
-                <a:lstStyle/>
-                <a:p>
-                  <a:r>
-                    <a:rPr lang="zh-CN" altLang="en-US">
-                      <a:noFill/>
-                    </a:rPr>
-                    <a:t> </a:t>
-                  </a:r>
-                </a:p>
-              </p:txBody>
-            </p:sp>
-          </mc:Fallback>
-        </mc:AlternateContent>
-        <mc:AlternateContent xmlns:mc="http://schemas.openxmlformats.org/markup-compatibility/2006">
-          <mc:Choice xmlns:a14="http://schemas.microsoft.com/office/drawing/2010/main" Requires="a14">
-            <p:sp>
-              <p:nvSpPr>
-                <p:cNvPr id="40" name="文本框 39"/>
-                <p:cNvSpPr txBox="1"/>
-                <p:nvPr/>
-              </p:nvSpPr>
-              <p:spPr>
-                <a:xfrm>
-                  <a:off x="518160" y="4072890"/>
-                  <a:ext cx="76200" cy="368300"/>
-                </a:xfrm>
-                <a:prstGeom prst="rect">
-                  <a:avLst/>
-                </a:prstGeom>
-                <a:noFill/>
-              </p:spPr>
-              <p:txBody>
-                <a:bodyPr wrap="square" rtlCol="0">
-                  <a:spAutoFit/>
-                </a:bodyPr>
-                <a:lstStyle/>
-                <a:p>
-                  <a14:m>
-                    <m:oMathPara xmlns:m="http://schemas.openxmlformats.org/officeDocument/2006/math">
-                      <m:oMathParaPr>
-                        <m:jc m:val="centerGroup"/>
-                      </m:oMathParaPr>
-                      <m:oMath xmlns:m="http://schemas.openxmlformats.org/officeDocument/2006/math">
-                        <m:r>
-                          <a:rPr lang="en-US" altLang="zh-CN" i="1">
-                            <a:latin typeface="Cambria Math" panose="02040503050406030204" pitchFamily="18" charset="0"/>
-                            <a:cs typeface="Cambria Math" panose="02040503050406030204" pitchFamily="18" charset="0"/>
-                          </a:rPr>
-                          <m:t>𝐵</m:t>
-                        </m:r>
-                      </m:oMath>
-                    </m:oMathPara>
-                  </a14:m>
-                  <a:endParaRPr lang="en-US" altLang="zh-CN"/>
-                </a:p>
-              </p:txBody>
-            </p:sp>
-          </mc:Choice>
-          <mc:Fallback>
-            <p:sp>
-              <p:nvSpPr>
-                <p:cNvPr id="40" name="文本框 39"/>
-                <p:cNvSpPr txBox="1">
-                  <a:spLocks noRot="1" noChangeAspect="1" noMove="1" noResize="1" noEditPoints="1" noAdjustHandles="1" noChangeArrowheads="1" noChangeShapeType="1" noTextEdit="1"/>
-                </p:cNvSpPr>
-                <p:nvPr/>
-              </p:nvSpPr>
-              <p:spPr>
-                <a:xfrm>
-                  <a:off x="518160" y="4072890"/>
                   <a:ext cx="76200" cy="368300"/>
                 </a:xfrm>
                 <a:prstGeom prst="rect">
@@ -12131,8 +12428,90 @@
             </p:sp>
           </mc:Fallback>
         </mc:AlternateContent>
-        <mc:AlternateContent xmlns:mc="http://schemas.openxmlformats.org/markup-compatibility/2006">
-          <mc:Choice xmlns:a14="http://schemas.microsoft.com/office/drawing/2010/main" Requires="a14">
+        <mc:AlternateContent xmlns:mc="http://schemas.openxmlformats.org/markup-compatibility/2006" xmlns:a14="http://schemas.microsoft.com/office/drawing/2010/main">
+          <mc:Choice Requires="a14">
+            <p:sp>
+              <p:nvSpPr>
+                <p:cNvPr id="40" name="文本框 39"/>
+                <p:cNvSpPr txBox="1"/>
+                <p:nvPr/>
+              </p:nvSpPr>
+              <p:spPr>
+                <a:xfrm>
+                  <a:off x="518160" y="4072890"/>
+                  <a:ext cx="76200" cy="368300"/>
+                </a:xfrm>
+                <a:prstGeom prst="rect">
+                  <a:avLst/>
+                </a:prstGeom>
+                <a:noFill/>
+              </p:spPr>
+              <p:txBody>
+                <a:bodyPr wrap="square" rtlCol="0">
+                  <a:spAutoFit/>
+                </a:bodyPr>
+                <a:lstStyle/>
+                <a:p>
+                  <a:pPr/>
+                  <a14:m>
+                    <m:oMathPara xmlns:m="http://schemas.openxmlformats.org/officeDocument/2006/math">
+                      <m:oMathParaPr>
+                        <m:jc m:val="centerGroup"/>
+                      </m:oMathParaPr>
+                      <m:oMath xmlns:m="http://schemas.openxmlformats.org/officeDocument/2006/math">
+                        <m:r>
+                          <a:rPr lang="en-US" altLang="zh-CN" i="1">
+                            <a:latin typeface="Cambria Math" panose="02040503050406030204" pitchFamily="18" charset="0"/>
+                            <a:cs typeface="Cambria Math" panose="02040503050406030204" pitchFamily="18" charset="0"/>
+                          </a:rPr>
+                          <m:t>𝐵</m:t>
+                        </m:r>
+                      </m:oMath>
+                    </m:oMathPara>
+                  </a14:m>
+                  <a:endParaRPr lang="en-US" altLang="zh-CN"/>
+                </a:p>
+              </p:txBody>
+            </p:sp>
+          </mc:Choice>
+          <mc:Fallback xmlns="">
+            <p:sp>
+              <p:nvSpPr>
+                <p:cNvPr id="40" name="文本框 39"/>
+                <p:cNvSpPr txBox="1">
+                  <a:spLocks noRot="1" noChangeAspect="1" noMove="1" noResize="1" noEditPoints="1" noAdjustHandles="1" noChangeArrowheads="1" noChangeShapeType="1" noTextEdit="1"/>
+                </p:cNvSpPr>
+                <p:nvPr/>
+              </p:nvSpPr>
+              <p:spPr>
+                <a:xfrm>
+                  <a:off x="518160" y="4072890"/>
+                  <a:ext cx="76200" cy="368300"/>
+                </a:xfrm>
+                <a:prstGeom prst="rect">
+                  <a:avLst/>
+                </a:prstGeom>
+                <a:blipFill rotWithShape="1">
+                  <a:blip r:embed="rId3"/>
+                </a:blipFill>
+              </p:spPr>
+              <p:txBody>
+                <a:bodyPr/>
+                <a:lstStyle/>
+                <a:p>
+                  <a:r>
+                    <a:rPr lang="zh-CN" altLang="en-US">
+                      <a:noFill/>
+                    </a:rPr>
+                    <a:t> </a:t>
+                  </a:r>
+                </a:p>
+              </p:txBody>
+            </p:sp>
+          </mc:Fallback>
+        </mc:AlternateContent>
+        <mc:AlternateContent xmlns:mc="http://schemas.openxmlformats.org/markup-compatibility/2006" xmlns:a14="http://schemas.microsoft.com/office/drawing/2010/main">
+          <mc:Choice Requires="a14">
             <p:sp>
               <p:nvSpPr>
                 <p:cNvPr id="41" name="文本框 40"/>
@@ -12155,6 +12534,7 @@
                 </a:bodyPr>
                 <a:lstStyle/>
                 <a:p>
+                  <a:pPr/>
                   <a14:m>
                     <m:oMathPara xmlns:m="http://schemas.openxmlformats.org/officeDocument/2006/math">
                       <m:oMathParaPr>
@@ -12205,6 +12585,7 @@
                   </a:endParaRPr>
                 </a:p>
                 <a:p>
+                  <a:pPr/>
                   <a14:m>
                     <m:oMathPara xmlns:m="http://schemas.openxmlformats.org/officeDocument/2006/math">
                       <m:oMathParaPr>
@@ -12229,7 +12610,7 @@
               </p:txBody>
             </p:sp>
           </mc:Choice>
-          <mc:Fallback>
+          <mc:Fallback xmlns="">
             <p:sp>
               <p:nvSpPr>
                 <p:cNvPr id="41" name="文本框 40"/>
@@ -12247,7 +12628,7 @@
                   <a:avLst/>
                 </a:prstGeom>
                 <a:blipFill rotWithShape="1">
-                  <a:blip r:embed="rId4"/>
+                  <a:blip r:embed="rId5"/>
                 </a:blipFill>
               </p:spPr>
               <p:txBody>
@@ -12442,8 +12823,8 @@
             </a:fontRef>
           </p:style>
         </p:cxnSp>
-        <mc:AlternateContent xmlns:mc="http://schemas.openxmlformats.org/markup-compatibility/2006">
-          <mc:Choice xmlns:a14="http://schemas.microsoft.com/office/drawing/2010/main" Requires="a14">
+        <mc:AlternateContent xmlns:mc="http://schemas.openxmlformats.org/markup-compatibility/2006" xmlns:a14="http://schemas.microsoft.com/office/drawing/2010/main">
+          <mc:Choice Requires="a14">
             <p:sp>
               <p:nvSpPr>
                 <p:cNvPr id="53" name="文本框 52"/>
@@ -12466,6 +12847,7 @@
                 </a:bodyPr>
                 <a:lstStyle/>
                 <a:p>
+                  <a:pPr/>
                   <a14:m>
                     <m:oMathPara xmlns:m="http://schemas.openxmlformats.org/officeDocument/2006/math">
                       <m:oMathParaPr>
@@ -12487,7 +12869,7 @@
               </p:txBody>
             </p:sp>
           </mc:Choice>
-          <mc:Fallback>
+          <mc:Fallback xmlns="">
             <p:sp>
               <p:nvSpPr>
                 <p:cNvPr id="53" name="文本框 52"/>
@@ -12505,7 +12887,7 @@
                   <a:avLst/>
                 </a:prstGeom>
                 <a:blipFill rotWithShape="1">
-                  <a:blip r:embed="rId1"/>
+                  <a:blip r:embed="rId2"/>
                 </a:blipFill>
               </p:spPr>
               <p:txBody>
@@ -12523,8 +12905,8 @@
             </p:sp>
           </mc:Fallback>
         </mc:AlternateContent>
-        <mc:AlternateContent xmlns:mc="http://schemas.openxmlformats.org/markup-compatibility/2006">
-          <mc:Choice xmlns:a14="http://schemas.microsoft.com/office/drawing/2010/main" Requires="a14">
+        <mc:AlternateContent xmlns:mc="http://schemas.openxmlformats.org/markup-compatibility/2006" xmlns:a14="http://schemas.microsoft.com/office/drawing/2010/main">
+          <mc:Choice Requires="a14">
             <p:sp>
               <p:nvSpPr>
                 <p:cNvPr id="55" name="文本框 54"/>
@@ -12547,6 +12929,7 @@
                 </a:bodyPr>
                 <a:lstStyle/>
                 <a:p>
+                  <a:pPr/>
                   <a14:m>
                     <m:oMathPara xmlns:m="http://schemas.openxmlformats.org/officeDocument/2006/math">
                       <m:oMathParaPr>
@@ -12602,6 +12985,7 @@
                   </a:endParaRPr>
                 </a:p>
                 <a:p>
+                  <a:pPr/>
                   <a14:m>
                     <m:oMathPara xmlns:m="http://schemas.openxmlformats.org/officeDocument/2006/math">
                       <m:oMathParaPr>
@@ -12626,7 +13010,7 @@
               </p:txBody>
             </p:sp>
           </mc:Choice>
-          <mc:Fallback>
+          <mc:Fallback xmlns="">
             <p:sp>
               <p:nvSpPr>
                 <p:cNvPr id="55" name="文本框 54"/>
@@ -12644,7 +13028,7 @@
                   <a:avLst/>
                 </a:prstGeom>
                 <a:blipFill rotWithShape="1">
-                  <a:blip r:embed="rId5"/>
+                  <a:blip r:embed="rId6"/>
                 </a:blipFill>
               </p:spPr>
               <p:txBody>
@@ -12920,8 +13304,8 @@
           </a:fontRef>
         </p:style>
       </p:cxnSp>
-      <mc:AlternateContent xmlns:mc="http://schemas.openxmlformats.org/markup-compatibility/2006">
-        <mc:Choice xmlns:a14="http://schemas.microsoft.com/office/drawing/2010/main" Requires="a14">
+      <mc:AlternateContent xmlns:mc="http://schemas.openxmlformats.org/markup-compatibility/2006" xmlns:a14="http://schemas.microsoft.com/office/drawing/2010/main">
+        <mc:Choice Requires="a14">
           <p:sp>
             <p:nvSpPr>
               <p:cNvPr id="11" name="文本框 10"/>
@@ -12944,6 +13328,7 @@
               </a:bodyPr>
               <a:lstStyle/>
               <a:p>
+                <a:pPr/>
                 <a14:m>
                   <m:oMathPara xmlns:m="http://schemas.openxmlformats.org/officeDocument/2006/math">
                     <m:oMathParaPr>
@@ -12965,7 +13350,7 @@
             </p:txBody>
           </p:sp>
         </mc:Choice>
-        <mc:Fallback>
+        <mc:Fallback xmlns="">
           <p:sp>
             <p:nvSpPr>
               <p:cNvPr id="11" name="文本框 10"/>
@@ -12983,7 +13368,7 @@
                 <a:avLst/>
               </a:prstGeom>
               <a:blipFill rotWithShape="1">
-                <a:blip r:embed="rId1"/>
+                <a:blip r:embed="rId2"/>
                 <a:stretch>
                   <a:fillRect l="-657" t="-86" r="-139343" b="86"/>
                 </a:stretch>
@@ -13004,8 +13389,8 @@
           </p:sp>
         </mc:Fallback>
       </mc:AlternateContent>
-      <mc:AlternateContent xmlns:mc="http://schemas.openxmlformats.org/markup-compatibility/2006">
-        <mc:Choice xmlns:a14="http://schemas.microsoft.com/office/drawing/2010/main" Requires="a14">
+      <mc:AlternateContent xmlns:mc="http://schemas.openxmlformats.org/markup-compatibility/2006" xmlns:a14="http://schemas.microsoft.com/office/drawing/2010/main">
+        <mc:Choice Requires="a14">
           <p:sp>
             <p:nvSpPr>
               <p:cNvPr id="12" name="文本框 11"/>
@@ -13028,6 +13413,7 @@
               </a:bodyPr>
               <a:lstStyle/>
               <a:p>
+                <a:pPr/>
                 <a14:m>
                   <m:oMathPara xmlns:m="http://schemas.openxmlformats.org/officeDocument/2006/math">
                     <m:oMathParaPr>
@@ -13049,7 +13435,7 @@
             </p:txBody>
           </p:sp>
         </mc:Choice>
-        <mc:Fallback>
+        <mc:Fallback xmlns="">
           <p:sp>
             <p:nvSpPr>
               <p:cNvPr id="12" name="文本框 11"/>
@@ -13067,7 +13453,7 @@
                 <a:avLst/>
               </a:prstGeom>
               <a:blipFill rotWithShape="1">
-                <a:blip r:embed="rId2"/>
+                <a:blip r:embed="rId3"/>
                 <a:stretch>
                   <a:fillRect l="-657" t="-86" r="-146009" b="86"/>
                 </a:stretch>
@@ -13088,8 +13474,8 @@
           </p:sp>
         </mc:Fallback>
       </mc:AlternateContent>
-      <mc:AlternateContent xmlns:mc="http://schemas.openxmlformats.org/markup-compatibility/2006">
-        <mc:Choice xmlns:a14="http://schemas.microsoft.com/office/drawing/2010/main" Requires="a14">
+      <mc:AlternateContent xmlns:mc="http://schemas.openxmlformats.org/markup-compatibility/2006" xmlns:a14="http://schemas.microsoft.com/office/drawing/2010/main">
+        <mc:Choice Requires="a14">
           <p:sp>
             <p:nvSpPr>
               <p:cNvPr id="13" name="文本框 12"/>
@@ -13112,6 +13498,7 @@
               </a:bodyPr>
               <a:lstStyle/>
               <a:p>
+                <a:pPr/>
                 <a14:m>
                   <m:oMathPara xmlns:m="http://schemas.openxmlformats.org/officeDocument/2006/math">
                     <m:oMathParaPr>
@@ -13162,6 +13549,7 @@
                 </a:endParaRPr>
               </a:p>
               <a:p>
+                <a:pPr/>
                 <a14:m>
                   <m:oMathPara xmlns:m="http://schemas.openxmlformats.org/officeDocument/2006/math">
                     <m:oMathParaPr>
@@ -13186,7 +13574,7 @@
             </p:txBody>
           </p:sp>
         </mc:Choice>
-        <mc:Fallback>
+        <mc:Fallback xmlns="">
           <p:sp>
             <p:nvSpPr>
               <p:cNvPr id="13" name="文本框 12"/>
@@ -13204,7 +13592,7 @@
                 <a:avLst/>
               </a:prstGeom>
               <a:blipFill rotWithShape="1">
-                <a:blip r:embed="rId4"/>
+                <a:blip r:embed="rId5"/>
                 <a:stretch>
                   <a:fillRect l="-28" t="-80" r="28" b="-49680"/>
                 </a:stretch>
@@ -13279,7 +13667,7 @@
 </p:sld>
 </file>
 
-<file path=ppt/slides/slide5.xml><?xml version="1.0" encoding="utf-8"?>
+<file path=ppt/slides/slide6.xml><?xml version="1.0" encoding="utf-8"?>
 <p:sld xmlns:a="http://schemas.openxmlformats.org/drawingml/2006/main" xmlns:r="http://schemas.openxmlformats.org/officeDocument/2006/relationships" xmlns:p="http://schemas.openxmlformats.org/presentationml/2006/main">
   <p:cSld>
     <p:spTree>
@@ -13518,8 +13906,8 @@
           </a:fontRef>
         </p:style>
       </p:cxnSp>
-      <mc:AlternateContent xmlns:mc="http://schemas.openxmlformats.org/markup-compatibility/2006">
-        <mc:Choice xmlns:a14="http://schemas.microsoft.com/office/drawing/2010/main" Requires="a14">
+      <mc:AlternateContent xmlns:mc="http://schemas.openxmlformats.org/markup-compatibility/2006" xmlns:a14="http://schemas.microsoft.com/office/drawing/2010/main">
+        <mc:Choice Requires="a14">
           <p:sp>
             <p:nvSpPr>
               <p:cNvPr id="6" name="文本框 5"/>
@@ -13542,6 +13930,7 @@
               </a:bodyPr>
               <a:lstStyle/>
               <a:p>
+                <a:pPr/>
                 <a14:m>
                   <m:oMathPara xmlns:m="http://schemas.openxmlformats.org/officeDocument/2006/math">
                     <m:oMathParaPr>
@@ -13563,7 +13952,7 @@
             </p:txBody>
           </p:sp>
         </mc:Choice>
-        <mc:Fallback>
+        <mc:Fallback xmlns="">
           <p:sp>
             <p:nvSpPr>
               <p:cNvPr id="6" name="文本框 5"/>
@@ -13581,7 +13970,7 @@
                 <a:avLst/>
               </a:prstGeom>
               <a:blipFill rotWithShape="1">
-                <a:blip r:embed="rId1"/>
+                <a:blip r:embed="rId2"/>
                 <a:stretch>
                   <a:fillRect l="-657" t="-86" r="-139343" b="86"/>
                 </a:stretch>
@@ -13602,8 +13991,8 @@
           </p:sp>
         </mc:Fallback>
       </mc:AlternateContent>
-      <mc:AlternateContent xmlns:mc="http://schemas.openxmlformats.org/markup-compatibility/2006">
-        <mc:Choice xmlns:a14="http://schemas.microsoft.com/office/drawing/2010/main" Requires="a14">
+      <mc:AlternateContent xmlns:mc="http://schemas.openxmlformats.org/markup-compatibility/2006" xmlns:a14="http://schemas.microsoft.com/office/drawing/2010/main">
+        <mc:Choice Requires="a14">
           <p:sp>
             <p:nvSpPr>
               <p:cNvPr id="7" name="文本框 6"/>
@@ -13626,6 +14015,7 @@
               </a:bodyPr>
               <a:lstStyle/>
               <a:p>
+                <a:pPr/>
                 <a14:m>
                   <m:oMathPara xmlns:m="http://schemas.openxmlformats.org/officeDocument/2006/math">
                     <m:oMathParaPr>
@@ -13647,7 +14037,7 @@
             </p:txBody>
           </p:sp>
         </mc:Choice>
-        <mc:Fallback>
+        <mc:Fallback xmlns="">
           <p:sp>
             <p:nvSpPr>
               <p:cNvPr id="7" name="文本框 6"/>
@@ -13665,7 +14055,7 @@
                 <a:avLst/>
               </a:prstGeom>
               <a:blipFill rotWithShape="1">
-                <a:blip r:embed="rId2"/>
+                <a:blip r:embed="rId3"/>
                 <a:stretch>
                   <a:fillRect l="-657" t="-86" r="-146009" b="86"/>
                 </a:stretch>
@@ -13686,8 +14076,8 @@
           </p:sp>
         </mc:Fallback>
       </mc:AlternateContent>
-      <mc:AlternateContent xmlns:mc="http://schemas.openxmlformats.org/markup-compatibility/2006">
-        <mc:Choice xmlns:a14="http://schemas.microsoft.com/office/drawing/2010/main" Requires="a14">
+      <mc:AlternateContent xmlns:mc="http://schemas.openxmlformats.org/markup-compatibility/2006" xmlns:a14="http://schemas.microsoft.com/office/drawing/2010/main">
+        <mc:Choice Requires="a14">
           <p:sp>
             <p:nvSpPr>
               <p:cNvPr id="8" name="文本框 7"/>
@@ -13710,6 +14100,7 @@
               </a:bodyPr>
               <a:lstStyle/>
               <a:p>
+                <a:pPr/>
                 <a14:m>
                   <m:oMathPara xmlns:m="http://schemas.openxmlformats.org/officeDocument/2006/math">
                     <m:oMathParaPr>
@@ -13732,6 +14123,7 @@
                 </a:endParaRPr>
               </a:p>
               <a:p>
+                <a:pPr/>
                 <a14:m>
                   <m:oMathPara xmlns:m="http://schemas.openxmlformats.org/officeDocument/2006/math">
                     <m:oMathParaPr>
@@ -13756,7 +14148,7 @@
             </p:txBody>
           </p:sp>
         </mc:Choice>
-        <mc:Fallback>
+        <mc:Fallback xmlns="">
           <p:sp>
             <p:nvSpPr>
               <p:cNvPr id="8" name="文本框 7"/>
@@ -13774,7 +14166,7 @@
                 <a:avLst/>
               </a:prstGeom>
               <a:blipFill rotWithShape="1">
-                <a:blip r:embed="rId3"/>
+                <a:blip r:embed="rId4"/>
                 <a:stretch>
                   <a:fillRect l="-28" t="-31" r="28" b="-49729"/>
                 </a:stretch>
@@ -14063,8 +14455,8 @@
           </a:fontRef>
         </p:style>
       </p:cxnSp>
-      <mc:AlternateContent xmlns:mc="http://schemas.openxmlformats.org/markup-compatibility/2006">
-        <mc:Choice xmlns:a14="http://schemas.microsoft.com/office/drawing/2010/main" Requires="a14">
+      <mc:AlternateContent xmlns:mc="http://schemas.openxmlformats.org/markup-compatibility/2006" xmlns:a14="http://schemas.microsoft.com/office/drawing/2010/main">
+        <mc:Choice Requires="a14">
           <p:sp>
             <p:nvSpPr>
               <p:cNvPr id="15" name="文本框 14"/>
@@ -14087,6 +14479,7 @@
               </a:bodyPr>
               <a:lstStyle/>
               <a:p>
+                <a:pPr/>
                 <a14:m>
                   <m:oMathPara xmlns:m="http://schemas.openxmlformats.org/officeDocument/2006/math">
                     <m:oMathParaPr>
@@ -14108,7 +14501,7 @@
             </p:txBody>
           </p:sp>
         </mc:Choice>
-        <mc:Fallback>
+        <mc:Fallback xmlns="">
           <p:sp>
             <p:nvSpPr>
               <p:cNvPr id="15" name="文本框 14"/>
@@ -14126,7 +14519,7 @@
                 <a:avLst/>
               </a:prstGeom>
               <a:blipFill rotWithShape="1">
-                <a:blip r:embed="rId4"/>
+                <a:blip r:embed="rId5"/>
                 <a:stretch>
                   <a:fillRect l="-14" t="-86" r="42" b="86"/>
                 </a:stretch>
@@ -14147,8 +14540,8 @@
           </p:sp>
         </mc:Fallback>
       </mc:AlternateContent>
-      <mc:AlternateContent xmlns:mc="http://schemas.openxmlformats.org/markup-compatibility/2006">
-        <mc:Choice xmlns:a14="http://schemas.microsoft.com/office/drawing/2010/main" Requires="a14">
+      <mc:AlternateContent xmlns:mc="http://schemas.openxmlformats.org/markup-compatibility/2006" xmlns:a14="http://schemas.microsoft.com/office/drawing/2010/main">
+        <mc:Choice Requires="a14">
           <p:sp>
             <p:nvSpPr>
               <p:cNvPr id="16" name="文本框 15"/>
@@ -14171,6 +14564,7 @@
               </a:bodyPr>
               <a:lstStyle/>
               <a:p>
+                <a:pPr/>
                 <a14:m>
                   <m:oMathPara xmlns:m="http://schemas.openxmlformats.org/officeDocument/2006/math">
                     <m:oMathParaPr>
@@ -14193,6 +14587,7 @@
                 </a:endParaRPr>
               </a:p>
               <a:p>
+                <a:pPr/>
                 <a14:m>
                   <m:oMathPara xmlns:m="http://schemas.openxmlformats.org/officeDocument/2006/math">
                     <m:oMathParaPr>
@@ -14217,7 +14612,7 @@
             </p:txBody>
           </p:sp>
         </mc:Choice>
-        <mc:Fallback>
+        <mc:Fallback xmlns="">
           <p:sp>
             <p:nvSpPr>
               <p:cNvPr id="16" name="文本框 15"/>
@@ -14235,7 +14630,7 @@
                 <a:avLst/>
               </a:prstGeom>
               <a:blipFill rotWithShape="1">
-                <a:blip r:embed="rId5"/>
+                <a:blip r:embed="rId6"/>
                 <a:stretch>
                   <a:fillRect l="-28" t="-70" r="28" b="-49690"/>
                 </a:stretch>
@@ -14347,7 +14742,7 @@
 </p:sld>
 </file>
 
-<file path=ppt/slides/slide6.xml><?xml version="1.0" encoding="utf-8"?>
+<file path=ppt/slides/slide7.xml><?xml version="1.0" encoding="utf-8"?>
 <p:sld xmlns:a="http://schemas.openxmlformats.org/drawingml/2006/main" xmlns:r="http://schemas.openxmlformats.org/officeDocument/2006/relationships" xmlns:p="http://schemas.openxmlformats.org/presentationml/2006/main">
   <p:cSld>
     <p:spTree>
@@ -14418,6 +14813,7 @@
           </p:style>
           <p:txBody>
             <a:bodyPr rtlCol="0" anchor="ctr"/>
+            <a:lstStyle/>
             <a:p>
               <a:pPr algn="ctr"/>
               <a:endParaRPr lang="zh-CN" altLang="en-US"/>
@@ -14464,6 +14860,7 @@
           </p:style>
           <p:txBody>
             <a:bodyPr rtlCol="0" anchor="ctr"/>
+            <a:lstStyle/>
             <a:p>
               <a:pPr algn="ctr"/>
               <a:endParaRPr lang="zh-CN" altLang="en-US"/>
@@ -14567,6 +14964,7 @@
           <a:bodyPr wrap="square" rtlCol="0" anchor="ctr">
             <a:noAutofit/>
           </a:bodyPr>
+          <a:lstStyle/>
           <a:p>
             <a:pPr algn="ctr"/>
             <a:endParaRPr lang="zh-CN" altLang="en-US"/>
@@ -14655,6 +15053,7 @@
           <a:bodyPr wrap="square" rtlCol="0" anchor="ctr">
             <a:noAutofit/>
           </a:bodyPr>
+          <a:lstStyle/>
           <a:p>
             <a:pPr algn="ctr"/>
             <a:endParaRPr lang="zh-CN" altLang="en-US"/>
@@ -14701,6 +15100,7 @@
         </p:style>
         <p:txBody>
           <a:bodyPr rtlCol="0" anchor="ctr"/>
+          <a:lstStyle/>
           <a:p>
             <a:pPr algn="ctr"/>
             <a:endParaRPr lang="zh-CN" altLang="en-US"/>
@@ -14747,37 +15147,13 @@
         </p:style>
         <p:txBody>
           <a:bodyPr rtlCol="0" anchor="ctr"/>
+          <a:lstStyle/>
           <a:p>
             <a:pPr algn="ctr"/>
             <a:endParaRPr lang="zh-CN" altLang="en-US"/>
           </a:p>
         </p:txBody>
       </p:sp>
-    </p:spTree>
-  </p:cSld>
-  <p:clrMapOvr>
-    <a:masterClrMapping/>
-  </p:clrMapOvr>
-</p:sld>
-</file>
-
-<file path=ppt/slides/slide7.xml><?xml version="1.0" encoding="utf-8"?>
-<p:sld xmlns:a="http://schemas.openxmlformats.org/drawingml/2006/main" xmlns:r="http://schemas.openxmlformats.org/officeDocument/2006/relationships" xmlns:p="http://schemas.openxmlformats.org/presentationml/2006/main">
-  <p:cSld>
-    <p:spTree>
-      <p:nvGrpSpPr>
-        <p:cNvPr id="1" name=""/>
-        <p:cNvGrpSpPr/>
-        <p:nvPr/>
-      </p:nvGrpSpPr>
-      <p:grpSpPr>
-        <a:xfrm>
-          <a:off x="0" y="0"/>
-          <a:ext cx="0" cy="0"/>
-          <a:chOff x="0" y="0"/>
-          <a:chExt cx="0" cy="0"/>
-        </a:xfrm>
-      </p:grpSpPr>
     </p:spTree>
   </p:cSld>
   <p:clrMapOvr>
@@ -14812,7 +15188,7 @@
 </file>
 
 <file path=ppt/tags/tag1.xml><?xml version="1.0" encoding="utf-8"?>
-<p:tagLst xmlns:p="http://schemas.openxmlformats.org/presentationml/2006/main">
+<p:tagLst xmlns:a="http://schemas.openxmlformats.org/drawingml/2006/main" xmlns:r="http://schemas.openxmlformats.org/officeDocument/2006/relationships" xmlns:p="http://schemas.openxmlformats.org/presentationml/2006/main">
   <p:tag name="COMMONDATA" val="eyJoZGlkIjoiMWNkOTg5MjZlZjEzNTdlYjk5YTg3ZTczZTZlMGJkOGMifQ=="/>
 </p:tagLst>
 </file>
@@ -15068,6 +15444,8 @@
       </a:bgFillStyleLst>
     </a:fmtScheme>
   </a:themeElements>
+  <a:objectDefaults/>
+  <a:extraClrSchemeLst/>
   <a:extLst>
     <a:ext uri="{05A4C25C-085E-4340-85A3-A5531E510DB2}">
       <thm15:themeFamily xmlns:thm15="http://schemas.microsoft.com/office/thememl/2012/main" name="Office Theme" id="{62F939B6-93AF-4DB8-9C6B-D6C7DFDC589F}" vid="{4A3C46E8-61CC-4603-A589-7422A47A8E4A}"/>
@@ -15327,6 +15705,8 @@
       </a:bgFillStyleLst>
     </a:fmtScheme>
   </a:themeElements>
+  <a:objectDefaults/>
+  <a:extraClrSchemeLst/>
   <a:extLst>
     <a:ext uri="{05A4C25C-085E-4340-85A3-A5531E510DB2}">
       <thm15:themeFamily xmlns:thm15="http://schemas.microsoft.com/office/thememl/2012/main" name="Office Theme" id="{62F939B6-93AF-4DB8-9C6B-D6C7DFDC589F}" vid="{4A3C46E8-61CC-4603-A589-7422A47A8E4A}"/>
